--- a/Final/Figures/dipole(same).pptx
+++ b/Final/Figures/dipole(same).pptx
@@ -2,13 +2,13 @@
 <file path=ppt/presentation.xml><?xml version="1.0" encoding="utf-8"?>
 <p:presentation xmlns:a="http://schemas.openxmlformats.org/drawingml/2006/main" xmlns:r="http://schemas.openxmlformats.org/officeDocument/2006/relationships" xmlns:p="http://schemas.openxmlformats.org/presentationml/2006/main" saveSubsetFonts="1">
   <p:sldMasterIdLst>
-    <p:sldMasterId id="2147483792" r:id="rId1"/>
+    <p:sldMasterId id="2147483840" r:id="rId1"/>
   </p:sldMasterIdLst>
   <p:sldIdLst>
     <p:sldId id="259" r:id="rId2"/>
     <p:sldId id="260" r:id="rId3"/>
   </p:sldIdLst>
-  <p:sldSz cx="14760575" cy="4140200"/>
+  <p:sldSz cx="9906000" cy="2735263"/>
   <p:notesSz cx="6858000" cy="9144000"/>
   <p:defaultTextStyle>
     <a:defPPr>
@@ -142,15 +142,15 @@
         </p:nvSpPr>
         <p:spPr>
           <a:xfrm>
-            <a:off x="1845072" y="677575"/>
-            <a:ext cx="11070431" cy="1441403"/>
+            <a:off x="1238250" y="447646"/>
+            <a:ext cx="7429500" cy="952277"/>
           </a:xfrm>
         </p:spPr>
         <p:txBody>
           <a:bodyPr anchor="b"/>
           <a:lstStyle>
             <a:lvl1pPr algn="ctr">
-              <a:defRPr sz="3622"/>
+              <a:defRPr sz="2393"/>
             </a:lvl1pPr>
           </a:lstStyle>
           <a:p>
@@ -174,8 +174,8 @@
         </p:nvSpPr>
         <p:spPr>
           <a:xfrm>
-            <a:off x="1845072" y="2174564"/>
-            <a:ext cx="11070431" cy="999590"/>
+            <a:off x="1238250" y="1436646"/>
+            <a:ext cx="7429500" cy="660389"/>
           </a:xfrm>
         </p:spPr>
         <p:txBody>
@@ -183,39 +183,39 @@
           <a:lstStyle>
             <a:lvl1pPr marL="0" indent="0" algn="ctr">
               <a:buNone/>
-              <a:defRPr sz="1449"/>
+              <a:defRPr sz="957"/>
             </a:lvl1pPr>
-            <a:lvl2pPr marL="276012" indent="0" algn="ctr">
+            <a:lvl2pPr marL="182331" indent="0" algn="ctr">
               <a:buNone/>
-              <a:defRPr sz="1207"/>
+              <a:defRPr sz="798"/>
             </a:lvl2pPr>
-            <a:lvl3pPr marL="552023" indent="0" algn="ctr">
+            <a:lvl3pPr marL="364663" indent="0" algn="ctr">
               <a:buNone/>
-              <a:defRPr sz="1087"/>
+              <a:defRPr sz="718"/>
             </a:lvl3pPr>
-            <a:lvl4pPr marL="828035" indent="0" algn="ctr">
+            <a:lvl4pPr marL="546994" indent="0" algn="ctr">
               <a:buNone/>
-              <a:defRPr sz="966"/>
+              <a:defRPr sz="638"/>
             </a:lvl4pPr>
-            <a:lvl5pPr marL="1104047" indent="0" algn="ctr">
+            <a:lvl5pPr marL="729325" indent="0" algn="ctr">
               <a:buNone/>
-              <a:defRPr sz="966"/>
+              <a:defRPr sz="638"/>
             </a:lvl5pPr>
-            <a:lvl6pPr marL="1380058" indent="0" algn="ctr">
+            <a:lvl6pPr marL="911657" indent="0" algn="ctr">
               <a:buNone/>
-              <a:defRPr sz="966"/>
+              <a:defRPr sz="638"/>
             </a:lvl6pPr>
-            <a:lvl7pPr marL="1656070" indent="0" algn="ctr">
+            <a:lvl7pPr marL="1093988" indent="0" algn="ctr">
               <a:buNone/>
-              <a:defRPr sz="966"/>
+              <a:defRPr sz="638"/>
             </a:lvl7pPr>
-            <a:lvl8pPr marL="1932081" indent="0" algn="ctr">
+            <a:lvl8pPr marL="1276320" indent="0" algn="ctr">
               <a:buNone/>
-              <a:defRPr sz="966"/>
+              <a:defRPr sz="638"/>
             </a:lvl8pPr>
-            <a:lvl9pPr marL="2208093" indent="0" algn="ctr">
+            <a:lvl9pPr marL="1458651" indent="0" algn="ctr">
               <a:buNone/>
-              <a:defRPr sz="966"/>
+              <a:defRPr sz="638"/>
             </a:lvl9pPr>
           </a:lstStyle>
           <a:p>
@@ -244,7 +244,7 @@
           <a:p>
             <a:fld id="{306DA3B7-5B64-4C08-AEF8-96FFEFD7A1CA}" type="datetimeFigureOut">
               <a:rPr lang="zh-TW" altLang="en-US" smtClean="0"/>
-              <a:t>2026/4/28</a:t>
+              <a:t>2026/5/21</a:t>
             </a:fld>
             <a:endParaRPr lang="zh-TW" altLang="en-US"/>
           </a:p>
@@ -295,7 +295,7 @@
     </p:spTree>
     <p:extLst>
       <p:ext uri="{BB962C8B-B14F-4D97-AF65-F5344CB8AC3E}">
-        <p14:creationId xmlns:p14="http://schemas.microsoft.com/office/powerpoint/2010/main" val="872675163"/>
+        <p14:creationId xmlns:p14="http://schemas.microsoft.com/office/powerpoint/2010/main" val="92789827"/>
       </p:ext>
     </p:extLst>
   </p:cSld>
@@ -414,7 +414,7 @@
           <a:p>
             <a:fld id="{306DA3B7-5B64-4C08-AEF8-96FFEFD7A1CA}" type="datetimeFigureOut">
               <a:rPr lang="zh-TW" altLang="en-US" smtClean="0"/>
-              <a:t>2026/4/28</a:t>
+              <a:t>2026/5/21</a:t>
             </a:fld>
             <a:endParaRPr lang="zh-TW" altLang="en-US"/>
           </a:p>
@@ -465,7 +465,7 @@
     </p:spTree>
     <p:extLst>
       <p:ext uri="{BB962C8B-B14F-4D97-AF65-F5344CB8AC3E}">
-        <p14:creationId xmlns:p14="http://schemas.microsoft.com/office/powerpoint/2010/main" val="3222333169"/>
+        <p14:creationId xmlns:p14="http://schemas.microsoft.com/office/powerpoint/2010/main" val="2848233757"/>
       </p:ext>
     </p:extLst>
   </p:cSld>
@@ -504,8 +504,8 @@
         </p:nvSpPr>
         <p:spPr>
           <a:xfrm>
-            <a:off x="10563036" y="220427"/>
-            <a:ext cx="3182749" cy="3508628"/>
+            <a:off x="7088981" y="145627"/>
+            <a:ext cx="2135981" cy="2318009"/>
           </a:xfrm>
         </p:spPr>
         <p:txBody>
@@ -532,8 +532,8 @@
         </p:nvSpPr>
         <p:spPr>
           <a:xfrm>
-            <a:off x="1014789" y="220427"/>
-            <a:ext cx="9363740" cy="3508628"/>
+            <a:off x="681037" y="145627"/>
+            <a:ext cx="6284119" cy="2318009"/>
           </a:xfrm>
         </p:spPr>
         <p:txBody>
@@ -594,7 +594,7 @@
           <a:p>
             <a:fld id="{306DA3B7-5B64-4C08-AEF8-96FFEFD7A1CA}" type="datetimeFigureOut">
               <a:rPr lang="zh-TW" altLang="en-US" smtClean="0"/>
-              <a:t>2026/4/28</a:t>
+              <a:t>2026/5/21</a:t>
             </a:fld>
             <a:endParaRPr lang="zh-TW" altLang="en-US"/>
           </a:p>
@@ -645,7 +645,7 @@
     </p:spTree>
     <p:extLst>
       <p:ext uri="{BB962C8B-B14F-4D97-AF65-F5344CB8AC3E}">
-        <p14:creationId xmlns:p14="http://schemas.microsoft.com/office/powerpoint/2010/main" val="1037861727"/>
+        <p14:creationId xmlns:p14="http://schemas.microsoft.com/office/powerpoint/2010/main" val="1842494048"/>
       </p:ext>
     </p:extLst>
   </p:cSld>
@@ -764,7 +764,7 @@
           <a:p>
             <a:fld id="{306DA3B7-5B64-4C08-AEF8-96FFEFD7A1CA}" type="datetimeFigureOut">
               <a:rPr lang="zh-TW" altLang="en-US" smtClean="0"/>
-              <a:t>2026/4/28</a:t>
+              <a:t>2026/5/21</a:t>
             </a:fld>
             <a:endParaRPr lang="zh-TW" altLang="en-US"/>
           </a:p>
@@ -815,7 +815,7 @@
     </p:spTree>
     <p:extLst>
       <p:ext uri="{BB962C8B-B14F-4D97-AF65-F5344CB8AC3E}">
-        <p14:creationId xmlns:p14="http://schemas.microsoft.com/office/powerpoint/2010/main" val="525133569"/>
+        <p14:creationId xmlns:p14="http://schemas.microsoft.com/office/powerpoint/2010/main" val="3177168587"/>
       </p:ext>
     </p:extLst>
   </p:cSld>
@@ -854,15 +854,15 @@
         </p:nvSpPr>
         <p:spPr>
           <a:xfrm>
-            <a:off x="1007102" y="1032175"/>
-            <a:ext cx="12730996" cy="1722208"/>
+            <a:off x="675878" y="681917"/>
+            <a:ext cx="8543925" cy="1137793"/>
           </a:xfrm>
         </p:spPr>
         <p:txBody>
           <a:bodyPr anchor="b"/>
           <a:lstStyle>
             <a:lvl1pPr>
-              <a:defRPr sz="3622"/>
+              <a:defRPr sz="2393"/>
             </a:lvl1pPr>
           </a:lstStyle>
           <a:p>
@@ -886,8 +886,8 @@
         </p:nvSpPr>
         <p:spPr>
           <a:xfrm>
-            <a:off x="1007102" y="2770676"/>
-            <a:ext cx="12730996" cy="905668"/>
+            <a:off x="675878" y="1830474"/>
+            <a:ext cx="8543925" cy="598339"/>
           </a:xfrm>
         </p:spPr>
         <p:txBody>
@@ -895,7 +895,7 @@
           <a:lstStyle>
             <a:lvl1pPr marL="0" indent="0">
               <a:buNone/>
-              <a:defRPr sz="1449">
+              <a:defRPr sz="957">
                 <a:solidFill>
                   <a:schemeClr val="tx1">
                     <a:tint val="75000"/>
@@ -903,9 +903,9 @@
                 </a:solidFill>
               </a:defRPr>
             </a:lvl1pPr>
-            <a:lvl2pPr marL="276012" indent="0">
+            <a:lvl2pPr marL="182331" indent="0">
               <a:buNone/>
-              <a:defRPr sz="1207">
+              <a:defRPr sz="798">
                 <a:solidFill>
                   <a:schemeClr val="tx1">
                     <a:tint val="75000"/>
@@ -913,9 +913,9 @@
                 </a:solidFill>
               </a:defRPr>
             </a:lvl2pPr>
-            <a:lvl3pPr marL="552023" indent="0">
+            <a:lvl3pPr marL="364663" indent="0">
               <a:buNone/>
-              <a:defRPr sz="1087">
+              <a:defRPr sz="718">
                 <a:solidFill>
                   <a:schemeClr val="tx1">
                     <a:tint val="75000"/>
@@ -923,9 +923,9 @@
                 </a:solidFill>
               </a:defRPr>
             </a:lvl3pPr>
-            <a:lvl4pPr marL="828035" indent="0">
+            <a:lvl4pPr marL="546994" indent="0">
               <a:buNone/>
-              <a:defRPr sz="966">
+              <a:defRPr sz="638">
                 <a:solidFill>
                   <a:schemeClr val="tx1">
                     <a:tint val="75000"/>
@@ -933,9 +933,9 @@
                 </a:solidFill>
               </a:defRPr>
             </a:lvl4pPr>
-            <a:lvl5pPr marL="1104047" indent="0">
+            <a:lvl5pPr marL="729325" indent="0">
               <a:buNone/>
-              <a:defRPr sz="966">
+              <a:defRPr sz="638">
                 <a:solidFill>
                   <a:schemeClr val="tx1">
                     <a:tint val="75000"/>
@@ -943,9 +943,9 @@
                 </a:solidFill>
               </a:defRPr>
             </a:lvl5pPr>
-            <a:lvl6pPr marL="1380058" indent="0">
+            <a:lvl6pPr marL="911657" indent="0">
               <a:buNone/>
-              <a:defRPr sz="966">
+              <a:defRPr sz="638">
                 <a:solidFill>
                   <a:schemeClr val="tx1">
                     <a:tint val="75000"/>
@@ -953,9 +953,9 @@
                 </a:solidFill>
               </a:defRPr>
             </a:lvl6pPr>
-            <a:lvl7pPr marL="1656070" indent="0">
+            <a:lvl7pPr marL="1093988" indent="0">
               <a:buNone/>
-              <a:defRPr sz="966">
+              <a:defRPr sz="638">
                 <a:solidFill>
                   <a:schemeClr val="tx1">
                     <a:tint val="75000"/>
@@ -963,9 +963,9 @@
                 </a:solidFill>
               </a:defRPr>
             </a:lvl7pPr>
-            <a:lvl8pPr marL="1932081" indent="0">
+            <a:lvl8pPr marL="1276320" indent="0">
               <a:buNone/>
-              <a:defRPr sz="966">
+              <a:defRPr sz="638">
                 <a:solidFill>
                   <a:schemeClr val="tx1">
                     <a:tint val="75000"/>
@@ -973,9 +973,9 @@
                 </a:solidFill>
               </a:defRPr>
             </a:lvl8pPr>
-            <a:lvl9pPr marL="2208093" indent="0">
+            <a:lvl9pPr marL="1458651" indent="0">
               <a:buNone/>
-              <a:defRPr sz="966">
+              <a:defRPr sz="638">
                 <a:solidFill>
                   <a:schemeClr val="tx1">
                     <a:tint val="75000"/>
@@ -1010,7 +1010,7 @@
           <a:p>
             <a:fld id="{306DA3B7-5B64-4C08-AEF8-96FFEFD7A1CA}" type="datetimeFigureOut">
               <a:rPr lang="zh-TW" altLang="en-US" smtClean="0"/>
-              <a:t>2026/4/28</a:t>
+              <a:t>2026/5/21</a:t>
             </a:fld>
             <a:endParaRPr lang="zh-TW" altLang="en-US"/>
           </a:p>
@@ -1061,7 +1061,7 @@
     </p:spTree>
     <p:extLst>
       <p:ext uri="{BB962C8B-B14F-4D97-AF65-F5344CB8AC3E}">
-        <p14:creationId xmlns:p14="http://schemas.microsoft.com/office/powerpoint/2010/main" val="2242534271"/>
+        <p14:creationId xmlns:p14="http://schemas.microsoft.com/office/powerpoint/2010/main" val="3059948576"/>
       </p:ext>
     </p:extLst>
   </p:cSld>
@@ -1123,8 +1123,8 @@
         </p:nvSpPr>
         <p:spPr>
           <a:xfrm>
-            <a:off x="1014790" y="1102137"/>
-            <a:ext cx="6273244" cy="2626919"/>
+            <a:off x="681038" y="728137"/>
+            <a:ext cx="4210050" cy="1735499"/>
           </a:xfrm>
         </p:spPr>
         <p:txBody>
@@ -1180,8 +1180,8 @@
         </p:nvSpPr>
         <p:spPr>
           <a:xfrm>
-            <a:off x="7472541" y="1102137"/>
-            <a:ext cx="6273244" cy="2626919"/>
+            <a:off x="5014913" y="728137"/>
+            <a:ext cx="4210050" cy="1735499"/>
           </a:xfrm>
         </p:spPr>
         <p:txBody>
@@ -1242,7 +1242,7 @@
           <a:p>
             <a:fld id="{306DA3B7-5B64-4C08-AEF8-96FFEFD7A1CA}" type="datetimeFigureOut">
               <a:rPr lang="zh-TW" altLang="en-US" smtClean="0"/>
-              <a:t>2026/4/28</a:t>
+              <a:t>2026/5/21</a:t>
             </a:fld>
             <a:endParaRPr lang="zh-TW" altLang="en-US"/>
           </a:p>
@@ -1293,7 +1293,7 @@
     </p:spTree>
     <p:extLst>
       <p:ext uri="{BB962C8B-B14F-4D97-AF65-F5344CB8AC3E}">
-        <p14:creationId xmlns:p14="http://schemas.microsoft.com/office/powerpoint/2010/main" val="297852166"/>
+        <p14:creationId xmlns:p14="http://schemas.microsoft.com/office/powerpoint/2010/main" val="3414563458"/>
       </p:ext>
     </p:extLst>
   </p:cSld>
@@ -1332,8 +1332,8 @@
         </p:nvSpPr>
         <p:spPr>
           <a:xfrm>
-            <a:off x="1016712" y="220428"/>
-            <a:ext cx="12730996" cy="800247"/>
+            <a:off x="682328" y="145628"/>
+            <a:ext cx="8543925" cy="528691"/>
           </a:xfrm>
         </p:spPr>
         <p:txBody>
@@ -1360,8 +1360,8 @@
         </p:nvSpPr>
         <p:spPr>
           <a:xfrm>
-            <a:off x="1016712" y="1014924"/>
-            <a:ext cx="6244415" cy="497399"/>
+            <a:off x="682328" y="670520"/>
+            <a:ext cx="4190702" cy="328611"/>
           </a:xfrm>
         </p:spPr>
         <p:txBody>
@@ -1369,39 +1369,39 @@
           <a:lstStyle>
             <a:lvl1pPr marL="0" indent="0">
               <a:buNone/>
-              <a:defRPr sz="1449" b="1"/>
+              <a:defRPr sz="957" b="1"/>
             </a:lvl1pPr>
-            <a:lvl2pPr marL="276012" indent="0">
+            <a:lvl2pPr marL="182331" indent="0">
               <a:buNone/>
-              <a:defRPr sz="1207" b="1"/>
+              <a:defRPr sz="798" b="1"/>
             </a:lvl2pPr>
-            <a:lvl3pPr marL="552023" indent="0">
+            <a:lvl3pPr marL="364663" indent="0">
               <a:buNone/>
-              <a:defRPr sz="1087" b="1"/>
+              <a:defRPr sz="718" b="1"/>
             </a:lvl3pPr>
-            <a:lvl4pPr marL="828035" indent="0">
+            <a:lvl4pPr marL="546994" indent="0">
               <a:buNone/>
-              <a:defRPr sz="966" b="1"/>
+              <a:defRPr sz="638" b="1"/>
             </a:lvl4pPr>
-            <a:lvl5pPr marL="1104047" indent="0">
+            <a:lvl5pPr marL="729325" indent="0">
               <a:buNone/>
-              <a:defRPr sz="966" b="1"/>
+              <a:defRPr sz="638" b="1"/>
             </a:lvl5pPr>
-            <a:lvl6pPr marL="1380058" indent="0">
+            <a:lvl6pPr marL="911657" indent="0">
               <a:buNone/>
-              <a:defRPr sz="966" b="1"/>
+              <a:defRPr sz="638" b="1"/>
             </a:lvl6pPr>
-            <a:lvl7pPr marL="1656070" indent="0">
+            <a:lvl7pPr marL="1093988" indent="0">
               <a:buNone/>
-              <a:defRPr sz="966" b="1"/>
+              <a:defRPr sz="638" b="1"/>
             </a:lvl7pPr>
-            <a:lvl8pPr marL="1932081" indent="0">
+            <a:lvl8pPr marL="1276320" indent="0">
               <a:buNone/>
-              <a:defRPr sz="966" b="1"/>
+              <a:defRPr sz="638" b="1"/>
             </a:lvl8pPr>
-            <a:lvl9pPr marL="2208093" indent="0">
+            <a:lvl9pPr marL="1458651" indent="0">
               <a:buNone/>
-              <a:defRPr sz="966" b="1"/>
+              <a:defRPr sz="638" b="1"/>
             </a:lvl9pPr>
           </a:lstStyle>
           <a:p>
@@ -1425,8 +1425,8 @@
         </p:nvSpPr>
         <p:spPr>
           <a:xfrm>
-            <a:off x="1016712" y="1512323"/>
-            <a:ext cx="6244415" cy="2224399"/>
+            <a:off x="682328" y="999131"/>
+            <a:ext cx="4190702" cy="1469571"/>
           </a:xfrm>
         </p:spPr>
         <p:txBody>
@@ -1482,8 +1482,8 @@
         </p:nvSpPr>
         <p:spPr>
           <a:xfrm>
-            <a:off x="7472541" y="1014924"/>
-            <a:ext cx="6275167" cy="497399"/>
+            <a:off x="5014913" y="670520"/>
+            <a:ext cx="4211340" cy="328611"/>
           </a:xfrm>
         </p:spPr>
         <p:txBody>
@@ -1491,39 +1491,39 @@
           <a:lstStyle>
             <a:lvl1pPr marL="0" indent="0">
               <a:buNone/>
-              <a:defRPr sz="1449" b="1"/>
+              <a:defRPr sz="957" b="1"/>
             </a:lvl1pPr>
-            <a:lvl2pPr marL="276012" indent="0">
+            <a:lvl2pPr marL="182331" indent="0">
               <a:buNone/>
-              <a:defRPr sz="1207" b="1"/>
+              <a:defRPr sz="798" b="1"/>
             </a:lvl2pPr>
-            <a:lvl3pPr marL="552023" indent="0">
+            <a:lvl3pPr marL="364663" indent="0">
               <a:buNone/>
-              <a:defRPr sz="1087" b="1"/>
+              <a:defRPr sz="718" b="1"/>
             </a:lvl3pPr>
-            <a:lvl4pPr marL="828035" indent="0">
+            <a:lvl4pPr marL="546994" indent="0">
               <a:buNone/>
-              <a:defRPr sz="966" b="1"/>
+              <a:defRPr sz="638" b="1"/>
             </a:lvl4pPr>
-            <a:lvl5pPr marL="1104047" indent="0">
+            <a:lvl5pPr marL="729325" indent="0">
               <a:buNone/>
-              <a:defRPr sz="966" b="1"/>
+              <a:defRPr sz="638" b="1"/>
             </a:lvl5pPr>
-            <a:lvl6pPr marL="1380058" indent="0">
+            <a:lvl6pPr marL="911657" indent="0">
               <a:buNone/>
-              <a:defRPr sz="966" b="1"/>
+              <a:defRPr sz="638" b="1"/>
             </a:lvl6pPr>
-            <a:lvl7pPr marL="1656070" indent="0">
+            <a:lvl7pPr marL="1093988" indent="0">
               <a:buNone/>
-              <a:defRPr sz="966" b="1"/>
+              <a:defRPr sz="638" b="1"/>
             </a:lvl7pPr>
-            <a:lvl8pPr marL="1932081" indent="0">
+            <a:lvl8pPr marL="1276320" indent="0">
               <a:buNone/>
-              <a:defRPr sz="966" b="1"/>
+              <a:defRPr sz="638" b="1"/>
             </a:lvl8pPr>
-            <a:lvl9pPr marL="2208093" indent="0">
+            <a:lvl9pPr marL="1458651" indent="0">
               <a:buNone/>
-              <a:defRPr sz="966" b="1"/>
+              <a:defRPr sz="638" b="1"/>
             </a:lvl9pPr>
           </a:lstStyle>
           <a:p>
@@ -1547,8 +1547,8 @@
         </p:nvSpPr>
         <p:spPr>
           <a:xfrm>
-            <a:off x="7472541" y="1512323"/>
-            <a:ext cx="6275167" cy="2224399"/>
+            <a:off x="5014913" y="999131"/>
+            <a:ext cx="4211340" cy="1469571"/>
           </a:xfrm>
         </p:spPr>
         <p:txBody>
@@ -1609,7 +1609,7 @@
           <a:p>
             <a:fld id="{306DA3B7-5B64-4C08-AEF8-96FFEFD7A1CA}" type="datetimeFigureOut">
               <a:rPr lang="zh-TW" altLang="en-US" smtClean="0"/>
-              <a:t>2026/4/28</a:t>
+              <a:t>2026/5/21</a:t>
             </a:fld>
             <a:endParaRPr lang="zh-TW" altLang="en-US"/>
           </a:p>
@@ -1660,7 +1660,7 @@
     </p:spTree>
     <p:extLst>
       <p:ext uri="{BB962C8B-B14F-4D97-AF65-F5344CB8AC3E}">
-        <p14:creationId xmlns:p14="http://schemas.microsoft.com/office/powerpoint/2010/main" val="4211114453"/>
+        <p14:creationId xmlns:p14="http://schemas.microsoft.com/office/powerpoint/2010/main" val="3533594055"/>
       </p:ext>
     </p:extLst>
   </p:cSld>
@@ -1727,7 +1727,7 @@
           <a:p>
             <a:fld id="{306DA3B7-5B64-4C08-AEF8-96FFEFD7A1CA}" type="datetimeFigureOut">
               <a:rPr lang="zh-TW" altLang="en-US" smtClean="0"/>
-              <a:t>2026/4/28</a:t>
+              <a:t>2026/5/21</a:t>
             </a:fld>
             <a:endParaRPr lang="zh-TW" altLang="en-US"/>
           </a:p>
@@ -1778,7 +1778,7 @@
     </p:spTree>
     <p:extLst>
       <p:ext uri="{BB962C8B-B14F-4D97-AF65-F5344CB8AC3E}">
-        <p14:creationId xmlns:p14="http://schemas.microsoft.com/office/powerpoint/2010/main" val="125435498"/>
+        <p14:creationId xmlns:p14="http://schemas.microsoft.com/office/powerpoint/2010/main" val="934581094"/>
       </p:ext>
     </p:extLst>
   </p:cSld>
@@ -1822,7 +1822,7 @@
           <a:p>
             <a:fld id="{306DA3B7-5B64-4C08-AEF8-96FFEFD7A1CA}" type="datetimeFigureOut">
               <a:rPr lang="zh-TW" altLang="en-US" smtClean="0"/>
-              <a:t>2026/4/28</a:t>
+              <a:t>2026/5/21</a:t>
             </a:fld>
             <a:endParaRPr lang="zh-TW" altLang="en-US"/>
           </a:p>
@@ -1873,7 +1873,7 @@
     </p:spTree>
     <p:extLst>
       <p:ext uri="{BB962C8B-B14F-4D97-AF65-F5344CB8AC3E}">
-        <p14:creationId xmlns:p14="http://schemas.microsoft.com/office/powerpoint/2010/main" val="1791868180"/>
+        <p14:creationId xmlns:p14="http://schemas.microsoft.com/office/powerpoint/2010/main" val="1682740471"/>
       </p:ext>
     </p:extLst>
   </p:cSld>
@@ -1912,15 +1912,15 @@
         </p:nvSpPr>
         <p:spPr>
           <a:xfrm>
-            <a:off x="1016713" y="276013"/>
-            <a:ext cx="4760669" cy="966047"/>
+            <a:off x="682328" y="182351"/>
+            <a:ext cx="3194943" cy="638228"/>
           </a:xfrm>
         </p:spPr>
         <p:txBody>
           <a:bodyPr anchor="b"/>
           <a:lstStyle>
             <a:lvl1pPr>
-              <a:defRPr sz="1932"/>
+              <a:defRPr sz="1276"/>
             </a:lvl1pPr>
           </a:lstStyle>
           <a:p>
@@ -1944,39 +1944,39 @@
         </p:nvSpPr>
         <p:spPr>
           <a:xfrm>
-            <a:off x="6275167" y="596113"/>
-            <a:ext cx="7472541" cy="2942225"/>
+            <a:off x="4211340" y="393827"/>
+            <a:ext cx="5014913" cy="1943810"/>
           </a:xfrm>
         </p:spPr>
         <p:txBody>
           <a:bodyPr/>
           <a:lstStyle>
             <a:lvl1pPr>
-              <a:defRPr sz="1932"/>
+              <a:defRPr sz="1276"/>
             </a:lvl1pPr>
             <a:lvl2pPr>
-              <a:defRPr sz="1690"/>
+              <a:defRPr sz="1117"/>
             </a:lvl2pPr>
             <a:lvl3pPr>
-              <a:defRPr sz="1449"/>
+              <a:defRPr sz="957"/>
             </a:lvl3pPr>
             <a:lvl4pPr>
-              <a:defRPr sz="1207"/>
+              <a:defRPr sz="798"/>
             </a:lvl4pPr>
             <a:lvl5pPr>
-              <a:defRPr sz="1207"/>
+              <a:defRPr sz="798"/>
             </a:lvl5pPr>
             <a:lvl6pPr>
-              <a:defRPr sz="1207"/>
+              <a:defRPr sz="798"/>
             </a:lvl6pPr>
             <a:lvl7pPr>
-              <a:defRPr sz="1207"/>
+              <a:defRPr sz="798"/>
             </a:lvl7pPr>
             <a:lvl8pPr>
-              <a:defRPr sz="1207"/>
+              <a:defRPr sz="798"/>
             </a:lvl8pPr>
             <a:lvl9pPr>
-              <a:defRPr sz="1207"/>
+              <a:defRPr sz="798"/>
             </a:lvl9pPr>
           </a:lstStyle>
           <a:p>
@@ -2029,8 +2029,8 @@
         </p:nvSpPr>
         <p:spPr>
           <a:xfrm>
-            <a:off x="1016713" y="1242060"/>
-            <a:ext cx="4760669" cy="2301070"/>
+            <a:off x="682328" y="820579"/>
+            <a:ext cx="3194943" cy="1520224"/>
           </a:xfrm>
         </p:spPr>
         <p:txBody>
@@ -2038,39 +2038,39 @@
           <a:lstStyle>
             <a:lvl1pPr marL="0" indent="0">
               <a:buNone/>
-              <a:defRPr sz="966"/>
+              <a:defRPr sz="638"/>
             </a:lvl1pPr>
-            <a:lvl2pPr marL="276012" indent="0">
+            <a:lvl2pPr marL="182331" indent="0">
               <a:buNone/>
-              <a:defRPr sz="845"/>
+              <a:defRPr sz="558"/>
             </a:lvl2pPr>
-            <a:lvl3pPr marL="552023" indent="0">
+            <a:lvl3pPr marL="364663" indent="0">
               <a:buNone/>
-              <a:defRPr sz="724"/>
+              <a:defRPr sz="479"/>
             </a:lvl3pPr>
-            <a:lvl4pPr marL="828035" indent="0">
+            <a:lvl4pPr marL="546994" indent="0">
               <a:buNone/>
-              <a:defRPr sz="604"/>
+              <a:defRPr sz="399"/>
             </a:lvl4pPr>
-            <a:lvl5pPr marL="1104047" indent="0">
+            <a:lvl5pPr marL="729325" indent="0">
               <a:buNone/>
-              <a:defRPr sz="604"/>
+              <a:defRPr sz="399"/>
             </a:lvl5pPr>
-            <a:lvl6pPr marL="1380058" indent="0">
+            <a:lvl6pPr marL="911657" indent="0">
               <a:buNone/>
-              <a:defRPr sz="604"/>
+              <a:defRPr sz="399"/>
             </a:lvl6pPr>
-            <a:lvl7pPr marL="1656070" indent="0">
+            <a:lvl7pPr marL="1093988" indent="0">
               <a:buNone/>
-              <a:defRPr sz="604"/>
+              <a:defRPr sz="399"/>
             </a:lvl7pPr>
-            <a:lvl8pPr marL="1932081" indent="0">
+            <a:lvl8pPr marL="1276320" indent="0">
               <a:buNone/>
-              <a:defRPr sz="604"/>
+              <a:defRPr sz="399"/>
             </a:lvl8pPr>
-            <a:lvl9pPr marL="2208093" indent="0">
+            <a:lvl9pPr marL="1458651" indent="0">
               <a:buNone/>
-              <a:defRPr sz="604"/>
+              <a:defRPr sz="399"/>
             </a:lvl9pPr>
           </a:lstStyle>
           <a:p>
@@ -2099,7 +2099,7 @@
           <a:p>
             <a:fld id="{306DA3B7-5B64-4C08-AEF8-96FFEFD7A1CA}" type="datetimeFigureOut">
               <a:rPr lang="zh-TW" altLang="en-US" smtClean="0"/>
-              <a:t>2026/4/28</a:t>
+              <a:t>2026/5/21</a:t>
             </a:fld>
             <a:endParaRPr lang="zh-TW" altLang="en-US"/>
           </a:p>
@@ -2150,7 +2150,7 @@
     </p:spTree>
     <p:extLst>
       <p:ext uri="{BB962C8B-B14F-4D97-AF65-F5344CB8AC3E}">
-        <p14:creationId xmlns:p14="http://schemas.microsoft.com/office/powerpoint/2010/main" val="3545648432"/>
+        <p14:creationId xmlns:p14="http://schemas.microsoft.com/office/powerpoint/2010/main" val="1550450209"/>
       </p:ext>
     </p:extLst>
   </p:cSld>
@@ -2189,15 +2189,15 @@
         </p:nvSpPr>
         <p:spPr>
           <a:xfrm>
-            <a:off x="1016713" y="276013"/>
-            <a:ext cx="4760669" cy="966047"/>
+            <a:off x="682328" y="182351"/>
+            <a:ext cx="3194943" cy="638228"/>
           </a:xfrm>
         </p:spPr>
         <p:txBody>
           <a:bodyPr anchor="b"/>
           <a:lstStyle>
             <a:lvl1pPr>
-              <a:defRPr sz="1932"/>
+              <a:defRPr sz="1276"/>
             </a:lvl1pPr>
           </a:lstStyle>
           <a:p>
@@ -2221,8 +2221,8 @@
         </p:nvSpPr>
         <p:spPr>
           <a:xfrm>
-            <a:off x="6275167" y="596113"/>
-            <a:ext cx="7472541" cy="2942225"/>
+            <a:off x="4211340" y="393827"/>
+            <a:ext cx="5014913" cy="1943810"/>
           </a:xfrm>
         </p:spPr>
         <p:txBody>
@@ -2230,39 +2230,39 @@
           <a:lstStyle>
             <a:lvl1pPr marL="0" indent="0">
               <a:buNone/>
-              <a:defRPr sz="1932"/>
+              <a:defRPr sz="1276"/>
             </a:lvl1pPr>
-            <a:lvl2pPr marL="276012" indent="0">
+            <a:lvl2pPr marL="182331" indent="0">
               <a:buNone/>
-              <a:defRPr sz="1690"/>
+              <a:defRPr sz="1117"/>
             </a:lvl2pPr>
-            <a:lvl3pPr marL="552023" indent="0">
+            <a:lvl3pPr marL="364663" indent="0">
               <a:buNone/>
-              <a:defRPr sz="1449"/>
+              <a:defRPr sz="957"/>
             </a:lvl3pPr>
-            <a:lvl4pPr marL="828035" indent="0">
+            <a:lvl4pPr marL="546994" indent="0">
               <a:buNone/>
-              <a:defRPr sz="1207"/>
+              <a:defRPr sz="798"/>
             </a:lvl4pPr>
-            <a:lvl5pPr marL="1104047" indent="0">
+            <a:lvl5pPr marL="729325" indent="0">
               <a:buNone/>
-              <a:defRPr sz="1207"/>
+              <a:defRPr sz="798"/>
             </a:lvl5pPr>
-            <a:lvl6pPr marL="1380058" indent="0">
+            <a:lvl6pPr marL="911657" indent="0">
               <a:buNone/>
-              <a:defRPr sz="1207"/>
+              <a:defRPr sz="798"/>
             </a:lvl6pPr>
-            <a:lvl7pPr marL="1656070" indent="0">
+            <a:lvl7pPr marL="1093988" indent="0">
               <a:buNone/>
-              <a:defRPr sz="1207"/>
+              <a:defRPr sz="798"/>
             </a:lvl7pPr>
-            <a:lvl8pPr marL="1932081" indent="0">
+            <a:lvl8pPr marL="1276320" indent="0">
               <a:buNone/>
-              <a:defRPr sz="1207"/>
+              <a:defRPr sz="798"/>
             </a:lvl8pPr>
-            <a:lvl9pPr marL="2208093" indent="0">
+            <a:lvl9pPr marL="1458651" indent="0">
               <a:buNone/>
-              <a:defRPr sz="1207"/>
+              <a:defRPr sz="798"/>
             </a:lvl9pPr>
           </a:lstStyle>
           <a:p>
@@ -2286,8 +2286,8 @@
         </p:nvSpPr>
         <p:spPr>
           <a:xfrm>
-            <a:off x="1016713" y="1242060"/>
-            <a:ext cx="4760669" cy="2301070"/>
+            <a:off x="682328" y="820579"/>
+            <a:ext cx="3194943" cy="1520224"/>
           </a:xfrm>
         </p:spPr>
         <p:txBody>
@@ -2295,39 +2295,39 @@
           <a:lstStyle>
             <a:lvl1pPr marL="0" indent="0">
               <a:buNone/>
-              <a:defRPr sz="966"/>
+              <a:defRPr sz="638"/>
             </a:lvl1pPr>
-            <a:lvl2pPr marL="276012" indent="0">
+            <a:lvl2pPr marL="182331" indent="0">
               <a:buNone/>
-              <a:defRPr sz="845"/>
+              <a:defRPr sz="558"/>
             </a:lvl2pPr>
-            <a:lvl3pPr marL="552023" indent="0">
+            <a:lvl3pPr marL="364663" indent="0">
               <a:buNone/>
-              <a:defRPr sz="724"/>
+              <a:defRPr sz="479"/>
             </a:lvl3pPr>
-            <a:lvl4pPr marL="828035" indent="0">
+            <a:lvl4pPr marL="546994" indent="0">
               <a:buNone/>
-              <a:defRPr sz="604"/>
+              <a:defRPr sz="399"/>
             </a:lvl4pPr>
-            <a:lvl5pPr marL="1104047" indent="0">
+            <a:lvl5pPr marL="729325" indent="0">
               <a:buNone/>
-              <a:defRPr sz="604"/>
+              <a:defRPr sz="399"/>
             </a:lvl5pPr>
-            <a:lvl6pPr marL="1380058" indent="0">
+            <a:lvl6pPr marL="911657" indent="0">
               <a:buNone/>
-              <a:defRPr sz="604"/>
+              <a:defRPr sz="399"/>
             </a:lvl6pPr>
-            <a:lvl7pPr marL="1656070" indent="0">
+            <a:lvl7pPr marL="1093988" indent="0">
               <a:buNone/>
-              <a:defRPr sz="604"/>
+              <a:defRPr sz="399"/>
             </a:lvl7pPr>
-            <a:lvl8pPr marL="1932081" indent="0">
+            <a:lvl8pPr marL="1276320" indent="0">
               <a:buNone/>
-              <a:defRPr sz="604"/>
+              <a:defRPr sz="399"/>
             </a:lvl8pPr>
-            <a:lvl9pPr marL="2208093" indent="0">
+            <a:lvl9pPr marL="1458651" indent="0">
               <a:buNone/>
-              <a:defRPr sz="604"/>
+              <a:defRPr sz="399"/>
             </a:lvl9pPr>
           </a:lstStyle>
           <a:p>
@@ -2356,7 +2356,7 @@
           <a:p>
             <a:fld id="{306DA3B7-5B64-4C08-AEF8-96FFEFD7A1CA}" type="datetimeFigureOut">
               <a:rPr lang="zh-TW" altLang="en-US" smtClean="0"/>
-              <a:t>2026/4/28</a:t>
+              <a:t>2026/5/21</a:t>
             </a:fld>
             <a:endParaRPr lang="zh-TW" altLang="en-US"/>
           </a:p>
@@ -2407,7 +2407,7 @@
     </p:spTree>
     <p:extLst>
       <p:ext uri="{BB962C8B-B14F-4D97-AF65-F5344CB8AC3E}">
-        <p14:creationId xmlns:p14="http://schemas.microsoft.com/office/powerpoint/2010/main" val="2292481310"/>
+        <p14:creationId xmlns:p14="http://schemas.microsoft.com/office/powerpoint/2010/main" val="1828203649"/>
       </p:ext>
     </p:extLst>
   </p:cSld>
@@ -2451,8 +2451,8 @@
         </p:nvSpPr>
         <p:spPr>
           <a:xfrm>
-            <a:off x="1014790" y="220428"/>
-            <a:ext cx="12730996" cy="800247"/>
+            <a:off x="681038" y="145628"/>
+            <a:ext cx="8543925" cy="528691"/>
           </a:xfrm>
           <a:prstGeom prst="rect">
             <a:avLst/>
@@ -2484,8 +2484,8 @@
         </p:nvSpPr>
         <p:spPr>
           <a:xfrm>
-            <a:off x="1014790" y="1102137"/>
-            <a:ext cx="12730996" cy="2626919"/>
+            <a:off x="681038" y="728137"/>
+            <a:ext cx="8543925" cy="1735499"/>
           </a:xfrm>
           <a:prstGeom prst="rect">
             <a:avLst/>
@@ -2546,8 +2546,8 @@
         </p:nvSpPr>
         <p:spPr>
           <a:xfrm>
-            <a:off x="1014790" y="3837352"/>
-            <a:ext cx="3321129" cy="220427"/>
+            <a:off x="681038" y="2535184"/>
+            <a:ext cx="2228850" cy="145627"/>
           </a:xfrm>
           <a:prstGeom prst="rect">
             <a:avLst/>
@@ -2557,7 +2557,7 @@
           <a:bodyPr vert="horz" lIns="91440" tIns="45720" rIns="91440" bIns="45720" rtlCol="0" anchor="ctr"/>
           <a:lstStyle>
             <a:lvl1pPr algn="l">
-              <a:defRPr sz="724">
+              <a:defRPr sz="479">
                 <a:solidFill>
                   <a:schemeClr val="tx1">
                     <a:tint val="75000"/>
@@ -2569,7 +2569,7 @@
           <a:p>
             <a:fld id="{306DA3B7-5B64-4C08-AEF8-96FFEFD7A1CA}" type="datetimeFigureOut">
               <a:rPr lang="zh-TW" altLang="en-US" smtClean="0"/>
-              <a:t>2026/4/28</a:t>
+              <a:t>2026/5/21</a:t>
             </a:fld>
             <a:endParaRPr lang="zh-TW" altLang="en-US"/>
           </a:p>
@@ -2587,8 +2587,8 @@
         </p:nvSpPr>
         <p:spPr>
           <a:xfrm>
-            <a:off x="4889441" y="3837352"/>
-            <a:ext cx="4981694" cy="220427"/>
+            <a:off x="3281363" y="2535184"/>
+            <a:ext cx="3343275" cy="145627"/>
           </a:xfrm>
           <a:prstGeom prst="rect">
             <a:avLst/>
@@ -2598,7 +2598,7 @@
           <a:bodyPr vert="horz" lIns="91440" tIns="45720" rIns="91440" bIns="45720" rtlCol="0" anchor="ctr"/>
           <a:lstStyle>
             <a:lvl1pPr algn="ctr">
-              <a:defRPr sz="724">
+              <a:defRPr sz="479">
                 <a:solidFill>
                   <a:schemeClr val="tx1">
                     <a:tint val="75000"/>
@@ -2624,8 +2624,8 @@
         </p:nvSpPr>
         <p:spPr>
           <a:xfrm>
-            <a:off x="10424656" y="3837352"/>
-            <a:ext cx="3321129" cy="220427"/>
+            <a:off x="6996113" y="2535184"/>
+            <a:ext cx="2228850" cy="145627"/>
           </a:xfrm>
           <a:prstGeom prst="rect">
             <a:avLst/>
@@ -2635,7 +2635,7 @@
           <a:bodyPr vert="horz" lIns="91440" tIns="45720" rIns="91440" bIns="45720" rtlCol="0" anchor="ctr"/>
           <a:lstStyle>
             <a:lvl1pPr algn="r">
-              <a:defRPr sz="724">
+              <a:defRPr sz="479">
                 <a:solidFill>
                   <a:schemeClr val="tx1">
                     <a:tint val="75000"/>
@@ -2656,27 +2656,27 @@
     </p:spTree>
     <p:extLst>
       <p:ext uri="{BB962C8B-B14F-4D97-AF65-F5344CB8AC3E}">
-        <p14:creationId xmlns:p14="http://schemas.microsoft.com/office/powerpoint/2010/main" val="638624608"/>
+        <p14:creationId xmlns:p14="http://schemas.microsoft.com/office/powerpoint/2010/main" val="2716618975"/>
       </p:ext>
     </p:extLst>
   </p:cSld>
   <p:clrMap bg1="lt1" tx1="dk1" bg2="lt2" tx2="dk2" accent1="accent1" accent2="accent2" accent3="accent3" accent4="accent4" accent5="accent5" accent6="accent6" hlink="hlink" folHlink="folHlink"/>
   <p:sldLayoutIdLst>
-    <p:sldLayoutId id="2147483793" r:id="rId1"/>
-    <p:sldLayoutId id="2147483794" r:id="rId2"/>
-    <p:sldLayoutId id="2147483795" r:id="rId3"/>
-    <p:sldLayoutId id="2147483796" r:id="rId4"/>
-    <p:sldLayoutId id="2147483797" r:id="rId5"/>
-    <p:sldLayoutId id="2147483798" r:id="rId6"/>
-    <p:sldLayoutId id="2147483799" r:id="rId7"/>
-    <p:sldLayoutId id="2147483800" r:id="rId8"/>
-    <p:sldLayoutId id="2147483801" r:id="rId9"/>
-    <p:sldLayoutId id="2147483802" r:id="rId10"/>
-    <p:sldLayoutId id="2147483803" r:id="rId11"/>
+    <p:sldLayoutId id="2147483841" r:id="rId1"/>
+    <p:sldLayoutId id="2147483842" r:id="rId2"/>
+    <p:sldLayoutId id="2147483843" r:id="rId3"/>
+    <p:sldLayoutId id="2147483844" r:id="rId4"/>
+    <p:sldLayoutId id="2147483845" r:id="rId5"/>
+    <p:sldLayoutId id="2147483846" r:id="rId6"/>
+    <p:sldLayoutId id="2147483847" r:id="rId7"/>
+    <p:sldLayoutId id="2147483848" r:id="rId8"/>
+    <p:sldLayoutId id="2147483849" r:id="rId9"/>
+    <p:sldLayoutId id="2147483850" r:id="rId10"/>
+    <p:sldLayoutId id="2147483851" r:id="rId11"/>
   </p:sldLayoutIdLst>
   <p:txStyles>
     <p:titleStyle>
-      <a:lvl1pPr algn="l" defTabSz="552023" rtl="0" eaLnBrk="1" latinLnBrk="0" hangingPunct="1">
+      <a:lvl1pPr algn="l" defTabSz="364663" rtl="0" eaLnBrk="1" latinLnBrk="0" hangingPunct="1">
         <a:lnSpc>
           <a:spcPct val="90000"/>
         </a:lnSpc>
@@ -2684,7 +2684,7 @@
           <a:spcPct val="0"/>
         </a:spcBef>
         <a:buNone/>
-        <a:defRPr sz="2656" kern="1200">
+        <a:defRPr sz="1755" kern="1200">
           <a:solidFill>
             <a:schemeClr val="tx1"/>
           </a:solidFill>
@@ -2695,16 +2695,16 @@
       </a:lvl1pPr>
     </p:titleStyle>
     <p:bodyStyle>
-      <a:lvl1pPr marL="138006" indent="-138006" algn="l" defTabSz="552023" rtl="0" eaLnBrk="1" latinLnBrk="0" hangingPunct="1">
+      <a:lvl1pPr marL="91166" indent="-91166" algn="l" defTabSz="364663" rtl="0" eaLnBrk="1" latinLnBrk="0" hangingPunct="1">
         <a:lnSpc>
           <a:spcPct val="90000"/>
         </a:lnSpc>
         <a:spcBef>
-          <a:spcPts val="604"/>
+          <a:spcPts val="399"/>
         </a:spcBef>
         <a:buFont typeface="Arial" panose="020B0604020202020204" pitchFamily="34" charset="0"/>
         <a:buChar char="•"/>
-        <a:defRPr sz="1690" kern="1200">
+        <a:defRPr sz="1117" kern="1200">
           <a:solidFill>
             <a:schemeClr val="tx1"/>
           </a:solidFill>
@@ -2713,16 +2713,16 @@
           <a:cs typeface="+mn-cs"/>
         </a:defRPr>
       </a:lvl1pPr>
-      <a:lvl2pPr marL="414017" indent="-138006" algn="l" defTabSz="552023" rtl="0" eaLnBrk="1" latinLnBrk="0" hangingPunct="1">
+      <a:lvl2pPr marL="273497" indent="-91166" algn="l" defTabSz="364663" rtl="0" eaLnBrk="1" latinLnBrk="0" hangingPunct="1">
         <a:lnSpc>
           <a:spcPct val="90000"/>
         </a:lnSpc>
         <a:spcBef>
-          <a:spcPts val="302"/>
+          <a:spcPts val="199"/>
         </a:spcBef>
         <a:buFont typeface="Arial" panose="020B0604020202020204" pitchFamily="34" charset="0"/>
         <a:buChar char="•"/>
-        <a:defRPr sz="1449" kern="1200">
+        <a:defRPr sz="957" kern="1200">
           <a:solidFill>
             <a:schemeClr val="tx1"/>
           </a:solidFill>
@@ -2731,16 +2731,16 @@
           <a:cs typeface="+mn-cs"/>
         </a:defRPr>
       </a:lvl2pPr>
-      <a:lvl3pPr marL="690029" indent="-138006" algn="l" defTabSz="552023" rtl="0" eaLnBrk="1" latinLnBrk="0" hangingPunct="1">
+      <a:lvl3pPr marL="455828" indent="-91166" algn="l" defTabSz="364663" rtl="0" eaLnBrk="1" latinLnBrk="0" hangingPunct="1">
         <a:lnSpc>
           <a:spcPct val="90000"/>
         </a:lnSpc>
         <a:spcBef>
-          <a:spcPts val="302"/>
+          <a:spcPts val="199"/>
         </a:spcBef>
         <a:buFont typeface="Arial" panose="020B0604020202020204" pitchFamily="34" charset="0"/>
         <a:buChar char="•"/>
-        <a:defRPr sz="1207" kern="1200">
+        <a:defRPr sz="798" kern="1200">
           <a:solidFill>
             <a:schemeClr val="tx1"/>
           </a:solidFill>
@@ -2749,16 +2749,16 @@
           <a:cs typeface="+mn-cs"/>
         </a:defRPr>
       </a:lvl3pPr>
-      <a:lvl4pPr marL="966041" indent="-138006" algn="l" defTabSz="552023" rtl="0" eaLnBrk="1" latinLnBrk="0" hangingPunct="1">
+      <a:lvl4pPr marL="638160" indent="-91166" algn="l" defTabSz="364663" rtl="0" eaLnBrk="1" latinLnBrk="0" hangingPunct="1">
         <a:lnSpc>
           <a:spcPct val="90000"/>
         </a:lnSpc>
         <a:spcBef>
-          <a:spcPts val="302"/>
+          <a:spcPts val="199"/>
         </a:spcBef>
         <a:buFont typeface="Arial" panose="020B0604020202020204" pitchFamily="34" charset="0"/>
         <a:buChar char="•"/>
-        <a:defRPr sz="1087" kern="1200">
+        <a:defRPr sz="718" kern="1200">
           <a:solidFill>
             <a:schemeClr val="tx1"/>
           </a:solidFill>
@@ -2767,16 +2767,16 @@
           <a:cs typeface="+mn-cs"/>
         </a:defRPr>
       </a:lvl4pPr>
-      <a:lvl5pPr marL="1242052" indent="-138006" algn="l" defTabSz="552023" rtl="0" eaLnBrk="1" latinLnBrk="0" hangingPunct="1">
+      <a:lvl5pPr marL="820491" indent="-91166" algn="l" defTabSz="364663" rtl="0" eaLnBrk="1" latinLnBrk="0" hangingPunct="1">
         <a:lnSpc>
           <a:spcPct val="90000"/>
         </a:lnSpc>
         <a:spcBef>
-          <a:spcPts val="302"/>
+          <a:spcPts val="199"/>
         </a:spcBef>
         <a:buFont typeface="Arial" panose="020B0604020202020204" pitchFamily="34" charset="0"/>
         <a:buChar char="•"/>
-        <a:defRPr sz="1087" kern="1200">
+        <a:defRPr sz="718" kern="1200">
           <a:solidFill>
             <a:schemeClr val="tx1"/>
           </a:solidFill>
@@ -2785,16 +2785,16 @@
           <a:cs typeface="+mn-cs"/>
         </a:defRPr>
       </a:lvl5pPr>
-      <a:lvl6pPr marL="1518064" indent="-138006" algn="l" defTabSz="552023" rtl="0" eaLnBrk="1" latinLnBrk="0" hangingPunct="1">
+      <a:lvl6pPr marL="1002822" indent="-91166" algn="l" defTabSz="364663" rtl="0" eaLnBrk="1" latinLnBrk="0" hangingPunct="1">
         <a:lnSpc>
           <a:spcPct val="90000"/>
         </a:lnSpc>
         <a:spcBef>
-          <a:spcPts val="302"/>
+          <a:spcPts val="199"/>
         </a:spcBef>
         <a:buFont typeface="Arial" panose="020B0604020202020204" pitchFamily="34" charset="0"/>
         <a:buChar char="•"/>
-        <a:defRPr sz="1087" kern="1200">
+        <a:defRPr sz="718" kern="1200">
           <a:solidFill>
             <a:schemeClr val="tx1"/>
           </a:solidFill>
@@ -2803,16 +2803,16 @@
           <a:cs typeface="+mn-cs"/>
         </a:defRPr>
       </a:lvl6pPr>
-      <a:lvl7pPr marL="1794076" indent="-138006" algn="l" defTabSz="552023" rtl="0" eaLnBrk="1" latinLnBrk="0" hangingPunct="1">
+      <a:lvl7pPr marL="1185154" indent="-91166" algn="l" defTabSz="364663" rtl="0" eaLnBrk="1" latinLnBrk="0" hangingPunct="1">
         <a:lnSpc>
           <a:spcPct val="90000"/>
         </a:lnSpc>
         <a:spcBef>
-          <a:spcPts val="302"/>
+          <a:spcPts val="199"/>
         </a:spcBef>
         <a:buFont typeface="Arial" panose="020B0604020202020204" pitchFamily="34" charset="0"/>
         <a:buChar char="•"/>
-        <a:defRPr sz="1087" kern="1200">
+        <a:defRPr sz="718" kern="1200">
           <a:solidFill>
             <a:schemeClr val="tx1"/>
           </a:solidFill>
@@ -2821,16 +2821,16 @@
           <a:cs typeface="+mn-cs"/>
         </a:defRPr>
       </a:lvl7pPr>
-      <a:lvl8pPr marL="2070087" indent="-138006" algn="l" defTabSz="552023" rtl="0" eaLnBrk="1" latinLnBrk="0" hangingPunct="1">
+      <a:lvl8pPr marL="1367485" indent="-91166" algn="l" defTabSz="364663" rtl="0" eaLnBrk="1" latinLnBrk="0" hangingPunct="1">
         <a:lnSpc>
           <a:spcPct val="90000"/>
         </a:lnSpc>
         <a:spcBef>
-          <a:spcPts val="302"/>
+          <a:spcPts val="199"/>
         </a:spcBef>
         <a:buFont typeface="Arial" panose="020B0604020202020204" pitchFamily="34" charset="0"/>
         <a:buChar char="•"/>
-        <a:defRPr sz="1087" kern="1200">
+        <a:defRPr sz="718" kern="1200">
           <a:solidFill>
             <a:schemeClr val="tx1"/>
           </a:solidFill>
@@ -2839,16 +2839,16 @@
           <a:cs typeface="+mn-cs"/>
         </a:defRPr>
       </a:lvl8pPr>
-      <a:lvl9pPr marL="2346099" indent="-138006" algn="l" defTabSz="552023" rtl="0" eaLnBrk="1" latinLnBrk="0" hangingPunct="1">
+      <a:lvl9pPr marL="1549817" indent="-91166" algn="l" defTabSz="364663" rtl="0" eaLnBrk="1" latinLnBrk="0" hangingPunct="1">
         <a:lnSpc>
           <a:spcPct val="90000"/>
         </a:lnSpc>
         <a:spcBef>
-          <a:spcPts val="302"/>
+          <a:spcPts val="199"/>
         </a:spcBef>
         <a:buFont typeface="Arial" panose="020B0604020202020204" pitchFamily="34" charset="0"/>
         <a:buChar char="•"/>
-        <a:defRPr sz="1087" kern="1200">
+        <a:defRPr sz="718" kern="1200">
           <a:solidFill>
             <a:schemeClr val="tx1"/>
           </a:solidFill>
@@ -2862,8 +2862,8 @@
       <a:defPPr>
         <a:defRPr lang="en-US"/>
       </a:defPPr>
-      <a:lvl1pPr marL="0" algn="l" defTabSz="552023" rtl="0" eaLnBrk="1" latinLnBrk="0" hangingPunct="1">
-        <a:defRPr sz="1087" kern="1200">
+      <a:lvl1pPr marL="0" algn="l" defTabSz="364663" rtl="0" eaLnBrk="1" latinLnBrk="0" hangingPunct="1">
+        <a:defRPr sz="718" kern="1200">
           <a:solidFill>
             <a:schemeClr val="tx1"/>
           </a:solidFill>
@@ -2872,8 +2872,8 @@
           <a:cs typeface="+mn-cs"/>
         </a:defRPr>
       </a:lvl1pPr>
-      <a:lvl2pPr marL="276012" algn="l" defTabSz="552023" rtl="0" eaLnBrk="1" latinLnBrk="0" hangingPunct="1">
-        <a:defRPr sz="1087" kern="1200">
+      <a:lvl2pPr marL="182331" algn="l" defTabSz="364663" rtl="0" eaLnBrk="1" latinLnBrk="0" hangingPunct="1">
+        <a:defRPr sz="718" kern="1200">
           <a:solidFill>
             <a:schemeClr val="tx1"/>
           </a:solidFill>
@@ -2882,8 +2882,8 @@
           <a:cs typeface="+mn-cs"/>
         </a:defRPr>
       </a:lvl2pPr>
-      <a:lvl3pPr marL="552023" algn="l" defTabSz="552023" rtl="0" eaLnBrk="1" latinLnBrk="0" hangingPunct="1">
-        <a:defRPr sz="1087" kern="1200">
+      <a:lvl3pPr marL="364663" algn="l" defTabSz="364663" rtl="0" eaLnBrk="1" latinLnBrk="0" hangingPunct="1">
+        <a:defRPr sz="718" kern="1200">
           <a:solidFill>
             <a:schemeClr val="tx1"/>
           </a:solidFill>
@@ -2892,8 +2892,8 @@
           <a:cs typeface="+mn-cs"/>
         </a:defRPr>
       </a:lvl3pPr>
-      <a:lvl4pPr marL="828035" algn="l" defTabSz="552023" rtl="0" eaLnBrk="1" latinLnBrk="0" hangingPunct="1">
-        <a:defRPr sz="1087" kern="1200">
+      <a:lvl4pPr marL="546994" algn="l" defTabSz="364663" rtl="0" eaLnBrk="1" latinLnBrk="0" hangingPunct="1">
+        <a:defRPr sz="718" kern="1200">
           <a:solidFill>
             <a:schemeClr val="tx1"/>
           </a:solidFill>
@@ -2902,8 +2902,8 @@
           <a:cs typeface="+mn-cs"/>
         </a:defRPr>
       </a:lvl4pPr>
-      <a:lvl5pPr marL="1104047" algn="l" defTabSz="552023" rtl="0" eaLnBrk="1" latinLnBrk="0" hangingPunct="1">
-        <a:defRPr sz="1087" kern="1200">
+      <a:lvl5pPr marL="729325" algn="l" defTabSz="364663" rtl="0" eaLnBrk="1" latinLnBrk="0" hangingPunct="1">
+        <a:defRPr sz="718" kern="1200">
           <a:solidFill>
             <a:schemeClr val="tx1"/>
           </a:solidFill>
@@ -2912,8 +2912,8 @@
           <a:cs typeface="+mn-cs"/>
         </a:defRPr>
       </a:lvl5pPr>
-      <a:lvl6pPr marL="1380058" algn="l" defTabSz="552023" rtl="0" eaLnBrk="1" latinLnBrk="0" hangingPunct="1">
-        <a:defRPr sz="1087" kern="1200">
+      <a:lvl6pPr marL="911657" algn="l" defTabSz="364663" rtl="0" eaLnBrk="1" latinLnBrk="0" hangingPunct="1">
+        <a:defRPr sz="718" kern="1200">
           <a:solidFill>
             <a:schemeClr val="tx1"/>
           </a:solidFill>
@@ -2922,8 +2922,8 @@
           <a:cs typeface="+mn-cs"/>
         </a:defRPr>
       </a:lvl6pPr>
-      <a:lvl7pPr marL="1656070" algn="l" defTabSz="552023" rtl="0" eaLnBrk="1" latinLnBrk="0" hangingPunct="1">
-        <a:defRPr sz="1087" kern="1200">
+      <a:lvl7pPr marL="1093988" algn="l" defTabSz="364663" rtl="0" eaLnBrk="1" latinLnBrk="0" hangingPunct="1">
+        <a:defRPr sz="718" kern="1200">
           <a:solidFill>
             <a:schemeClr val="tx1"/>
           </a:solidFill>
@@ -2932,8 +2932,8 @@
           <a:cs typeface="+mn-cs"/>
         </a:defRPr>
       </a:lvl7pPr>
-      <a:lvl8pPr marL="1932081" algn="l" defTabSz="552023" rtl="0" eaLnBrk="1" latinLnBrk="0" hangingPunct="1">
-        <a:defRPr sz="1087" kern="1200">
+      <a:lvl8pPr marL="1276320" algn="l" defTabSz="364663" rtl="0" eaLnBrk="1" latinLnBrk="0" hangingPunct="1">
+        <a:defRPr sz="718" kern="1200">
           <a:solidFill>
             <a:schemeClr val="tx1"/>
           </a:solidFill>
@@ -2942,8 +2942,8 @@
           <a:cs typeface="+mn-cs"/>
         </a:defRPr>
       </a:lvl8pPr>
-      <a:lvl9pPr marL="2208093" algn="l" defTabSz="552023" rtl="0" eaLnBrk="1" latinLnBrk="0" hangingPunct="1">
-        <a:defRPr sz="1087" kern="1200">
+      <a:lvl9pPr marL="1458651" algn="l" defTabSz="364663" rtl="0" eaLnBrk="1" latinLnBrk="0" hangingPunct="1">
+        <a:defRPr sz="718" kern="1200">
           <a:solidFill>
             <a:schemeClr val="tx1"/>
           </a:solidFill>
@@ -2988,8 +2988,8 @@
         </p:nvSpPr>
         <p:spPr>
           <a:xfrm>
-            <a:off x="1599682" y="-4903184"/>
-            <a:ext cx="11561227" cy="13946577"/>
+            <a:off x="1073574" y="-3312224"/>
+            <a:ext cx="7758879" cy="9359716"/>
           </a:xfrm>
           <a:prstGeom prst="roundRect">
             <a:avLst>
@@ -3012,7 +3012,7 @@
           </a:fontRef>
         </p:style>
         <p:txBody>
-          <a:bodyPr rot="0" spcFirstLastPara="0" vertOverflow="overflow" horzOverflow="overflow" vert="horz" wrap="square" lIns="121674" tIns="60836" rIns="121674" bIns="60836" numCol="1" spcCol="0" rtlCol="0" fromWordArt="0" anchor="ctr" anchorCtr="0" forceAA="0" compatLnSpc="1">
+          <a:bodyPr rot="0" spcFirstLastPara="0" vertOverflow="overflow" horzOverflow="overflow" vert="horz" wrap="square" lIns="81657" tIns="40828" rIns="81657" bIns="40828" numCol="1" spcCol="0" rtlCol="0" fromWordArt="0" anchor="ctr" anchorCtr="0" forceAA="0" compatLnSpc="1">
             <a:prstTxWarp prst="textNoShape">
               <a:avLst/>
             </a:prstTxWarp>
@@ -3021,7 +3021,7 @@
           <a:lstStyle/>
           <a:p>
             <a:pPr algn="ctr"/>
-            <a:endParaRPr lang="zh-TW" altLang="en-US" sz="2395" dirty="0"/>
+            <a:endParaRPr lang="zh-TW" altLang="en-US" sz="1607" dirty="0"/>
           </a:p>
         </p:txBody>
       </p:sp>
@@ -3062,8 +3062,8 @@
         </p:blipFill>
         <p:spPr>
           <a:xfrm>
-            <a:off x="9716818" y="1925407"/>
-            <a:ext cx="2870057" cy="2814097"/>
+            <a:off x="6521074" y="1270526"/>
+            <a:ext cx="1926130" cy="1888574"/>
           </a:xfrm>
           <a:prstGeom prst="rect">
             <a:avLst/>
@@ -3103,8 +3103,8 @@
         </p:blipFill>
         <p:spPr>
           <a:xfrm>
-            <a:off x="2316334" y="1910693"/>
-            <a:ext cx="2802659" cy="2816132"/>
+            <a:off x="1554521" y="1260651"/>
+            <a:ext cx="1880898" cy="1889940"/>
           </a:xfrm>
           <a:prstGeom prst="rect">
             <a:avLst/>
@@ -3148,8 +3148,8 @@
         </p:blipFill>
         <p:spPr>
           <a:xfrm>
-            <a:off x="6104930" y="-2446572"/>
-            <a:ext cx="2812083" cy="2802278"/>
+            <a:off x="4097096" y="-1663562"/>
+            <a:ext cx="1887223" cy="1880643"/>
           </a:xfrm>
           <a:prstGeom prst="rect">
             <a:avLst/>
@@ -3193,8 +3193,8 @@
         </p:blipFill>
         <p:spPr>
           <a:xfrm>
-            <a:off x="6104930" y="5034732"/>
-            <a:ext cx="2812083" cy="2802278"/>
+            <a:off x="4097096" y="3335594"/>
+            <a:ext cx="1887223" cy="1880643"/>
           </a:xfrm>
           <a:prstGeom prst="rect">
             <a:avLst/>
@@ -3215,8 +3215,8 @@
         </p:nvGrpSpPr>
         <p:grpSpPr>
           <a:xfrm>
-            <a:off x="5653371" y="986946"/>
-            <a:ext cx="3884713" cy="4040656"/>
+            <a:off x="3794046" y="640720"/>
+            <a:ext cx="2607078" cy="2711733"/>
             <a:chOff x="3909893" y="2121313"/>
             <a:chExt cx="2919455" cy="3036650"/>
           </a:xfrm>
@@ -3294,7 +3294,7 @@
             <a:lstStyle/>
             <a:p>
               <a:pPr algn="ctr"/>
-              <a:endParaRPr lang="en-US" sz="2395" dirty="0"/>
+              <a:endParaRPr lang="en-US" sz="1607" dirty="0"/>
             </a:p>
           </p:txBody>
         </p:sp>
@@ -3372,7 +3372,7 @@
             <a:lstStyle/>
             <a:p>
               <a:pPr algn="ctr"/>
-              <a:endParaRPr lang="en-US" sz="2395" dirty="0"/>
+              <a:endParaRPr lang="en-US" sz="1607" dirty="0"/>
             </a:p>
           </p:txBody>
         </p:sp>
@@ -3449,7 +3449,7 @@
             <a:lstStyle/>
             <a:p>
               <a:pPr algn="ctr"/>
-              <a:endParaRPr lang="en-US" sz="2395" dirty="0"/>
+              <a:endParaRPr lang="en-US" sz="1607" dirty="0"/>
             </a:p>
           </p:txBody>
         </p:sp>
@@ -3520,7 +3520,7 @@
             <a:lstStyle/>
             <a:p>
               <a:pPr algn="ctr"/>
-              <a:endParaRPr lang="en-US" sz="2395" dirty="0"/>
+              <a:endParaRPr lang="en-US" sz="1607" dirty="0"/>
             </a:p>
           </p:txBody>
         </p:sp>
@@ -3575,7 +3575,7 @@
             <a:lstStyle/>
             <a:p>
               <a:pPr algn="ctr"/>
-              <a:endParaRPr lang="en-US" sz="2395"/>
+              <a:endParaRPr lang="en-US" sz="1607"/>
             </a:p>
           </p:txBody>
         </p:sp>
@@ -3630,7 +3630,7 @@
             <a:lstStyle/>
             <a:p>
               <a:pPr algn="ctr"/>
-              <a:endParaRPr lang="en-US" sz="2395" dirty="0"/>
+              <a:endParaRPr lang="en-US" sz="1607" dirty="0"/>
             </a:p>
           </p:txBody>
         </p:sp>
@@ -3705,7 +3705,7 @@
             <a:lstStyle/>
             <a:p>
               <a:pPr algn="ctr"/>
-              <a:endParaRPr lang="en-US" sz="2395" dirty="0">
+              <a:endParaRPr lang="en-US" sz="1607" dirty="0">
                 <a:solidFill>
                   <a:schemeClr val="tx1"/>
                 </a:solidFill>
@@ -3713,8 +3713,8 @@
             </a:p>
           </p:txBody>
         </p:sp>
-        <mc:AlternateContent xmlns:mc="http://schemas.openxmlformats.org/markup-compatibility/2006">
-          <mc:Choice xmlns:a14="http://schemas.microsoft.com/office/drawing/2010/main" Requires="a14">
+        <mc:AlternateContent xmlns:mc="http://schemas.openxmlformats.org/markup-compatibility/2006" xmlns:a14="http://schemas.microsoft.com/office/drawing/2010/main">
+          <mc:Choice Requires="a14">
             <p:sp>
               <p:nvSpPr>
                 <p:cNvPr id="87" name="TextBox 10">
@@ -3730,7 +3730,7 @@
               <p:spPr>
                 <a:xfrm>
                   <a:off x="4690464" y="3556134"/>
-                  <a:ext cx="321504" cy="500190"/>
+                  <a:ext cx="321504" cy="534214"/>
                 </a:xfrm>
                 <a:prstGeom prst="rect">
                   <a:avLst/>
@@ -3751,7 +3751,7 @@
                       </m:oMathParaPr>
                       <m:oMath xmlns:m="http://schemas.openxmlformats.org/officeDocument/2006/math">
                         <m:r>
-                          <a:rPr lang="en-US" sz="3725" i="1">
+                          <a:rPr lang="en-US" sz="2500" i="1">
                             <a:solidFill>
                               <a:schemeClr val="accent6">
                                 <a:lumMod val="60000"/>
@@ -3765,7 +3765,7 @@
                       </m:oMath>
                     </m:oMathPara>
                   </a14:m>
-                  <a:endParaRPr lang="en-US" sz="3725" dirty="0">
+                  <a:endParaRPr lang="en-US" sz="2500" dirty="0">
                     <a:solidFill>
                       <a:schemeClr val="accent6">
                         <a:lumMod val="60000"/>
@@ -3777,7 +3777,7 @@
               </p:txBody>
             </p:sp>
           </mc:Choice>
-          <mc:Fallback>
+          <mc:Fallback xmlns="">
             <p:sp>
               <p:nvSpPr>
                 <p:cNvPr id="87" name="TextBox 10">
@@ -3795,7 +3795,7 @@
               <p:spPr>
                 <a:xfrm>
                   <a:off x="4690464" y="3556134"/>
-                  <a:ext cx="321504" cy="500190"/>
+                  <a:ext cx="321504" cy="534214"/>
                 </a:xfrm>
                 <a:prstGeom prst="rect">
                   <a:avLst/>
@@ -3803,7 +3803,7 @@
                 <a:blipFill>
                   <a:blip r:embed="rId5"/>
                   <a:stretch>
-                    <a:fillRect/>
+                    <a:fillRect r="-21277"/>
                   </a:stretch>
                 </a:blipFill>
               </p:spPr>
@@ -3822,8 +3822,8 @@
             </p:sp>
           </mc:Fallback>
         </mc:AlternateContent>
-        <mc:AlternateContent xmlns:mc="http://schemas.openxmlformats.org/markup-compatibility/2006">
-          <mc:Choice xmlns:a14="http://schemas.microsoft.com/office/drawing/2010/main" Requires="a14">
+        <mc:AlternateContent xmlns:mc="http://schemas.openxmlformats.org/markup-compatibility/2006" xmlns:a14="http://schemas.microsoft.com/office/drawing/2010/main">
+          <mc:Choice Requires="a14">
             <p:sp>
               <p:nvSpPr>
                 <p:cNvPr id="88" name="TextBox 11">
@@ -3839,7 +3839,7 @@
               <p:spPr>
                 <a:xfrm>
                   <a:off x="4440286" y="3358991"/>
-                  <a:ext cx="321505" cy="500190"/>
+                  <a:ext cx="321504" cy="534214"/>
                 </a:xfrm>
                 <a:prstGeom prst="rect">
                   <a:avLst/>
@@ -3860,7 +3860,7 @@
                       </m:oMathParaPr>
                       <m:oMath xmlns:m="http://schemas.openxmlformats.org/officeDocument/2006/math">
                         <m:r>
-                          <a:rPr lang="en-US" sz="3725" i="1">
+                          <a:rPr lang="en-US" sz="2500" i="1">
                             <a:latin typeface="Cambria Math" panose="02040503050406030204" pitchFamily="18" charset="0"/>
                           </a:rPr>
                           <m:t>𝑥</m:t>
@@ -3868,12 +3868,12 @@
                       </m:oMath>
                     </m:oMathPara>
                   </a14:m>
-                  <a:endParaRPr lang="en-US" sz="3725" dirty="0"/>
+                  <a:endParaRPr lang="en-US" sz="2500" dirty="0"/>
                 </a:p>
               </p:txBody>
             </p:sp>
           </mc:Choice>
-          <mc:Fallback>
+          <mc:Fallback xmlns="">
             <p:sp>
               <p:nvSpPr>
                 <p:cNvPr id="88" name="TextBox 11">
@@ -3891,7 +3891,7 @@
               <p:spPr>
                 <a:xfrm>
                   <a:off x="4440286" y="3358991"/>
-                  <a:ext cx="321505" cy="500190"/>
+                  <a:ext cx="321504" cy="534214"/>
                 </a:xfrm>
                 <a:prstGeom prst="rect">
                   <a:avLst/>
@@ -3899,7 +3899,7 @@
                 <a:blipFill>
                   <a:blip r:embed="rId6"/>
                   <a:stretch>
-                    <a:fillRect/>
+                    <a:fillRect r="-19149"/>
                   </a:stretch>
                 </a:blipFill>
               </p:spPr>
@@ -3997,12 +3997,12 @@
             <a:lstStyle/>
             <a:p>
               <a:pPr algn="ctr"/>
-              <a:endParaRPr lang="en-US" sz="2395" dirty="0"/>
+              <a:endParaRPr lang="en-US" sz="1607" dirty="0"/>
             </a:p>
           </p:txBody>
         </p:sp>
-        <mc:AlternateContent xmlns:mc="http://schemas.openxmlformats.org/markup-compatibility/2006">
-          <mc:Choice xmlns:a14="http://schemas.microsoft.com/office/drawing/2010/main" Requires="a14">
+        <mc:AlternateContent xmlns:mc="http://schemas.openxmlformats.org/markup-compatibility/2006" xmlns:a14="http://schemas.microsoft.com/office/drawing/2010/main">
+          <mc:Choice Requires="a14">
             <p:sp>
               <p:nvSpPr>
                 <p:cNvPr id="90" name="TextBox 12">
@@ -4018,7 +4018,7 @@
               <p:spPr>
                 <a:xfrm>
                   <a:off x="5682303" y="3497725"/>
-                  <a:ext cx="321505" cy="500190"/>
+                  <a:ext cx="321504" cy="534214"/>
                 </a:xfrm>
                 <a:prstGeom prst="rect">
                   <a:avLst/>
@@ -4039,7 +4039,7 @@
                       </m:oMathParaPr>
                       <m:oMath xmlns:m="http://schemas.openxmlformats.org/officeDocument/2006/math">
                         <m:r>
-                          <a:rPr lang="en-US" sz="3725" i="1">
+                          <a:rPr lang="en-US" sz="2500" i="1">
                             <a:latin typeface="Cambria Math" panose="02040503050406030204" pitchFamily="18" charset="0"/>
                           </a:rPr>
                           <m:t>𝑦</m:t>
@@ -4047,12 +4047,12 @@
                       </m:oMath>
                     </m:oMathPara>
                   </a14:m>
-                  <a:endParaRPr lang="en-US" sz="3725" dirty="0"/>
+                  <a:endParaRPr lang="en-US" sz="2500" dirty="0"/>
                 </a:p>
               </p:txBody>
             </p:sp>
           </mc:Choice>
-          <mc:Fallback>
+          <mc:Fallback xmlns="">
             <p:sp>
               <p:nvSpPr>
                 <p:cNvPr id="90" name="TextBox 12">
@@ -4070,7 +4070,7 @@
               <p:spPr>
                 <a:xfrm>
                   <a:off x="5682303" y="3497725"/>
-                  <a:ext cx="321505" cy="500190"/>
+                  <a:ext cx="321504" cy="534214"/>
                 </a:xfrm>
                 <a:prstGeom prst="rect">
                   <a:avLst/>
@@ -4078,7 +4078,7 @@
                 <a:blipFill>
                   <a:blip r:embed="rId7"/>
                   <a:stretch>
-                    <a:fillRect/>
+                    <a:fillRect l="-6383" r="-34043" b="-10256"/>
                   </a:stretch>
                 </a:blipFill>
               </p:spPr>
@@ -4097,8 +4097,8 @@
             </p:sp>
           </mc:Fallback>
         </mc:AlternateContent>
-        <mc:AlternateContent xmlns:mc="http://schemas.openxmlformats.org/markup-compatibility/2006">
-          <mc:Choice xmlns:a14="http://schemas.microsoft.com/office/drawing/2010/main" Requires="a14">
+        <mc:AlternateContent xmlns:mc="http://schemas.openxmlformats.org/markup-compatibility/2006" xmlns:a14="http://schemas.microsoft.com/office/drawing/2010/main">
+          <mc:Choice Requires="a14">
             <p:sp>
               <p:nvSpPr>
                 <p:cNvPr id="91" name="TextBox 13">
@@ -4114,7 +4114,7 @@
               <p:spPr>
                 <a:xfrm>
                   <a:off x="5200614" y="2429547"/>
-                  <a:ext cx="321505" cy="500190"/>
+                  <a:ext cx="321504" cy="534214"/>
                 </a:xfrm>
                 <a:prstGeom prst="rect">
                   <a:avLst/>
@@ -4135,7 +4135,7 @@
                       </m:oMathParaPr>
                       <m:oMath xmlns:m="http://schemas.openxmlformats.org/officeDocument/2006/math">
                         <m:r>
-                          <a:rPr lang="en-US" sz="3725" i="1">
+                          <a:rPr lang="en-US" sz="2500" i="1">
                             <a:latin typeface="Cambria Math" panose="02040503050406030204" pitchFamily="18" charset="0"/>
                           </a:rPr>
                           <m:t>𝑧</m:t>
@@ -4143,12 +4143,12 @@
                       </m:oMath>
                     </m:oMathPara>
                   </a14:m>
-                  <a:endParaRPr lang="en-US" sz="3725" dirty="0"/>
+                  <a:endParaRPr lang="en-US" sz="2500" dirty="0"/>
                 </a:p>
               </p:txBody>
             </p:sp>
           </mc:Choice>
-          <mc:Fallback>
+          <mc:Fallback xmlns="">
             <p:sp>
               <p:nvSpPr>
                 <p:cNvPr id="91" name="TextBox 13">
@@ -4166,7 +4166,7 @@
               <p:spPr>
                 <a:xfrm>
                   <a:off x="5200614" y="2429547"/>
-                  <a:ext cx="321505" cy="500190"/>
+                  <a:ext cx="321504" cy="534214"/>
                 </a:xfrm>
                 <a:prstGeom prst="rect">
                   <a:avLst/>
@@ -4174,7 +4174,7 @@
                 <a:blipFill>
                   <a:blip r:embed="rId8"/>
                   <a:stretch>
-                    <a:fillRect/>
+                    <a:fillRect r="-10417"/>
                   </a:stretch>
                 </a:blipFill>
               </p:spPr>
@@ -4243,7 +4243,7 @@
             <a:lstStyle/>
             <a:p>
               <a:pPr algn="ctr"/>
-              <a:endParaRPr lang="en-US" sz="2395" dirty="0"/>
+              <a:endParaRPr lang="en-US" sz="1607" dirty="0"/>
             </a:p>
           </p:txBody>
         </p:sp>
@@ -4370,7 +4370,7 @@
             <a:lstStyle/>
             <a:p>
               <a:pPr algn="ctr"/>
-              <a:endParaRPr lang="en-US" sz="2395" dirty="0"/>
+              <a:endParaRPr lang="en-US" sz="1607" dirty="0"/>
             </a:p>
           </p:txBody>
         </p:sp>
@@ -4456,7 +4456,7 @@
             <a:lstStyle/>
             <a:p>
               <a:pPr algn="ctr"/>
-              <a:endParaRPr lang="en-US" sz="2395" dirty="0">
+              <a:endParaRPr lang="en-US" sz="1607" dirty="0">
                 <a:solidFill>
                   <a:schemeClr val="tx1"/>
                 </a:solidFill>
@@ -4508,8 +4508,8 @@
             </a:fontRef>
           </p:style>
         </p:cxnSp>
-        <mc:AlternateContent xmlns:mc="http://schemas.openxmlformats.org/markup-compatibility/2006">
-          <mc:Choice xmlns:a14="http://schemas.microsoft.com/office/drawing/2010/main" Requires="a14">
+        <mc:AlternateContent xmlns:mc="http://schemas.openxmlformats.org/markup-compatibility/2006" xmlns:a14="http://schemas.microsoft.com/office/drawing/2010/main">
+          <mc:Choice Requires="a14">
             <p:sp>
               <p:nvSpPr>
                 <p:cNvPr id="97" name="TextBox 10">
@@ -4525,7 +4525,7 @@
               <p:spPr>
                 <a:xfrm>
                   <a:off x="5379379" y="3022371"/>
-                  <a:ext cx="321504" cy="500190"/>
+                  <a:ext cx="321504" cy="534214"/>
                 </a:xfrm>
                 <a:prstGeom prst="rect">
                   <a:avLst/>
@@ -4546,7 +4546,7 @@
                       </m:oMathParaPr>
                       <m:oMath xmlns:m="http://schemas.openxmlformats.org/officeDocument/2006/math">
                         <m:r>
-                          <a:rPr lang="en-US" sz="3725" i="1">
+                          <a:rPr lang="en-US" sz="2500" i="1">
                             <a:solidFill>
                               <a:schemeClr val="accent1">
                                 <a:lumMod val="40000"/>
@@ -4560,7 +4560,7 @@
                       </m:oMath>
                     </m:oMathPara>
                   </a14:m>
-                  <a:endParaRPr lang="en-US" sz="3725" dirty="0">
+                  <a:endParaRPr lang="en-US" sz="2500" dirty="0">
                     <a:solidFill>
                       <a:schemeClr val="accent1">
                         <a:lumMod val="40000"/>
@@ -4572,7 +4572,7 @@
               </p:txBody>
             </p:sp>
           </mc:Choice>
-          <mc:Fallback>
+          <mc:Fallback xmlns="">
             <p:sp>
               <p:nvSpPr>
                 <p:cNvPr id="97" name="TextBox 10">
@@ -4590,7 +4590,7 @@
               <p:spPr>
                 <a:xfrm>
                   <a:off x="5379379" y="3022371"/>
-                  <a:ext cx="321504" cy="500190"/>
+                  <a:ext cx="321504" cy="534214"/>
                 </a:xfrm>
                 <a:prstGeom prst="rect">
                   <a:avLst/>
@@ -4598,7 +4598,7 @@
                 <a:blipFill>
                   <a:blip r:embed="rId9"/>
                   <a:stretch>
-                    <a:fillRect/>
+                    <a:fillRect l="-8511" r="-29787"/>
                   </a:stretch>
                 </a:blipFill>
               </p:spPr>
@@ -4830,7 +4830,7 @@
             <a:lstStyle/>
             <a:p>
               <a:pPr algn="ctr"/>
-              <a:endParaRPr lang="en-US" sz="2395"/>
+              <a:endParaRPr lang="en-US" sz="1607"/>
             </a:p>
           </p:txBody>
         </p:sp>
@@ -4913,7 +4913,7 @@
             <a:lstStyle/>
             <a:p>
               <a:pPr algn="ctr"/>
-              <a:endParaRPr lang="en-US" sz="2395" dirty="0"/>
+              <a:endParaRPr lang="en-US" sz="1607" dirty="0"/>
             </a:p>
           </p:txBody>
         </p:sp>
@@ -4932,8 +4932,8 @@
         </p:nvGrpSpPr>
         <p:grpSpPr>
           <a:xfrm>
-            <a:off x="9836919" y="-2465235"/>
-            <a:ext cx="2781092" cy="2781092"/>
+            <a:off x="6601676" y="-1676087"/>
+            <a:ext cx="1866424" cy="1866424"/>
             <a:chOff x="7369987" y="1465126"/>
             <a:chExt cx="2090057" cy="2090057"/>
           </a:xfrm>
@@ -4980,7 +4980,7 @@
             </a:fontRef>
           </p:style>
           <p:txBody>
-            <a:bodyPr rot="0" spcFirstLastPara="0" vertOverflow="overflow" horzOverflow="overflow" vert="horz" wrap="square" lIns="121674" tIns="60836" rIns="121674" bIns="60836" numCol="1" spcCol="0" rtlCol="0" fromWordArt="0" anchor="ctr" anchorCtr="0" forceAA="0" compatLnSpc="1">
+            <a:bodyPr rot="0" spcFirstLastPara="0" vertOverflow="overflow" horzOverflow="overflow" vert="horz" wrap="square" lIns="81657" tIns="40828" rIns="81657" bIns="40828" numCol="1" spcCol="0" rtlCol="0" fromWordArt="0" anchor="ctr" anchorCtr="0" forceAA="0" compatLnSpc="1">
               <a:prstTxWarp prst="textNoShape">
                 <a:avLst/>
               </a:prstTxWarp>
@@ -4989,7 +4989,7 @@
             <a:lstStyle/>
             <a:p>
               <a:pPr algn="ctr"/>
-              <a:endParaRPr lang="zh-TW" altLang="en-US" sz="2395" dirty="0"/>
+              <a:endParaRPr lang="zh-TW" altLang="en-US" sz="1607" dirty="0"/>
             </a:p>
           </p:txBody>
         </p:sp>
@@ -5037,7 +5037,7 @@
             </a:fontRef>
           </p:style>
           <p:txBody>
-            <a:bodyPr rot="0" spcFirstLastPara="0" vertOverflow="overflow" horzOverflow="overflow" vert="horz" wrap="square" lIns="121674" tIns="60836" rIns="121674" bIns="60836" numCol="1" spcCol="0" rtlCol="0" fromWordArt="0" anchor="ctr" anchorCtr="0" forceAA="0" compatLnSpc="1">
+            <a:bodyPr rot="0" spcFirstLastPara="0" vertOverflow="overflow" horzOverflow="overflow" vert="horz" wrap="square" lIns="81657" tIns="40828" rIns="81657" bIns="40828" numCol="1" spcCol="0" rtlCol="0" fromWordArt="0" anchor="ctr" anchorCtr="0" forceAA="0" compatLnSpc="1">
               <a:prstTxWarp prst="textNoShape">
                 <a:avLst/>
               </a:prstTxWarp>
@@ -5046,7 +5046,7 @@
             <a:lstStyle/>
             <a:p>
               <a:pPr algn="ctr"/>
-              <a:endParaRPr lang="zh-TW" altLang="en-US" sz="2395"/>
+              <a:endParaRPr lang="zh-TW" altLang="en-US" sz="1607"/>
             </a:p>
           </p:txBody>
         </p:sp>
@@ -5094,7 +5094,7 @@
             </a:fontRef>
           </p:style>
           <p:txBody>
-            <a:bodyPr rot="0" spcFirstLastPara="0" vertOverflow="overflow" horzOverflow="overflow" vert="horz" wrap="square" lIns="121674" tIns="60836" rIns="121674" bIns="60836" numCol="1" spcCol="0" rtlCol="0" fromWordArt="0" anchor="ctr" anchorCtr="0" forceAA="0" compatLnSpc="1">
+            <a:bodyPr rot="0" spcFirstLastPara="0" vertOverflow="overflow" horzOverflow="overflow" vert="horz" wrap="square" lIns="81657" tIns="40828" rIns="81657" bIns="40828" numCol="1" spcCol="0" rtlCol="0" fromWordArt="0" anchor="ctr" anchorCtr="0" forceAA="0" compatLnSpc="1">
               <a:prstTxWarp prst="textNoShape">
                 <a:avLst/>
               </a:prstTxWarp>
@@ -5103,7 +5103,7 @@
             <a:lstStyle/>
             <a:p>
               <a:pPr algn="ctr"/>
-              <a:endParaRPr lang="zh-TW" altLang="en-US" sz="2395"/>
+              <a:endParaRPr lang="zh-TW" altLang="en-US" sz="1607"/>
             </a:p>
           </p:txBody>
         </p:sp>
@@ -5151,7 +5151,7 @@
             </a:fontRef>
           </p:style>
           <p:txBody>
-            <a:bodyPr rot="0" spcFirstLastPara="0" vertOverflow="overflow" horzOverflow="overflow" vert="horz" wrap="square" lIns="121674" tIns="60836" rIns="121674" bIns="60836" numCol="1" spcCol="0" rtlCol="0" fromWordArt="0" anchor="ctr" anchorCtr="0" forceAA="0" compatLnSpc="1">
+            <a:bodyPr rot="0" spcFirstLastPara="0" vertOverflow="overflow" horzOverflow="overflow" vert="horz" wrap="square" lIns="81657" tIns="40828" rIns="81657" bIns="40828" numCol="1" spcCol="0" rtlCol="0" fromWordArt="0" anchor="ctr" anchorCtr="0" forceAA="0" compatLnSpc="1">
               <a:prstTxWarp prst="textNoShape">
                 <a:avLst/>
               </a:prstTxWarp>
@@ -5160,7 +5160,7 @@
             <a:lstStyle/>
             <a:p>
               <a:pPr algn="ctr"/>
-              <a:endParaRPr lang="zh-TW" altLang="en-US" sz="2395"/>
+              <a:endParaRPr lang="zh-TW" altLang="en-US" sz="1607"/>
             </a:p>
           </p:txBody>
         </p:sp>
@@ -5208,7 +5208,7 @@
             </a:fontRef>
           </p:style>
           <p:txBody>
-            <a:bodyPr rot="0" spcFirstLastPara="0" vertOverflow="overflow" horzOverflow="overflow" vert="horz" wrap="square" lIns="121674" tIns="60836" rIns="121674" bIns="60836" numCol="1" spcCol="0" rtlCol="0" fromWordArt="0" anchor="ctr" anchorCtr="0" forceAA="0" compatLnSpc="1">
+            <a:bodyPr rot="0" spcFirstLastPara="0" vertOverflow="overflow" horzOverflow="overflow" vert="horz" wrap="square" lIns="81657" tIns="40828" rIns="81657" bIns="40828" numCol="1" spcCol="0" rtlCol="0" fromWordArt="0" anchor="ctr" anchorCtr="0" forceAA="0" compatLnSpc="1">
               <a:prstTxWarp prst="textNoShape">
                 <a:avLst/>
               </a:prstTxWarp>
@@ -5217,7 +5217,7 @@
             <a:lstStyle/>
             <a:p>
               <a:pPr algn="ctr"/>
-              <a:endParaRPr lang="zh-TW" altLang="en-US" sz="2395"/>
+              <a:endParaRPr lang="zh-TW" altLang="en-US" sz="1607"/>
             </a:p>
           </p:txBody>
         </p:sp>
@@ -5265,7 +5265,7 @@
             </a:fontRef>
           </p:style>
           <p:txBody>
-            <a:bodyPr rot="0" spcFirstLastPara="0" vertOverflow="overflow" horzOverflow="overflow" vert="horz" wrap="square" lIns="121674" tIns="60836" rIns="121674" bIns="60836" numCol="1" spcCol="0" rtlCol="0" fromWordArt="0" anchor="ctr" anchorCtr="0" forceAA="0" compatLnSpc="1">
+            <a:bodyPr rot="0" spcFirstLastPara="0" vertOverflow="overflow" horzOverflow="overflow" vert="horz" wrap="square" lIns="81657" tIns="40828" rIns="81657" bIns="40828" numCol="1" spcCol="0" rtlCol="0" fromWordArt="0" anchor="ctr" anchorCtr="0" forceAA="0" compatLnSpc="1">
               <a:prstTxWarp prst="textNoShape">
                 <a:avLst/>
               </a:prstTxWarp>
@@ -5274,7 +5274,7 @@
             <a:lstStyle/>
             <a:p>
               <a:pPr algn="ctr"/>
-              <a:endParaRPr lang="zh-TW" altLang="en-US" sz="2395"/>
+              <a:endParaRPr lang="zh-TW" altLang="en-US" sz="1607"/>
             </a:p>
           </p:txBody>
         </p:sp>
@@ -5322,7 +5322,7 @@
             </a:fontRef>
           </p:style>
           <p:txBody>
-            <a:bodyPr rot="0" spcFirstLastPara="0" vertOverflow="overflow" horzOverflow="overflow" vert="horz" wrap="square" lIns="121674" tIns="60836" rIns="121674" bIns="60836" numCol="1" spcCol="0" rtlCol="0" fromWordArt="0" anchor="ctr" anchorCtr="0" forceAA="0" compatLnSpc="1">
+            <a:bodyPr rot="0" spcFirstLastPara="0" vertOverflow="overflow" horzOverflow="overflow" vert="horz" wrap="square" lIns="81657" tIns="40828" rIns="81657" bIns="40828" numCol="1" spcCol="0" rtlCol="0" fromWordArt="0" anchor="ctr" anchorCtr="0" forceAA="0" compatLnSpc="1">
               <a:prstTxWarp prst="textNoShape">
                 <a:avLst/>
               </a:prstTxWarp>
@@ -5331,7 +5331,7 @@
             <a:lstStyle/>
             <a:p>
               <a:pPr algn="ctr"/>
-              <a:endParaRPr lang="zh-TW" altLang="en-US" sz="2395"/>
+              <a:endParaRPr lang="zh-TW" altLang="en-US" sz="1607"/>
             </a:p>
           </p:txBody>
         </p:sp>
@@ -5379,7 +5379,7 @@
             </a:fontRef>
           </p:style>
           <p:txBody>
-            <a:bodyPr rot="0" spcFirstLastPara="0" vertOverflow="overflow" horzOverflow="overflow" vert="horz" wrap="square" lIns="121674" tIns="60836" rIns="121674" bIns="60836" numCol="1" spcCol="0" rtlCol="0" fromWordArt="0" anchor="ctr" anchorCtr="0" forceAA="0" compatLnSpc="1">
+            <a:bodyPr rot="0" spcFirstLastPara="0" vertOverflow="overflow" horzOverflow="overflow" vert="horz" wrap="square" lIns="81657" tIns="40828" rIns="81657" bIns="40828" numCol="1" spcCol="0" rtlCol="0" fromWordArt="0" anchor="ctr" anchorCtr="0" forceAA="0" compatLnSpc="1">
               <a:prstTxWarp prst="textNoShape">
                 <a:avLst/>
               </a:prstTxWarp>
@@ -5388,7 +5388,7 @@
             <a:lstStyle/>
             <a:p>
               <a:pPr algn="ctr"/>
-              <a:endParaRPr lang="zh-TW" altLang="en-US" sz="2395" dirty="0"/>
+              <a:endParaRPr lang="zh-TW" altLang="en-US" sz="1607" dirty="0"/>
             </a:p>
           </p:txBody>
         </p:sp>
@@ -5436,7 +5436,7 @@
             </a:fontRef>
           </p:style>
           <p:txBody>
-            <a:bodyPr rot="0" spcFirstLastPara="0" vertOverflow="overflow" horzOverflow="overflow" vert="horz" wrap="square" lIns="121674" tIns="60836" rIns="121674" bIns="60836" numCol="1" spcCol="0" rtlCol="0" fromWordArt="0" anchor="ctr" anchorCtr="0" forceAA="0" compatLnSpc="1">
+            <a:bodyPr rot="0" spcFirstLastPara="0" vertOverflow="overflow" horzOverflow="overflow" vert="horz" wrap="square" lIns="81657" tIns="40828" rIns="81657" bIns="40828" numCol="1" spcCol="0" rtlCol="0" fromWordArt="0" anchor="ctr" anchorCtr="0" forceAA="0" compatLnSpc="1">
               <a:prstTxWarp prst="textNoShape">
                 <a:avLst/>
               </a:prstTxWarp>
@@ -5445,7 +5445,7 @@
             <a:lstStyle/>
             <a:p>
               <a:pPr algn="ctr"/>
-              <a:endParaRPr lang="zh-TW" altLang="en-US" sz="2395"/>
+              <a:endParaRPr lang="zh-TW" altLang="en-US" sz="1607"/>
             </a:p>
           </p:txBody>
         </p:sp>
@@ -5485,7 +5485,7 @@
             </a:fontRef>
           </p:style>
           <p:txBody>
-            <a:bodyPr rot="0" spcFirstLastPara="0" vertOverflow="overflow" horzOverflow="overflow" vert="horz" wrap="square" lIns="121674" tIns="60836" rIns="121674" bIns="60836" numCol="1" spcCol="0" rtlCol="0" fromWordArt="0" anchor="ctr" anchorCtr="0" forceAA="0" compatLnSpc="1">
+            <a:bodyPr rot="0" spcFirstLastPara="0" vertOverflow="overflow" horzOverflow="overflow" vert="horz" wrap="square" lIns="81657" tIns="40828" rIns="81657" bIns="40828" numCol="1" spcCol="0" rtlCol="0" fromWordArt="0" anchor="ctr" anchorCtr="0" forceAA="0" compatLnSpc="1">
               <a:prstTxWarp prst="textNoShape">
                 <a:avLst/>
               </a:prstTxWarp>
@@ -5494,7 +5494,7 @@
             <a:lstStyle/>
             <a:p>
               <a:pPr algn="ctr"/>
-              <a:endParaRPr lang="zh-TW" altLang="en-US" sz="2395"/>
+              <a:endParaRPr lang="zh-TW" altLang="en-US" sz="1607"/>
             </a:p>
           </p:txBody>
         </p:sp>
@@ -5534,7 +5534,7 @@
             </a:fontRef>
           </p:style>
           <p:txBody>
-            <a:bodyPr rot="0" spcFirstLastPara="0" vertOverflow="overflow" horzOverflow="overflow" vert="horz" wrap="square" lIns="121674" tIns="60836" rIns="121674" bIns="60836" numCol="1" spcCol="0" rtlCol="0" fromWordArt="0" anchor="ctr" anchorCtr="0" forceAA="0" compatLnSpc="1">
+            <a:bodyPr rot="0" spcFirstLastPara="0" vertOverflow="overflow" horzOverflow="overflow" vert="horz" wrap="square" lIns="81657" tIns="40828" rIns="81657" bIns="40828" numCol="1" spcCol="0" rtlCol="0" fromWordArt="0" anchor="ctr" anchorCtr="0" forceAA="0" compatLnSpc="1">
               <a:prstTxWarp prst="textNoShape">
                 <a:avLst/>
               </a:prstTxWarp>
@@ -5543,7 +5543,7 @@
             <a:lstStyle/>
             <a:p>
               <a:pPr algn="ctr"/>
-              <a:endParaRPr lang="zh-TW" altLang="en-US" sz="2395"/>
+              <a:endParaRPr lang="zh-TW" altLang="en-US" sz="1607"/>
             </a:p>
           </p:txBody>
         </p:sp>
@@ -5583,7 +5583,7 @@
             </a:fontRef>
           </p:style>
           <p:txBody>
-            <a:bodyPr rot="0" spcFirstLastPara="0" vertOverflow="overflow" horzOverflow="overflow" vert="horz" wrap="square" lIns="121674" tIns="60836" rIns="121674" bIns="60836" numCol="1" spcCol="0" rtlCol="0" fromWordArt="0" anchor="ctr" anchorCtr="0" forceAA="0" compatLnSpc="1">
+            <a:bodyPr rot="0" spcFirstLastPara="0" vertOverflow="overflow" horzOverflow="overflow" vert="horz" wrap="square" lIns="81657" tIns="40828" rIns="81657" bIns="40828" numCol="1" spcCol="0" rtlCol="0" fromWordArt="0" anchor="ctr" anchorCtr="0" forceAA="0" compatLnSpc="1">
               <a:prstTxWarp prst="textNoShape">
                 <a:avLst/>
               </a:prstTxWarp>
@@ -5592,7 +5592,7 @@
             <a:lstStyle/>
             <a:p>
               <a:pPr algn="ctr"/>
-              <a:endParaRPr lang="zh-TW" altLang="en-US" sz="2395"/>
+              <a:endParaRPr lang="zh-TW" altLang="en-US" sz="1607"/>
             </a:p>
           </p:txBody>
         </p:sp>
@@ -5632,7 +5632,7 @@
             </a:fontRef>
           </p:style>
           <p:txBody>
-            <a:bodyPr rot="0" spcFirstLastPara="0" vertOverflow="overflow" horzOverflow="overflow" vert="horz" wrap="square" lIns="121674" tIns="60836" rIns="121674" bIns="60836" numCol="1" spcCol="0" rtlCol="0" fromWordArt="0" anchor="ctr" anchorCtr="0" forceAA="0" compatLnSpc="1">
+            <a:bodyPr rot="0" spcFirstLastPara="0" vertOverflow="overflow" horzOverflow="overflow" vert="horz" wrap="square" lIns="81657" tIns="40828" rIns="81657" bIns="40828" numCol="1" spcCol="0" rtlCol="0" fromWordArt="0" anchor="ctr" anchorCtr="0" forceAA="0" compatLnSpc="1">
               <a:prstTxWarp prst="textNoShape">
                 <a:avLst/>
               </a:prstTxWarp>
@@ -5641,7 +5641,7 @@
             <a:lstStyle/>
             <a:p>
               <a:pPr algn="ctr"/>
-              <a:endParaRPr lang="zh-TW" altLang="en-US" sz="2395"/>
+              <a:endParaRPr lang="zh-TW" altLang="en-US" sz="1607"/>
             </a:p>
           </p:txBody>
         </p:sp>
@@ -5681,7 +5681,7 @@
             </a:fontRef>
           </p:style>
           <p:txBody>
-            <a:bodyPr rot="0" spcFirstLastPara="0" vertOverflow="overflow" horzOverflow="overflow" vert="horz" wrap="square" lIns="121674" tIns="60836" rIns="121674" bIns="60836" numCol="1" spcCol="0" rtlCol="0" fromWordArt="0" anchor="ctr" anchorCtr="0" forceAA="0" compatLnSpc="1">
+            <a:bodyPr rot="0" spcFirstLastPara="0" vertOverflow="overflow" horzOverflow="overflow" vert="horz" wrap="square" lIns="81657" tIns="40828" rIns="81657" bIns="40828" numCol="1" spcCol="0" rtlCol="0" fromWordArt="0" anchor="ctr" anchorCtr="0" forceAA="0" compatLnSpc="1">
               <a:prstTxWarp prst="textNoShape">
                 <a:avLst/>
               </a:prstTxWarp>
@@ -5690,7 +5690,7 @@
             <a:lstStyle/>
             <a:p>
               <a:pPr algn="ctr"/>
-              <a:endParaRPr lang="zh-TW" altLang="en-US" sz="2395"/>
+              <a:endParaRPr lang="zh-TW" altLang="en-US" sz="1607"/>
             </a:p>
           </p:txBody>
         </p:sp>
@@ -5730,7 +5730,7 @@
             </a:fontRef>
           </p:style>
           <p:txBody>
-            <a:bodyPr rot="0" spcFirstLastPara="0" vertOverflow="overflow" horzOverflow="overflow" vert="horz" wrap="square" lIns="121674" tIns="60836" rIns="121674" bIns="60836" numCol="1" spcCol="0" rtlCol="0" fromWordArt="0" anchor="ctr" anchorCtr="0" forceAA="0" compatLnSpc="1">
+            <a:bodyPr rot="0" spcFirstLastPara="0" vertOverflow="overflow" horzOverflow="overflow" vert="horz" wrap="square" lIns="81657" tIns="40828" rIns="81657" bIns="40828" numCol="1" spcCol="0" rtlCol="0" fromWordArt="0" anchor="ctr" anchorCtr="0" forceAA="0" compatLnSpc="1">
               <a:prstTxWarp prst="textNoShape">
                 <a:avLst/>
               </a:prstTxWarp>
@@ -5739,7 +5739,7 @@
             <a:lstStyle/>
             <a:p>
               <a:pPr algn="ctr"/>
-              <a:endParaRPr lang="zh-TW" altLang="en-US" sz="2395"/>
+              <a:endParaRPr lang="zh-TW" altLang="en-US" sz="1607"/>
             </a:p>
           </p:txBody>
         </p:sp>
@@ -5779,7 +5779,7 @@
             </a:fontRef>
           </p:style>
           <p:txBody>
-            <a:bodyPr rot="0" spcFirstLastPara="0" vertOverflow="overflow" horzOverflow="overflow" vert="horz" wrap="square" lIns="121674" tIns="60836" rIns="121674" bIns="60836" numCol="1" spcCol="0" rtlCol="0" fromWordArt="0" anchor="ctr" anchorCtr="0" forceAA="0" compatLnSpc="1">
+            <a:bodyPr rot="0" spcFirstLastPara="0" vertOverflow="overflow" horzOverflow="overflow" vert="horz" wrap="square" lIns="81657" tIns="40828" rIns="81657" bIns="40828" numCol="1" spcCol="0" rtlCol="0" fromWordArt="0" anchor="ctr" anchorCtr="0" forceAA="0" compatLnSpc="1">
               <a:prstTxWarp prst="textNoShape">
                 <a:avLst/>
               </a:prstTxWarp>
@@ -5788,7 +5788,7 @@
             <a:lstStyle/>
             <a:p>
               <a:pPr algn="ctr"/>
-              <a:endParaRPr lang="zh-TW" altLang="en-US" sz="2395"/>
+              <a:endParaRPr lang="zh-TW" altLang="en-US" sz="1607"/>
             </a:p>
           </p:txBody>
         </p:sp>
@@ -5828,7 +5828,7 @@
             </a:fontRef>
           </p:style>
           <p:txBody>
-            <a:bodyPr rot="0" spcFirstLastPara="0" vertOverflow="overflow" horzOverflow="overflow" vert="horz" wrap="square" lIns="121674" tIns="60836" rIns="121674" bIns="60836" numCol="1" spcCol="0" rtlCol="0" fromWordArt="0" anchor="ctr" anchorCtr="0" forceAA="0" compatLnSpc="1">
+            <a:bodyPr rot="0" spcFirstLastPara="0" vertOverflow="overflow" horzOverflow="overflow" vert="horz" wrap="square" lIns="81657" tIns="40828" rIns="81657" bIns="40828" numCol="1" spcCol="0" rtlCol="0" fromWordArt="0" anchor="ctr" anchorCtr="0" forceAA="0" compatLnSpc="1">
               <a:prstTxWarp prst="textNoShape">
                 <a:avLst/>
               </a:prstTxWarp>
@@ -5837,13 +5837,13 @@
             <a:lstStyle/>
             <a:p>
               <a:pPr algn="ctr"/>
-              <a:endParaRPr lang="zh-TW" altLang="en-US" sz="2395"/>
+              <a:endParaRPr lang="zh-TW" altLang="en-US" sz="1607"/>
             </a:p>
           </p:txBody>
         </p:sp>
       </p:grpSp>
-      <mc:AlternateContent xmlns:mc="http://schemas.openxmlformats.org/markup-compatibility/2006">
-        <mc:Choice xmlns:a14="http://schemas.microsoft.com/office/drawing/2010/main" Requires="a14">
+      <mc:AlternateContent xmlns:mc="http://schemas.openxmlformats.org/markup-compatibility/2006" xmlns:a14="http://schemas.microsoft.com/office/drawing/2010/main">
+        <mc:Choice Requires="a14">
           <p:sp>
             <p:nvSpPr>
               <p:cNvPr id="159" name="文字方塊 158">
@@ -5858,8 +5858,8 @@
             </p:nvSpPr>
             <p:spPr>
               <a:xfrm>
-                <a:off x="6528125" y="4257159"/>
-                <a:ext cx="1965682" cy="460895"/>
+                <a:off x="4381107" y="2813756"/>
+                <a:ext cx="1319193" cy="339645"/>
               </a:xfrm>
               <a:prstGeom prst="rect">
                 <a:avLst/>
@@ -5880,7 +5880,7 @@
                     </m:oMathParaPr>
                     <m:oMath xmlns:m="http://schemas.openxmlformats.org/officeDocument/2006/math">
                       <m:r>
-                        <a:rPr lang="en-US" altLang="zh-TW" sz="2395" i="1">
+                        <a:rPr lang="en-US" altLang="zh-TW" sz="1607" i="1">
                           <a:latin typeface="Cambria Math" panose="02040503050406030204" pitchFamily="18" charset="0"/>
                         </a:rPr>
                         <m:t>|</m:t>
@@ -5890,35 +5890,29 @@
                           <m:begChr m:val=""/>
                           <m:endChr m:val="⟩"/>
                           <m:ctrlPr>
-                            <a:rPr lang="en-US" altLang="zh-TW" sz="2395" i="1">
+                            <a:rPr lang="en-US" altLang="zh-TW" sz="1607" i="1">
                               <a:latin typeface="Cambria Math" panose="02040503050406030204" pitchFamily="18" charset="0"/>
                             </a:rPr>
                           </m:ctrlPr>
                         </m:dPr>
                         <m:e>
                           <m:r>
-                            <a:rPr lang="en-US" altLang="zh-TW" sz="2395" i="1">
+                            <a:rPr lang="en-US" altLang="zh-TW" sz="1607" i="1">
                               <a:latin typeface="Cambria Math" panose="02040503050406030204" pitchFamily="18" charset="0"/>
                             </a:rPr>
-                            <m:t>1, </m:t>
-                          </m:r>
-                          <m:r>
-                            <a:rPr lang="en-US" altLang="zh-TW" sz="2395" i="1">
-                              <a:latin typeface="Cambria Math" panose="02040503050406030204" pitchFamily="18" charset="0"/>
-                            </a:rPr>
-                            <m:t>1</m:t>
+                            <m:t>1, 1</m:t>
                           </m:r>
                         </m:e>
                       </m:d>
                     </m:oMath>
                   </m:oMathPara>
                 </a14:m>
-                <a:endParaRPr lang="zh-TW" altLang="en-US" sz="2395" dirty="0"/>
+                <a:endParaRPr lang="zh-TW" altLang="en-US" sz="1607" dirty="0"/>
               </a:p>
             </p:txBody>
           </p:sp>
         </mc:Choice>
-        <mc:Fallback>
+        <mc:Fallback xmlns="">
           <p:sp>
             <p:nvSpPr>
               <p:cNvPr id="159" name="文字方塊 158">
@@ -5935,8 +5929,8 @@
             </p:nvSpPr>
             <p:spPr>
               <a:xfrm>
-                <a:off x="6528125" y="4257159"/>
-                <a:ext cx="1965682" cy="460895"/>
+                <a:off x="4381107" y="2813756"/>
+                <a:ext cx="1319193" cy="339645"/>
               </a:xfrm>
               <a:prstGeom prst="rect">
                 <a:avLst/>
@@ -5944,7 +5938,7 @@
               <a:blipFill>
                 <a:blip r:embed="rId10"/>
                 <a:stretch>
-                  <a:fillRect t="-130263" r="-4658" b="-194737"/>
+                  <a:fillRect t="-110909" r="-3704" b="-172727"/>
                 </a:stretch>
               </a:blipFill>
             </p:spPr>
@@ -5963,8 +5957,8 @@
           </p:sp>
         </mc:Fallback>
       </mc:AlternateContent>
-      <mc:AlternateContent xmlns:mc="http://schemas.openxmlformats.org/markup-compatibility/2006">
-        <mc:Choice xmlns:a14="http://schemas.microsoft.com/office/drawing/2010/main" Requires="a14">
+      <mc:AlternateContent xmlns:mc="http://schemas.openxmlformats.org/markup-compatibility/2006" xmlns:a14="http://schemas.microsoft.com/office/drawing/2010/main">
+        <mc:Choice Requires="a14">
           <p:sp>
             <p:nvSpPr>
               <p:cNvPr id="160" name="文字方塊 159">
@@ -5979,8 +5973,8 @@
             </p:nvSpPr>
             <p:spPr>
               <a:xfrm>
-                <a:off x="6601897" y="438661"/>
-                <a:ext cx="1965681" cy="460895"/>
+                <a:off x="4430614" y="272760"/>
+                <a:ext cx="1319192" cy="339645"/>
               </a:xfrm>
               <a:prstGeom prst="rect">
                 <a:avLst/>
@@ -6001,7 +5995,7 @@
                     </m:oMathParaPr>
                     <m:oMath xmlns:m="http://schemas.openxmlformats.org/officeDocument/2006/math">
                       <m:r>
-                        <a:rPr lang="en-US" altLang="zh-TW" sz="2395" i="1">
+                        <a:rPr lang="en-US" altLang="zh-TW" sz="1607" i="1">
                           <a:latin typeface="Cambria Math" panose="02040503050406030204" pitchFamily="18" charset="0"/>
                         </a:rPr>
                         <m:t>|</m:t>
@@ -6011,35 +6005,29 @@
                           <m:begChr m:val=""/>
                           <m:endChr m:val="⟩"/>
                           <m:ctrlPr>
-                            <a:rPr lang="en-US" altLang="zh-TW" sz="2395" i="1">
+                            <a:rPr lang="en-US" altLang="zh-TW" sz="1607" i="1">
                               <a:latin typeface="Cambria Math" panose="02040503050406030204" pitchFamily="18" charset="0"/>
                             </a:rPr>
                           </m:ctrlPr>
                         </m:dPr>
                         <m:e>
                           <m:r>
-                            <a:rPr lang="en-US" altLang="zh-TW" sz="2395" i="1">
+                            <a:rPr lang="en-US" altLang="zh-TW" sz="1607" i="1">
                               <a:latin typeface="Cambria Math" panose="02040503050406030204" pitchFamily="18" charset="0"/>
                             </a:rPr>
-                            <m:t>1, </m:t>
-                          </m:r>
-                          <m:r>
-                            <a:rPr lang="en-US" altLang="zh-TW" sz="2395" i="1">
-                              <a:latin typeface="Cambria Math" panose="02040503050406030204" pitchFamily="18" charset="0"/>
-                            </a:rPr>
-                            <m:t>1</m:t>
+                            <m:t>1, 1</m:t>
                           </m:r>
                         </m:e>
                       </m:d>
                     </m:oMath>
                   </m:oMathPara>
                 </a14:m>
-                <a:endParaRPr lang="zh-TW" altLang="en-US" sz="2395" dirty="0"/>
+                <a:endParaRPr lang="zh-TW" altLang="en-US" sz="1607" dirty="0"/>
               </a:p>
             </p:txBody>
           </p:sp>
         </mc:Choice>
-        <mc:Fallback>
+        <mc:Fallback xmlns="">
           <p:sp>
             <p:nvSpPr>
               <p:cNvPr id="160" name="文字方塊 159">
@@ -6056,8 +6044,8 @@
             </p:nvSpPr>
             <p:spPr>
               <a:xfrm>
-                <a:off x="6601897" y="438661"/>
-                <a:ext cx="1965681" cy="460895"/>
+                <a:off x="4430614" y="272760"/>
+                <a:ext cx="1319192" cy="339645"/>
               </a:xfrm>
               <a:prstGeom prst="rect">
                 <a:avLst/>
@@ -6065,7 +6053,7 @@
               <a:blipFill>
                 <a:blip r:embed="rId11"/>
                 <a:stretch>
-                  <a:fillRect t="-130263" r="-4658" b="-194737"/>
+                  <a:fillRect t="-110909" r="-3704" b="-172727"/>
                 </a:stretch>
               </a:blipFill>
             </p:spPr>
@@ -6098,10 +6086,10 @@
         </p:nvGrpSpPr>
         <p:grpSpPr>
           <a:xfrm>
-            <a:off x="7319053" y="-938965"/>
-            <a:ext cx="652480" cy="708114"/>
+            <a:off x="4911908" y="-630151"/>
+            <a:ext cx="437887" cy="506053"/>
             <a:chOff x="6721063" y="1897673"/>
-            <a:chExt cx="843851" cy="1181672"/>
+            <a:chExt cx="843851" cy="1258330"/>
           </a:xfrm>
         </p:grpSpPr>
         <p:grpSp>
@@ -6177,7 +6165,7 @@
               <a:lstStyle/>
               <a:p>
                 <a:pPr algn="ctr"/>
-                <a:endParaRPr lang="zh-TW" altLang="en-US" sz="2395">
+                <a:endParaRPr lang="zh-TW" altLang="en-US" sz="1607">
                   <a:solidFill>
                     <a:schemeClr val="tx1"/>
                   </a:solidFill>
@@ -6238,7 +6226,7 @@
               <a:lstStyle/>
               <a:p>
                 <a:pPr algn="ctr"/>
-                <a:endParaRPr lang="zh-TW" altLang="en-US" sz="2395" dirty="0">
+                <a:endParaRPr lang="zh-TW" altLang="en-US" sz="1607" dirty="0">
                   <a:solidFill>
                     <a:schemeClr val="tx1"/>
                   </a:solidFill>
@@ -6247,8 +6235,8 @@
             </p:txBody>
           </p:sp>
         </p:grpSp>
-        <mc:AlternateContent xmlns:mc="http://schemas.openxmlformats.org/markup-compatibility/2006">
-          <mc:Choice xmlns:a14="http://schemas.microsoft.com/office/drawing/2010/main" Requires="a14">
+        <mc:AlternateContent xmlns:mc="http://schemas.openxmlformats.org/markup-compatibility/2006" xmlns:a14="http://schemas.microsoft.com/office/drawing/2010/main">
+          <mc:Choice Requires="a14">
             <p:sp>
               <p:nvSpPr>
                 <p:cNvPr id="163" name="文字方塊 162">
@@ -6264,7 +6252,7 @@
               <p:spPr>
                 <a:xfrm>
                   <a:off x="6721063" y="1897673"/>
-                  <a:ext cx="416138" cy="743077"/>
+                  <a:ext cx="416137" cy="819993"/>
                 </a:xfrm>
                 <a:prstGeom prst="rect">
                   <a:avLst/>
@@ -6287,14 +6275,14 @@
                         <m:sSub>
                           <m:sSubPr>
                             <m:ctrlPr>
-                              <a:rPr lang="en-US" altLang="zh-TW" sz="2129" i="1">
+                              <a:rPr lang="en-US" altLang="zh-TW" sz="1429" i="1">
                                 <a:latin typeface="Cambria Math" panose="02040503050406030204" pitchFamily="18" charset="0"/>
                               </a:rPr>
                             </m:ctrlPr>
                           </m:sSubPr>
                           <m:e>
                             <m:r>
-                              <a:rPr lang="en-US" altLang="zh-TW" sz="2129" i="1">
+                              <a:rPr lang="en-US" altLang="zh-TW" sz="1429" i="1">
                                 <a:latin typeface="Cambria Math" panose="02040503050406030204" pitchFamily="18" charset="0"/>
                               </a:rPr>
                               <m:t>𝑞</m:t>
@@ -6302,7 +6290,7 @@
                           </m:e>
                           <m:sub>
                             <m:r>
-                              <a:rPr lang="en-US" altLang="zh-TW" sz="2129" i="1">
+                              <a:rPr lang="en-US" altLang="zh-TW" sz="1429" i="1">
                                 <a:latin typeface="Cambria Math" panose="02040503050406030204" pitchFamily="18" charset="0"/>
                               </a:rPr>
                               <m:t>𝑦</m:t>
@@ -6312,12 +6300,12 @@
                       </m:oMath>
                     </m:oMathPara>
                   </a14:m>
-                  <a:endParaRPr lang="en-US" altLang="zh-TW" sz="2129" dirty="0"/>
+                  <a:endParaRPr lang="en-US" altLang="zh-TW" sz="1429" dirty="0"/>
                 </a:p>
               </p:txBody>
             </p:sp>
           </mc:Choice>
-          <mc:Fallback>
+          <mc:Fallback xmlns="">
             <p:sp>
               <p:nvSpPr>
                 <p:cNvPr id="163" name="文字方塊 162">
@@ -6335,7 +6323,7 @@
               <p:spPr>
                 <a:xfrm>
                   <a:off x="6721063" y="1897673"/>
-                  <a:ext cx="416138" cy="743077"/>
+                  <a:ext cx="416137" cy="819993"/>
                 </a:xfrm>
                 <a:prstGeom prst="rect">
                   <a:avLst/>
@@ -6343,7 +6331,7 @@
                 <a:blipFill>
                   <a:blip r:embed="rId12"/>
                   <a:stretch>
-                    <a:fillRect l="-1923" r="-32692" b="-4110"/>
+                    <a:fillRect r="-48571"/>
                   </a:stretch>
                 </a:blipFill>
               </p:spPr>
@@ -6362,8 +6350,8 @@
             </p:sp>
           </mc:Fallback>
         </mc:AlternateContent>
-        <mc:AlternateContent xmlns:mc="http://schemas.openxmlformats.org/markup-compatibility/2006">
-          <mc:Choice xmlns:a14="http://schemas.microsoft.com/office/drawing/2010/main" Requires="a14">
+        <mc:AlternateContent xmlns:mc="http://schemas.openxmlformats.org/markup-compatibility/2006" xmlns:a14="http://schemas.microsoft.com/office/drawing/2010/main">
+          <mc:Choice Requires="a14">
             <p:sp>
               <p:nvSpPr>
                 <p:cNvPr id="164" name="文字方塊 163">
@@ -6378,8 +6366,8 @@
               </p:nvSpPr>
               <p:spPr>
                 <a:xfrm>
-                  <a:off x="7148776" y="2379539"/>
-                  <a:ext cx="416138" cy="699806"/>
+                  <a:off x="7148777" y="2379538"/>
+                  <a:ext cx="416137" cy="776465"/>
                 </a:xfrm>
                 <a:prstGeom prst="rect">
                   <a:avLst/>
@@ -6402,14 +6390,14 @@
                         <m:sSub>
                           <m:sSubPr>
                             <m:ctrlPr>
-                              <a:rPr lang="en-US" altLang="zh-TW" sz="2129" i="1">
+                              <a:rPr lang="en-US" altLang="zh-TW" sz="1429" i="1">
                                 <a:latin typeface="Cambria Math" panose="02040503050406030204" pitchFamily="18" charset="0"/>
                               </a:rPr>
                             </m:ctrlPr>
                           </m:sSubPr>
                           <m:e>
                             <m:r>
-                              <a:rPr lang="en-US" altLang="zh-TW" sz="2129" i="1">
+                              <a:rPr lang="en-US" altLang="zh-TW" sz="1429" i="1">
                                 <a:latin typeface="Cambria Math" panose="02040503050406030204" pitchFamily="18" charset="0"/>
                               </a:rPr>
                               <m:t>𝑞</m:t>
@@ -6417,7 +6405,7 @@
                           </m:e>
                           <m:sub>
                             <m:r>
-                              <a:rPr lang="en-US" altLang="zh-TW" sz="2129" i="1">
+                              <a:rPr lang="en-US" altLang="zh-TW" sz="1429" i="1">
                                 <a:latin typeface="Cambria Math" panose="02040503050406030204" pitchFamily="18" charset="0"/>
                               </a:rPr>
                               <m:t>𝑥</m:t>
@@ -6427,12 +6415,12 @@
                       </m:oMath>
                     </m:oMathPara>
                   </a14:m>
-                  <a:endParaRPr lang="en-US" altLang="zh-TW" sz="2129" dirty="0"/>
+                  <a:endParaRPr lang="en-US" altLang="zh-TW" sz="1429" dirty="0"/>
                 </a:p>
               </p:txBody>
             </p:sp>
           </mc:Choice>
-          <mc:Fallback>
+          <mc:Fallback xmlns="">
             <p:sp>
               <p:nvSpPr>
                 <p:cNvPr id="164" name="文字方塊 163">
@@ -6449,8 +6437,8 @@
               </p:nvSpPr>
               <p:spPr>
                 <a:xfrm>
-                  <a:off x="7148776" y="2379539"/>
-                  <a:ext cx="416138" cy="699806"/>
+                  <a:off x="7148777" y="2379538"/>
+                  <a:ext cx="416137" cy="776465"/>
                 </a:xfrm>
                 <a:prstGeom prst="rect">
                   <a:avLst/>
@@ -6458,7 +6446,7 @@
                 <a:blipFill>
                   <a:blip r:embed="rId13"/>
                   <a:stretch>
-                    <a:fillRect l="-1887" r="-22642" b="-7246"/>
+                    <a:fillRect r="-36111"/>
                   </a:stretch>
                 </a:blipFill>
               </p:spPr>
@@ -6492,10 +6480,10 @@
         </p:nvGrpSpPr>
         <p:grpSpPr>
           <a:xfrm>
-            <a:off x="11000870" y="-938965"/>
-            <a:ext cx="652480" cy="708114"/>
+            <a:off x="7382820" y="-630151"/>
+            <a:ext cx="437887" cy="506053"/>
             <a:chOff x="6721063" y="1897673"/>
-            <a:chExt cx="843851" cy="1181672"/>
+            <a:chExt cx="843851" cy="1258330"/>
           </a:xfrm>
         </p:grpSpPr>
         <p:grpSp>
@@ -6571,7 +6559,7 @@
               <a:lstStyle/>
               <a:p>
                 <a:pPr algn="ctr"/>
-                <a:endParaRPr lang="zh-TW" altLang="en-US" sz="2395">
+                <a:endParaRPr lang="zh-TW" altLang="en-US" sz="1607">
                   <a:solidFill>
                     <a:schemeClr val="bg1"/>
                   </a:solidFill>
@@ -6632,7 +6620,7 @@
               <a:lstStyle/>
               <a:p>
                 <a:pPr algn="ctr"/>
-                <a:endParaRPr lang="zh-TW" altLang="en-US" sz="2395" dirty="0">
+                <a:endParaRPr lang="zh-TW" altLang="en-US" sz="1607" dirty="0">
                   <a:solidFill>
                     <a:schemeClr val="bg1"/>
                   </a:solidFill>
@@ -6641,8 +6629,8 @@
             </p:txBody>
           </p:sp>
         </p:grpSp>
-        <mc:AlternateContent xmlns:mc="http://schemas.openxmlformats.org/markup-compatibility/2006">
-          <mc:Choice xmlns:a14="http://schemas.microsoft.com/office/drawing/2010/main" Requires="a14">
+        <mc:AlternateContent xmlns:mc="http://schemas.openxmlformats.org/markup-compatibility/2006" xmlns:a14="http://schemas.microsoft.com/office/drawing/2010/main">
+          <mc:Choice Requires="a14">
             <p:sp>
               <p:nvSpPr>
                 <p:cNvPr id="169" name="文字方塊 168">
@@ -6658,7 +6646,7 @@
               <p:spPr>
                 <a:xfrm>
                   <a:off x="6721063" y="1897673"/>
-                  <a:ext cx="416138" cy="743077"/>
+                  <a:ext cx="416137" cy="819993"/>
                 </a:xfrm>
                 <a:prstGeom prst="rect">
                   <a:avLst/>
@@ -6681,7 +6669,7 @@
                         <m:sSub>
                           <m:sSubPr>
                             <m:ctrlPr>
-                              <a:rPr lang="en-US" altLang="zh-TW" sz="2129" i="1">
+                              <a:rPr lang="en-US" altLang="zh-TW" sz="1429" i="1">
                                 <a:solidFill>
                                   <a:schemeClr val="bg1"/>
                                 </a:solidFill>
@@ -6691,7 +6679,7 @@
                           </m:sSubPr>
                           <m:e>
                             <m:r>
-                              <a:rPr lang="en-US" altLang="zh-TW" sz="2129" i="1">
+                              <a:rPr lang="en-US" altLang="zh-TW" sz="1429" i="1">
                                 <a:solidFill>
                                   <a:schemeClr val="bg1"/>
                                 </a:solidFill>
@@ -6702,7 +6690,7 @@
                           </m:e>
                           <m:sub>
                             <m:r>
-                              <a:rPr lang="en-US" altLang="zh-TW" sz="2129" i="1">
+                              <a:rPr lang="en-US" altLang="zh-TW" sz="1429" i="1">
                                 <a:solidFill>
                                   <a:schemeClr val="bg1"/>
                                 </a:solidFill>
@@ -6715,7 +6703,7 @@
                       </m:oMath>
                     </m:oMathPara>
                   </a14:m>
-                  <a:endParaRPr lang="en-US" altLang="zh-TW" sz="2129" dirty="0">
+                  <a:endParaRPr lang="en-US" altLang="zh-TW" sz="1429" dirty="0">
                     <a:solidFill>
                       <a:schemeClr val="bg1"/>
                     </a:solidFill>
@@ -6724,7 +6712,7 @@
               </p:txBody>
             </p:sp>
           </mc:Choice>
-          <mc:Fallback>
+          <mc:Fallback xmlns="">
             <p:sp>
               <p:nvSpPr>
                 <p:cNvPr id="169" name="文字方塊 168">
@@ -6742,7 +6730,7 @@
               <p:spPr>
                 <a:xfrm>
                   <a:off x="6721063" y="1897673"/>
-                  <a:ext cx="416138" cy="743077"/>
+                  <a:ext cx="416137" cy="819993"/>
                 </a:xfrm>
                 <a:prstGeom prst="rect">
                   <a:avLst/>
@@ -6750,7 +6738,7 @@
                 <a:blipFill>
                   <a:blip r:embed="rId14"/>
                   <a:stretch>
-                    <a:fillRect l="-1923" r="-32692" b="-4110"/>
+                    <a:fillRect r="-44444"/>
                   </a:stretch>
                 </a:blipFill>
               </p:spPr>
@@ -6769,8 +6757,8 @@
             </p:sp>
           </mc:Fallback>
         </mc:AlternateContent>
-        <mc:AlternateContent xmlns:mc="http://schemas.openxmlformats.org/markup-compatibility/2006">
-          <mc:Choice xmlns:a14="http://schemas.microsoft.com/office/drawing/2010/main" Requires="a14">
+        <mc:AlternateContent xmlns:mc="http://schemas.openxmlformats.org/markup-compatibility/2006" xmlns:a14="http://schemas.microsoft.com/office/drawing/2010/main">
+          <mc:Choice Requires="a14">
             <p:sp>
               <p:nvSpPr>
                 <p:cNvPr id="170" name="文字方塊 169">
@@ -6785,8 +6773,8 @@
               </p:nvSpPr>
               <p:spPr>
                 <a:xfrm>
-                  <a:off x="7148776" y="2379539"/>
-                  <a:ext cx="416138" cy="699806"/>
+                  <a:off x="7148777" y="2379538"/>
+                  <a:ext cx="416137" cy="776465"/>
                 </a:xfrm>
                 <a:prstGeom prst="rect">
                   <a:avLst/>
@@ -6809,7 +6797,7 @@
                         <m:sSub>
                           <m:sSubPr>
                             <m:ctrlPr>
-                              <a:rPr lang="en-US" altLang="zh-TW" sz="2129" i="1">
+                              <a:rPr lang="en-US" altLang="zh-TW" sz="1429" i="1">
                                 <a:solidFill>
                                   <a:schemeClr val="bg1"/>
                                 </a:solidFill>
@@ -6819,7 +6807,7 @@
                           </m:sSubPr>
                           <m:e>
                             <m:r>
-                              <a:rPr lang="en-US" altLang="zh-TW" sz="2129" i="1">
+                              <a:rPr lang="en-US" altLang="zh-TW" sz="1429" i="1">
                                 <a:solidFill>
                                   <a:schemeClr val="bg1"/>
                                 </a:solidFill>
@@ -6830,7 +6818,7 @@
                           </m:e>
                           <m:sub>
                             <m:r>
-                              <a:rPr lang="en-US" altLang="zh-TW" sz="2129" i="1">
+                              <a:rPr lang="en-US" altLang="zh-TW" sz="1429" i="1">
                                 <a:solidFill>
                                   <a:schemeClr val="bg1"/>
                                 </a:solidFill>
@@ -6843,7 +6831,7 @@
                       </m:oMath>
                     </m:oMathPara>
                   </a14:m>
-                  <a:endParaRPr lang="en-US" altLang="zh-TW" sz="2129" dirty="0">
+                  <a:endParaRPr lang="en-US" altLang="zh-TW" sz="1429" dirty="0">
                     <a:solidFill>
                       <a:schemeClr val="bg1"/>
                     </a:solidFill>
@@ -6852,7 +6840,7 @@
               </p:txBody>
             </p:sp>
           </mc:Choice>
-          <mc:Fallback>
+          <mc:Fallback xmlns="">
             <p:sp>
               <p:nvSpPr>
                 <p:cNvPr id="170" name="文字方塊 169">
@@ -6869,8 +6857,8 @@
               </p:nvSpPr>
               <p:spPr>
                 <a:xfrm>
-                  <a:off x="7148776" y="2379539"/>
-                  <a:ext cx="416138" cy="699806"/>
+                  <a:off x="7148777" y="2379538"/>
+                  <a:ext cx="416137" cy="776465"/>
                 </a:xfrm>
                 <a:prstGeom prst="rect">
                   <a:avLst/>
@@ -6878,7 +6866,7 @@
                 <a:blipFill>
                   <a:blip r:embed="rId15"/>
                   <a:stretch>
-                    <a:fillRect l="-1887" r="-22642" b="-7246"/>
+                    <a:fillRect r="-40000"/>
                   </a:stretch>
                 </a:blipFill>
               </p:spPr>
@@ -6898,8 +6886,8 @@
           </mc:Fallback>
         </mc:AlternateContent>
       </p:grpSp>
-      <mc:AlternateContent xmlns:mc="http://schemas.openxmlformats.org/markup-compatibility/2006">
-        <mc:Choice xmlns:a14="http://schemas.microsoft.com/office/drawing/2010/main" Requires="a14">
+      <mc:AlternateContent xmlns:mc="http://schemas.openxmlformats.org/markup-compatibility/2006" xmlns:a14="http://schemas.microsoft.com/office/drawing/2010/main">
+        <mc:Choice Requires="a14">
           <p:sp>
             <p:nvSpPr>
               <p:cNvPr id="173" name="文字方塊 172">
@@ -6914,8 +6902,8 @@
             </p:nvSpPr>
             <p:spPr>
               <a:xfrm>
-                <a:off x="6713128" y="-146929"/>
-                <a:ext cx="321765" cy="419987"/>
+                <a:off x="4505262" y="-120244"/>
+                <a:ext cx="215940" cy="312265"/>
               </a:xfrm>
               <a:prstGeom prst="rect">
                 <a:avLst/>
@@ -6938,14 +6926,14 @@
                       <m:sSub>
                         <m:sSubPr>
                           <m:ctrlPr>
-                            <a:rPr lang="en-US" altLang="zh-TW" sz="2129" i="1">
+                            <a:rPr lang="en-US" altLang="zh-TW" sz="1429" i="1">
                               <a:latin typeface="Cambria Math" panose="02040503050406030204" pitchFamily="18" charset="0"/>
                             </a:rPr>
                           </m:ctrlPr>
                         </m:sSubPr>
                         <m:e>
                           <m:r>
-                            <a:rPr lang="en-US" altLang="zh-TW" sz="2129" i="1">
+                            <a:rPr lang="en-US" altLang="zh-TW" sz="1429" i="1">
                               <a:latin typeface="Cambria Math" panose="02040503050406030204" pitchFamily="18" charset="0"/>
                             </a:rPr>
                             <m:t>𝑄</m:t>
@@ -6953,7 +6941,7 @@
                         </m:e>
                         <m:sub>
                           <m:r>
-                            <a:rPr lang="en-US" altLang="zh-TW" sz="2129" i="1">
+                            <a:rPr lang="en-US" altLang="zh-TW" sz="1429" i="1">
                               <a:latin typeface="Cambria Math" panose="02040503050406030204" pitchFamily="18" charset="0"/>
                             </a:rPr>
                             <m:t>𝑐</m:t>
@@ -6963,12 +6951,12 @@
                     </m:oMath>
                   </m:oMathPara>
                 </a14:m>
-                <a:endParaRPr lang="en-US" altLang="zh-TW" sz="2129" dirty="0"/>
+                <a:endParaRPr lang="en-US" altLang="zh-TW" sz="1429" dirty="0"/>
               </a:p>
             </p:txBody>
           </p:sp>
         </mc:Choice>
-        <mc:Fallback>
+        <mc:Fallback xmlns="">
           <p:sp>
             <p:nvSpPr>
               <p:cNvPr id="173" name="文字方塊 172">
@@ -6985,8 +6973,8 @@
             </p:nvSpPr>
             <p:spPr>
               <a:xfrm>
-                <a:off x="6713128" y="-146929"/>
-                <a:ext cx="321765" cy="419987"/>
+                <a:off x="4505262" y="-120244"/>
+                <a:ext cx="215940" cy="312265"/>
               </a:xfrm>
               <a:prstGeom prst="rect">
                 <a:avLst/>
@@ -6994,7 +6982,7 @@
               <a:blipFill>
                 <a:blip r:embed="rId16"/>
                 <a:stretch>
-                  <a:fillRect l="-9434" r="-30189" b="-13043"/>
+                  <a:fillRect r="-45714" b="-7843"/>
                 </a:stretch>
               </a:blipFill>
             </p:spPr>
@@ -7027,8 +7015,8 @@
         </p:nvSpPr>
         <p:spPr>
           <a:xfrm>
-            <a:off x="5094211" y="-3892919"/>
-            <a:ext cx="4899827" cy="665567"/>
+            <a:off x="3418790" y="-2612585"/>
+            <a:ext cx="3288333" cy="477054"/>
           </a:xfrm>
           <a:prstGeom prst="rect">
             <a:avLst/>
@@ -7043,21 +7031,21 @@
           <a:p>
             <a:pPr algn="ctr"/>
             <a:r>
-              <a:rPr lang="en-US" altLang="zh-TW" sz="3725" dirty="0">
+              <a:rPr lang="en-US" altLang="zh-TW" sz="2500" dirty="0">
                 <a:latin typeface="Times New Roman" panose="02020603050405020304" pitchFamily="18" charset="0"/>
                 <a:cs typeface="Times New Roman" panose="02020603050405020304" pitchFamily="18" charset="0"/>
               </a:rPr>
               <a:t>Transverse component</a:t>
             </a:r>
-            <a:endParaRPr lang="zh-TW" altLang="en-US" sz="3725" dirty="0">
+            <a:endParaRPr lang="zh-TW" altLang="en-US" sz="2500" dirty="0">
               <a:latin typeface="Times New Roman" panose="02020603050405020304" pitchFamily="18" charset="0"/>
               <a:cs typeface="Times New Roman" panose="02020603050405020304" pitchFamily="18" charset="0"/>
             </a:endParaRPr>
           </a:p>
         </p:txBody>
       </p:sp>
-      <mc:AlternateContent xmlns:mc="http://schemas.openxmlformats.org/markup-compatibility/2006">
-        <mc:Choice xmlns:a14="http://schemas.microsoft.com/office/drawing/2010/main" Requires="a14">
+      <mc:AlternateContent xmlns:mc="http://schemas.openxmlformats.org/markup-compatibility/2006" xmlns:a14="http://schemas.microsoft.com/office/drawing/2010/main">
+        <mc:Choice Requires="a14">
           <p:sp>
             <p:nvSpPr>
               <p:cNvPr id="175" name="文字方塊 174">
@@ -7072,8 +7060,8 @@
             </p:nvSpPr>
             <p:spPr>
               <a:xfrm>
-                <a:off x="6120420" y="-1688521"/>
-                <a:ext cx="2781092" cy="460895"/>
+                <a:off x="4107488" y="-1133187"/>
+                <a:ext cx="1866424" cy="339645"/>
               </a:xfrm>
               <a:prstGeom prst="rect">
                 <a:avLst/>
@@ -7096,26 +7084,26 @@
                       <m:d>
                         <m:dPr>
                           <m:ctrlPr>
-                            <a:rPr lang="en-US" altLang="zh-TW" sz="2395" i="1">
+                            <a:rPr lang="en-US" altLang="zh-TW" sz="1607" i="1">
                               <a:latin typeface="Cambria Math" panose="02040503050406030204" pitchFamily="18" charset="0"/>
                             </a:rPr>
                           </m:ctrlPr>
                         </m:dPr>
                         <m:e>
                           <m:r>
-                            <a:rPr lang="en-US" altLang="zh-TW" sz="2395" i="1">
+                            <a:rPr lang="en-US" altLang="zh-TW" sz="1607" i="1">
                               <a:latin typeface="Cambria Math" panose="02040503050406030204" pitchFamily="18" charset="0"/>
                             </a:rPr>
                             <m:t>𝛼</m:t>
                           </m:r>
                           <m:r>
-                            <a:rPr lang="en-US" altLang="zh-TW" sz="2395" i="1">
+                            <a:rPr lang="en-US" altLang="zh-TW" sz="1607" i="1">
                               <a:latin typeface="Cambria Math" panose="02040503050406030204" pitchFamily="18" charset="0"/>
                             </a:rPr>
                             <m:t>, </m:t>
                           </m:r>
                           <m:r>
-                            <a:rPr lang="en-US" altLang="zh-TW" sz="2395" i="1">
+                            <a:rPr lang="en-US" altLang="zh-TW" sz="1607" i="1">
                               <a:latin typeface="Cambria Math" panose="02040503050406030204" pitchFamily="18" charset="0"/>
                             </a:rPr>
                             <m:t>𝛽</m:t>
@@ -7123,7 +7111,7 @@
                         </m:e>
                       </m:d>
                       <m:r>
-                        <a:rPr lang="en-US" altLang="zh-TW" sz="2395" i="1">
+                        <a:rPr lang="en-US" altLang="zh-TW" sz="1607" i="1">
                           <a:latin typeface="Cambria Math" panose="02040503050406030204" pitchFamily="18" charset="0"/>
                         </a:rPr>
                         <m:t>=</m:t>
@@ -7131,14 +7119,14 @@
                       <m:d>
                         <m:dPr>
                           <m:ctrlPr>
-                            <a:rPr lang="en-US" altLang="zh-TW" sz="2395" i="1">
+                            <a:rPr lang="en-US" altLang="zh-TW" sz="1607" i="1">
                               <a:latin typeface="Cambria Math" panose="02040503050406030204" pitchFamily="18" charset="0"/>
                             </a:rPr>
                           </m:ctrlPr>
                         </m:dPr>
                         <m:e>
                           <m:r>
-                            <a:rPr lang="en-US" altLang="zh-TW" sz="2395" i="1">
+                            <a:rPr lang="en-US" altLang="zh-TW" sz="1607" i="1">
                               <a:latin typeface="Cambria Math" panose="02040503050406030204" pitchFamily="18" charset="0"/>
                             </a:rPr>
                             <m:t>0, </m:t>
@@ -7147,7 +7135,7 @@
                             <m:rPr>
                               <m:nor/>
                             </m:rPr>
-                            <a:rPr lang="en-US" altLang="zh-TW" sz="2395">
+                            <a:rPr lang="en-US" altLang="zh-TW" sz="1607">
                               <a:latin typeface="Cambria Math" panose="02040503050406030204" pitchFamily="18" charset="0"/>
                             </a:rPr>
                             <m:t>0</m:t>
@@ -7157,12 +7145,12 @@
                     </m:oMath>
                   </m:oMathPara>
                 </a14:m>
-                <a:endParaRPr lang="zh-TW" altLang="en-US" sz="2395" dirty="0"/>
+                <a:endParaRPr lang="zh-TW" altLang="en-US" sz="1607" dirty="0"/>
               </a:p>
             </p:txBody>
           </p:sp>
         </mc:Choice>
-        <mc:Fallback>
+        <mc:Fallback xmlns="">
           <p:sp>
             <p:nvSpPr>
               <p:cNvPr id="175" name="文字方塊 174">
@@ -7179,8 +7167,8 @@
             </p:nvSpPr>
             <p:spPr>
               <a:xfrm>
-                <a:off x="6120420" y="-1688521"/>
-                <a:ext cx="2781092" cy="460895"/>
+                <a:off x="4107488" y="-1133187"/>
+                <a:ext cx="1866424" cy="339645"/>
               </a:xfrm>
               <a:prstGeom prst="rect">
                 <a:avLst/>
@@ -7188,7 +7176,7 @@
               <a:blipFill>
                 <a:blip r:embed="rId17"/>
                 <a:stretch>
-                  <a:fillRect b="-17105"/>
+                  <a:fillRect b="-8929"/>
                 </a:stretch>
               </a:blipFill>
             </p:spPr>
@@ -7207,8 +7195,8 @@
           </p:sp>
         </mc:Fallback>
       </mc:AlternateContent>
-      <mc:AlternateContent xmlns:mc="http://schemas.openxmlformats.org/markup-compatibility/2006">
-        <mc:Choice xmlns:a14="http://schemas.microsoft.com/office/drawing/2010/main" Requires="a14">
+      <mc:AlternateContent xmlns:mc="http://schemas.openxmlformats.org/markup-compatibility/2006" xmlns:a14="http://schemas.microsoft.com/office/drawing/2010/main">
+        <mc:Choice Requires="a14">
           <p:sp>
             <p:nvSpPr>
               <p:cNvPr id="176" name="文字方塊 175">
@@ -7223,8 +7211,8 @@
             </p:nvSpPr>
             <p:spPr>
               <a:xfrm>
-                <a:off x="2298782" y="1924554"/>
-                <a:ext cx="2781092" cy="460895"/>
+                <a:off x="1542741" y="1269961"/>
+                <a:ext cx="1866424" cy="339645"/>
               </a:xfrm>
               <a:prstGeom prst="rect">
                 <a:avLst/>
@@ -7247,26 +7235,26 @@
                       <m:d>
                         <m:dPr>
                           <m:ctrlPr>
-                            <a:rPr lang="en-US" altLang="zh-TW" sz="2395" i="1">
+                            <a:rPr lang="en-US" altLang="zh-TW" sz="1607" i="1">
                               <a:latin typeface="Cambria Math" panose="02040503050406030204" pitchFamily="18" charset="0"/>
                             </a:rPr>
                           </m:ctrlPr>
                         </m:dPr>
                         <m:e>
                           <m:r>
-                            <a:rPr lang="en-US" altLang="zh-TW" sz="2395" i="1">
+                            <a:rPr lang="en-US" altLang="zh-TW" sz="1607" i="1">
                               <a:latin typeface="Cambria Math" panose="02040503050406030204" pitchFamily="18" charset="0"/>
                             </a:rPr>
                             <m:t>0, </m:t>
                           </m:r>
                           <m:r>
-                            <a:rPr lang="en-US" altLang="zh-TW" sz="2395" i="1">
+                            <a:rPr lang="en-US" altLang="zh-TW" sz="1607" i="1">
                               <a:latin typeface="Cambria Math" panose="02040503050406030204" pitchFamily="18" charset="0"/>
                             </a:rPr>
                             <m:t>𝜋</m:t>
                           </m:r>
                           <m:r>
-                            <a:rPr lang="en-US" altLang="zh-TW" sz="2395" i="1">
+                            <a:rPr lang="en-US" altLang="zh-TW" sz="1607" i="1">
                               <a:latin typeface="Cambria Math" panose="02040503050406030204" pitchFamily="18" charset="0"/>
                             </a:rPr>
                             <m:t>/2</m:t>
@@ -7276,12 +7264,12 @@
                     </m:oMath>
                   </m:oMathPara>
                 </a14:m>
-                <a:endParaRPr lang="zh-TW" altLang="en-US" sz="2395" dirty="0"/>
+                <a:endParaRPr lang="zh-TW" altLang="en-US" sz="1607" dirty="0"/>
               </a:p>
             </p:txBody>
           </p:sp>
         </mc:Choice>
-        <mc:Fallback>
+        <mc:Fallback xmlns="">
           <p:sp>
             <p:nvSpPr>
               <p:cNvPr id="176" name="文字方塊 175">
@@ -7298,8 +7286,8 @@
             </p:nvSpPr>
             <p:spPr>
               <a:xfrm>
-                <a:off x="2298782" y="1924554"/>
-                <a:ext cx="2781092" cy="460895"/>
+                <a:off x="1542741" y="1269961"/>
+                <a:ext cx="1866424" cy="339645"/>
               </a:xfrm>
               <a:prstGeom prst="rect">
                 <a:avLst/>
@@ -7307,7 +7295,7 @@
               <a:blipFill>
                 <a:blip r:embed="rId18"/>
                 <a:stretch>
-                  <a:fillRect b="-18667"/>
+                  <a:fillRect b="-8929"/>
                 </a:stretch>
               </a:blipFill>
             </p:spPr>
@@ -7326,8 +7314,8 @@
           </p:sp>
         </mc:Fallback>
       </mc:AlternateContent>
-      <mc:AlternateContent xmlns:mc="http://schemas.openxmlformats.org/markup-compatibility/2006">
-        <mc:Choice xmlns:a14="http://schemas.microsoft.com/office/drawing/2010/main" Requires="a14">
+      <mc:AlternateContent xmlns:mc="http://schemas.openxmlformats.org/markup-compatibility/2006" xmlns:a14="http://schemas.microsoft.com/office/drawing/2010/main">
+        <mc:Choice Requires="a14">
           <p:sp>
             <p:nvSpPr>
               <p:cNvPr id="177" name="文字方塊 176">
@@ -7342,8 +7330,8 @@
             </p:nvSpPr>
             <p:spPr>
               <a:xfrm>
-                <a:off x="9752656" y="1924554"/>
-                <a:ext cx="2781092" cy="460895"/>
+                <a:off x="6545126" y="1269961"/>
+                <a:ext cx="1866424" cy="339645"/>
               </a:xfrm>
               <a:prstGeom prst="rect">
                 <a:avLst/>
@@ -7366,32 +7354,32 @@
                       <m:d>
                         <m:dPr>
                           <m:ctrlPr>
-                            <a:rPr lang="en-US" altLang="zh-TW" sz="2395" i="1">
+                            <a:rPr lang="en-US" altLang="zh-TW" sz="1607" i="1">
                               <a:latin typeface="Cambria Math" panose="02040503050406030204" pitchFamily="18" charset="0"/>
                             </a:rPr>
                           </m:ctrlPr>
                         </m:dPr>
                         <m:e>
                           <m:r>
-                            <a:rPr lang="en-US" altLang="zh-TW" sz="2395" i="1">
+                            <a:rPr lang="en-US" altLang="zh-TW" sz="1607" i="1">
                               <a:latin typeface="Cambria Math" panose="02040503050406030204" pitchFamily="18" charset="0"/>
                             </a:rPr>
                             <m:t>𝜋</m:t>
                           </m:r>
                           <m:r>
-                            <a:rPr lang="en-US" altLang="zh-TW" sz="2395" i="1">
+                            <a:rPr lang="en-US" altLang="zh-TW" sz="1607" i="1">
                               <a:latin typeface="Cambria Math" panose="02040503050406030204" pitchFamily="18" charset="0"/>
                             </a:rPr>
                             <m:t>,</m:t>
                           </m:r>
                           <m:r>
-                            <a:rPr lang="en-US" altLang="zh-TW" sz="2395" i="1">
+                            <a:rPr lang="en-US" altLang="zh-TW" sz="1607" i="1">
                               <a:latin typeface="Cambria Math" panose="02040503050406030204" pitchFamily="18" charset="0"/>
                             </a:rPr>
                             <m:t>𝜋</m:t>
                           </m:r>
                           <m:r>
-                            <a:rPr lang="en-US" altLang="zh-TW" sz="2395" i="1">
+                            <a:rPr lang="en-US" altLang="zh-TW" sz="1607" i="1">
                               <a:latin typeface="Cambria Math" panose="02040503050406030204" pitchFamily="18" charset="0"/>
                             </a:rPr>
                             <m:t>/2</m:t>
@@ -7401,12 +7389,12 @@
                     </m:oMath>
                   </m:oMathPara>
                 </a14:m>
-                <a:endParaRPr lang="zh-TW" altLang="en-US" sz="2395" dirty="0"/>
+                <a:endParaRPr lang="zh-TW" altLang="en-US" sz="1607" dirty="0"/>
               </a:p>
             </p:txBody>
           </p:sp>
         </mc:Choice>
-        <mc:Fallback>
+        <mc:Fallback xmlns="">
           <p:sp>
             <p:nvSpPr>
               <p:cNvPr id="177" name="文字方塊 176">
@@ -7423,8 +7411,8 @@
             </p:nvSpPr>
             <p:spPr>
               <a:xfrm>
-                <a:off x="9752656" y="1924554"/>
-                <a:ext cx="2781092" cy="460895"/>
+                <a:off x="6545126" y="1269961"/>
+                <a:ext cx="1866424" cy="339645"/>
               </a:xfrm>
               <a:prstGeom prst="rect">
                 <a:avLst/>
@@ -7432,7 +7420,7 @@
               <a:blipFill>
                 <a:blip r:embed="rId19"/>
                 <a:stretch>
-                  <a:fillRect b="-18667"/>
+                  <a:fillRect b="-8929"/>
                 </a:stretch>
               </a:blipFill>
             </p:spPr>
@@ -7451,8 +7439,8 @@
           </p:sp>
         </mc:Fallback>
       </mc:AlternateContent>
-      <mc:AlternateContent xmlns:mc="http://schemas.openxmlformats.org/markup-compatibility/2006">
-        <mc:Choice xmlns:a14="http://schemas.microsoft.com/office/drawing/2010/main" Requires="a14">
+      <mc:AlternateContent xmlns:mc="http://schemas.openxmlformats.org/markup-compatibility/2006" xmlns:a14="http://schemas.microsoft.com/office/drawing/2010/main">
+        <mc:Choice Requires="a14">
           <p:sp>
             <p:nvSpPr>
               <p:cNvPr id="178" name="文字方塊 177">
@@ -7467,8 +7455,8 @@
             </p:nvSpPr>
             <p:spPr>
               <a:xfrm>
-                <a:off x="6120420" y="5084179"/>
-                <a:ext cx="2781092" cy="460895"/>
+                <a:off x="4107488" y="3368779"/>
+                <a:ext cx="1866424" cy="339645"/>
               </a:xfrm>
               <a:prstGeom prst="rect">
                 <a:avLst/>
@@ -7491,20 +7479,20 @@
                       <m:d>
                         <m:dPr>
                           <m:ctrlPr>
-                            <a:rPr lang="en-US" altLang="zh-TW" sz="2395" i="1">
+                            <a:rPr lang="en-US" altLang="zh-TW" sz="1607" i="1">
                               <a:latin typeface="Cambria Math" panose="02040503050406030204" pitchFamily="18" charset="0"/>
                             </a:rPr>
                           </m:ctrlPr>
                         </m:dPr>
                         <m:e>
                           <m:r>
-                            <a:rPr lang="en-US" altLang="zh-TW" sz="2395" i="1">
+                            <a:rPr lang="en-US" altLang="zh-TW" sz="1607" i="1">
                               <a:latin typeface="Cambria Math" panose="02040503050406030204" pitchFamily="18" charset="0"/>
                             </a:rPr>
                             <m:t>0, </m:t>
                           </m:r>
                           <m:r>
-                            <a:rPr lang="en-US" altLang="zh-TW" sz="2395" i="1">
+                            <a:rPr lang="en-US" altLang="zh-TW" sz="1607" i="1">
                               <a:latin typeface="Cambria Math" panose="02040503050406030204" pitchFamily="18" charset="0"/>
                             </a:rPr>
                             <m:t>𝜋</m:t>
@@ -7514,12 +7502,12 @@
                     </m:oMath>
                   </m:oMathPara>
                 </a14:m>
-                <a:endParaRPr lang="zh-TW" altLang="en-US" sz="2395" dirty="0"/>
+                <a:endParaRPr lang="zh-TW" altLang="en-US" sz="1607" dirty="0"/>
               </a:p>
             </p:txBody>
           </p:sp>
         </mc:Choice>
-        <mc:Fallback>
+        <mc:Fallback xmlns="">
           <p:sp>
             <p:nvSpPr>
               <p:cNvPr id="178" name="文字方塊 177">
@@ -7536,8 +7524,8 @@
             </p:nvSpPr>
             <p:spPr>
               <a:xfrm>
-                <a:off x="6120420" y="5084179"/>
-                <a:ext cx="2781092" cy="460895"/>
+                <a:off x="4107488" y="3368779"/>
+                <a:ext cx="1866424" cy="339645"/>
               </a:xfrm>
               <a:prstGeom prst="rect">
                 <a:avLst/>
@@ -7601,8 +7589,8 @@
         </p:blipFill>
         <p:spPr>
           <a:xfrm>
-            <a:off x="8919234" y="-2540996"/>
-            <a:ext cx="937896" cy="2991122"/>
+            <a:off x="5985809" y="-1726931"/>
+            <a:ext cx="629433" cy="2007378"/>
           </a:xfrm>
           <a:prstGeom prst="rect">
             <a:avLst/>
@@ -7623,8 +7611,8 @@
         </p:nvGrpSpPr>
         <p:grpSpPr>
           <a:xfrm>
-            <a:off x="3314454" y="5057401"/>
-            <a:ext cx="2781092" cy="2781092"/>
+            <a:off x="2224371" y="3350808"/>
+            <a:ext cx="1866424" cy="1866424"/>
             <a:chOff x="7369987" y="1465126"/>
             <a:chExt cx="2090057" cy="2090057"/>
           </a:xfrm>
@@ -7671,7 +7659,7 @@
             </a:fontRef>
           </p:style>
           <p:txBody>
-            <a:bodyPr rot="0" spcFirstLastPara="0" vertOverflow="overflow" horzOverflow="overflow" vert="horz" wrap="square" lIns="121674" tIns="60836" rIns="121674" bIns="60836" numCol="1" spcCol="0" rtlCol="0" fromWordArt="0" anchor="ctr" anchorCtr="0" forceAA="0" compatLnSpc="1">
+            <a:bodyPr rot="0" spcFirstLastPara="0" vertOverflow="overflow" horzOverflow="overflow" vert="horz" wrap="square" lIns="81657" tIns="40828" rIns="81657" bIns="40828" numCol="1" spcCol="0" rtlCol="0" fromWordArt="0" anchor="ctr" anchorCtr="0" forceAA="0" compatLnSpc="1">
               <a:prstTxWarp prst="textNoShape">
                 <a:avLst/>
               </a:prstTxWarp>
@@ -7680,7 +7668,7 @@
             <a:lstStyle/>
             <a:p>
               <a:pPr algn="ctr"/>
-              <a:endParaRPr lang="zh-TW" altLang="en-US" sz="2395" dirty="0"/>
+              <a:endParaRPr lang="zh-TW" altLang="en-US" sz="1607" dirty="0"/>
             </a:p>
           </p:txBody>
         </p:sp>
@@ -7728,7 +7716,7 @@
             </a:fontRef>
           </p:style>
           <p:txBody>
-            <a:bodyPr rot="0" spcFirstLastPara="0" vertOverflow="overflow" horzOverflow="overflow" vert="horz" wrap="square" lIns="121674" tIns="60836" rIns="121674" bIns="60836" numCol="1" spcCol="0" rtlCol="0" fromWordArt="0" anchor="ctr" anchorCtr="0" forceAA="0" compatLnSpc="1">
+            <a:bodyPr rot="0" spcFirstLastPara="0" vertOverflow="overflow" horzOverflow="overflow" vert="horz" wrap="square" lIns="81657" tIns="40828" rIns="81657" bIns="40828" numCol="1" spcCol="0" rtlCol="0" fromWordArt="0" anchor="ctr" anchorCtr="0" forceAA="0" compatLnSpc="1">
               <a:prstTxWarp prst="textNoShape">
                 <a:avLst/>
               </a:prstTxWarp>
@@ -7737,7 +7725,7 @@
             <a:lstStyle/>
             <a:p>
               <a:pPr algn="ctr"/>
-              <a:endParaRPr lang="zh-TW" altLang="en-US" sz="2395"/>
+              <a:endParaRPr lang="zh-TW" altLang="en-US" sz="1607"/>
             </a:p>
           </p:txBody>
         </p:sp>
@@ -7785,7 +7773,7 @@
             </a:fontRef>
           </p:style>
           <p:txBody>
-            <a:bodyPr rot="0" spcFirstLastPara="0" vertOverflow="overflow" horzOverflow="overflow" vert="horz" wrap="square" lIns="121674" tIns="60836" rIns="121674" bIns="60836" numCol="1" spcCol="0" rtlCol="0" fromWordArt="0" anchor="ctr" anchorCtr="0" forceAA="0" compatLnSpc="1">
+            <a:bodyPr rot="0" spcFirstLastPara="0" vertOverflow="overflow" horzOverflow="overflow" vert="horz" wrap="square" lIns="81657" tIns="40828" rIns="81657" bIns="40828" numCol="1" spcCol="0" rtlCol="0" fromWordArt="0" anchor="ctr" anchorCtr="0" forceAA="0" compatLnSpc="1">
               <a:prstTxWarp prst="textNoShape">
                 <a:avLst/>
               </a:prstTxWarp>
@@ -7794,7 +7782,7 @@
             <a:lstStyle/>
             <a:p>
               <a:pPr algn="ctr"/>
-              <a:endParaRPr lang="zh-TW" altLang="en-US" sz="2395"/>
+              <a:endParaRPr lang="zh-TW" altLang="en-US" sz="1607"/>
             </a:p>
           </p:txBody>
         </p:sp>
@@ -7842,7 +7830,7 @@
             </a:fontRef>
           </p:style>
           <p:txBody>
-            <a:bodyPr rot="0" spcFirstLastPara="0" vertOverflow="overflow" horzOverflow="overflow" vert="horz" wrap="square" lIns="121674" tIns="60836" rIns="121674" bIns="60836" numCol="1" spcCol="0" rtlCol="0" fromWordArt="0" anchor="ctr" anchorCtr="0" forceAA="0" compatLnSpc="1">
+            <a:bodyPr rot="0" spcFirstLastPara="0" vertOverflow="overflow" horzOverflow="overflow" vert="horz" wrap="square" lIns="81657" tIns="40828" rIns="81657" bIns="40828" numCol="1" spcCol="0" rtlCol="0" fromWordArt="0" anchor="ctr" anchorCtr="0" forceAA="0" compatLnSpc="1">
               <a:prstTxWarp prst="textNoShape">
                 <a:avLst/>
               </a:prstTxWarp>
@@ -7851,7 +7839,7 @@
             <a:lstStyle/>
             <a:p>
               <a:pPr algn="ctr"/>
-              <a:endParaRPr lang="zh-TW" altLang="en-US" sz="2395"/>
+              <a:endParaRPr lang="zh-TW" altLang="en-US" sz="1607"/>
             </a:p>
           </p:txBody>
         </p:sp>
@@ -7899,7 +7887,7 @@
             </a:fontRef>
           </p:style>
           <p:txBody>
-            <a:bodyPr rot="0" spcFirstLastPara="0" vertOverflow="overflow" horzOverflow="overflow" vert="horz" wrap="square" lIns="121674" tIns="60836" rIns="121674" bIns="60836" numCol="1" spcCol="0" rtlCol="0" fromWordArt="0" anchor="ctr" anchorCtr="0" forceAA="0" compatLnSpc="1">
+            <a:bodyPr rot="0" spcFirstLastPara="0" vertOverflow="overflow" horzOverflow="overflow" vert="horz" wrap="square" lIns="81657" tIns="40828" rIns="81657" bIns="40828" numCol="1" spcCol="0" rtlCol="0" fromWordArt="0" anchor="ctr" anchorCtr="0" forceAA="0" compatLnSpc="1">
               <a:prstTxWarp prst="textNoShape">
                 <a:avLst/>
               </a:prstTxWarp>
@@ -7908,7 +7896,7 @@
             <a:lstStyle/>
             <a:p>
               <a:pPr algn="ctr"/>
-              <a:endParaRPr lang="zh-TW" altLang="en-US" sz="2395"/>
+              <a:endParaRPr lang="zh-TW" altLang="en-US" sz="1607"/>
             </a:p>
           </p:txBody>
         </p:sp>
@@ -7956,7 +7944,7 @@
             </a:fontRef>
           </p:style>
           <p:txBody>
-            <a:bodyPr rot="0" spcFirstLastPara="0" vertOverflow="overflow" horzOverflow="overflow" vert="horz" wrap="square" lIns="121674" tIns="60836" rIns="121674" bIns="60836" numCol="1" spcCol="0" rtlCol="0" fromWordArt="0" anchor="ctr" anchorCtr="0" forceAA="0" compatLnSpc="1">
+            <a:bodyPr rot="0" spcFirstLastPara="0" vertOverflow="overflow" horzOverflow="overflow" vert="horz" wrap="square" lIns="81657" tIns="40828" rIns="81657" bIns="40828" numCol="1" spcCol="0" rtlCol="0" fromWordArt="0" anchor="ctr" anchorCtr="0" forceAA="0" compatLnSpc="1">
               <a:prstTxWarp prst="textNoShape">
                 <a:avLst/>
               </a:prstTxWarp>
@@ -7965,7 +7953,7 @@
             <a:lstStyle/>
             <a:p>
               <a:pPr algn="ctr"/>
-              <a:endParaRPr lang="zh-TW" altLang="en-US" sz="2395"/>
+              <a:endParaRPr lang="zh-TW" altLang="en-US" sz="1607"/>
             </a:p>
           </p:txBody>
         </p:sp>
@@ -8013,7 +8001,7 @@
             </a:fontRef>
           </p:style>
           <p:txBody>
-            <a:bodyPr rot="0" spcFirstLastPara="0" vertOverflow="overflow" horzOverflow="overflow" vert="horz" wrap="square" lIns="121674" tIns="60836" rIns="121674" bIns="60836" numCol="1" spcCol="0" rtlCol="0" fromWordArt="0" anchor="ctr" anchorCtr="0" forceAA="0" compatLnSpc="1">
+            <a:bodyPr rot="0" spcFirstLastPara="0" vertOverflow="overflow" horzOverflow="overflow" vert="horz" wrap="square" lIns="81657" tIns="40828" rIns="81657" bIns="40828" numCol="1" spcCol="0" rtlCol="0" fromWordArt="0" anchor="ctr" anchorCtr="0" forceAA="0" compatLnSpc="1">
               <a:prstTxWarp prst="textNoShape">
                 <a:avLst/>
               </a:prstTxWarp>
@@ -8022,7 +8010,7 @@
             <a:lstStyle/>
             <a:p>
               <a:pPr algn="ctr"/>
-              <a:endParaRPr lang="zh-TW" altLang="en-US" sz="2395"/>
+              <a:endParaRPr lang="zh-TW" altLang="en-US" sz="1607"/>
             </a:p>
           </p:txBody>
         </p:sp>
@@ -8070,7 +8058,7 @@
             </a:fontRef>
           </p:style>
           <p:txBody>
-            <a:bodyPr rot="0" spcFirstLastPara="0" vertOverflow="overflow" horzOverflow="overflow" vert="horz" wrap="square" lIns="121674" tIns="60836" rIns="121674" bIns="60836" numCol="1" spcCol="0" rtlCol="0" fromWordArt="0" anchor="ctr" anchorCtr="0" forceAA="0" compatLnSpc="1">
+            <a:bodyPr rot="0" spcFirstLastPara="0" vertOverflow="overflow" horzOverflow="overflow" vert="horz" wrap="square" lIns="81657" tIns="40828" rIns="81657" bIns="40828" numCol="1" spcCol="0" rtlCol="0" fromWordArt="0" anchor="ctr" anchorCtr="0" forceAA="0" compatLnSpc="1">
               <a:prstTxWarp prst="textNoShape">
                 <a:avLst/>
               </a:prstTxWarp>
@@ -8079,7 +8067,7 @@
             <a:lstStyle/>
             <a:p>
               <a:pPr algn="ctr"/>
-              <a:endParaRPr lang="zh-TW" altLang="en-US" sz="2395" dirty="0"/>
+              <a:endParaRPr lang="zh-TW" altLang="en-US" sz="1607" dirty="0"/>
             </a:p>
           </p:txBody>
         </p:sp>
@@ -8127,7 +8115,7 @@
             </a:fontRef>
           </p:style>
           <p:txBody>
-            <a:bodyPr rot="0" spcFirstLastPara="0" vertOverflow="overflow" horzOverflow="overflow" vert="horz" wrap="square" lIns="121674" tIns="60836" rIns="121674" bIns="60836" numCol="1" spcCol="0" rtlCol="0" fromWordArt="0" anchor="ctr" anchorCtr="0" forceAA="0" compatLnSpc="1">
+            <a:bodyPr rot="0" spcFirstLastPara="0" vertOverflow="overflow" horzOverflow="overflow" vert="horz" wrap="square" lIns="81657" tIns="40828" rIns="81657" bIns="40828" numCol="1" spcCol="0" rtlCol="0" fromWordArt="0" anchor="ctr" anchorCtr="0" forceAA="0" compatLnSpc="1">
               <a:prstTxWarp prst="textNoShape">
                 <a:avLst/>
               </a:prstTxWarp>
@@ -8136,7 +8124,7 @@
             <a:lstStyle/>
             <a:p>
               <a:pPr algn="ctr"/>
-              <a:endParaRPr lang="zh-TW" altLang="en-US" sz="2395"/>
+              <a:endParaRPr lang="zh-TW" altLang="en-US" sz="1607"/>
             </a:p>
           </p:txBody>
         </p:sp>
@@ -8176,7 +8164,7 @@
             </a:fontRef>
           </p:style>
           <p:txBody>
-            <a:bodyPr rot="0" spcFirstLastPara="0" vertOverflow="overflow" horzOverflow="overflow" vert="horz" wrap="square" lIns="121674" tIns="60836" rIns="121674" bIns="60836" numCol="1" spcCol="0" rtlCol="0" fromWordArt="0" anchor="ctr" anchorCtr="0" forceAA="0" compatLnSpc="1">
+            <a:bodyPr rot="0" spcFirstLastPara="0" vertOverflow="overflow" horzOverflow="overflow" vert="horz" wrap="square" lIns="81657" tIns="40828" rIns="81657" bIns="40828" numCol="1" spcCol="0" rtlCol="0" fromWordArt="0" anchor="ctr" anchorCtr="0" forceAA="0" compatLnSpc="1">
               <a:prstTxWarp prst="textNoShape">
                 <a:avLst/>
               </a:prstTxWarp>
@@ -8185,7 +8173,7 @@
             <a:lstStyle/>
             <a:p>
               <a:pPr algn="ctr"/>
-              <a:endParaRPr lang="zh-TW" altLang="en-US" sz="2395"/>
+              <a:endParaRPr lang="zh-TW" altLang="en-US" sz="1607"/>
             </a:p>
           </p:txBody>
         </p:sp>
@@ -8225,7 +8213,7 @@
             </a:fontRef>
           </p:style>
           <p:txBody>
-            <a:bodyPr rot="0" spcFirstLastPara="0" vertOverflow="overflow" horzOverflow="overflow" vert="horz" wrap="square" lIns="121674" tIns="60836" rIns="121674" bIns="60836" numCol="1" spcCol="0" rtlCol="0" fromWordArt="0" anchor="ctr" anchorCtr="0" forceAA="0" compatLnSpc="1">
+            <a:bodyPr rot="0" spcFirstLastPara="0" vertOverflow="overflow" horzOverflow="overflow" vert="horz" wrap="square" lIns="81657" tIns="40828" rIns="81657" bIns="40828" numCol="1" spcCol="0" rtlCol="0" fromWordArt="0" anchor="ctr" anchorCtr="0" forceAA="0" compatLnSpc="1">
               <a:prstTxWarp prst="textNoShape">
                 <a:avLst/>
               </a:prstTxWarp>
@@ -8234,7 +8222,7 @@
             <a:lstStyle/>
             <a:p>
               <a:pPr algn="ctr"/>
-              <a:endParaRPr lang="zh-TW" altLang="en-US" sz="2395"/>
+              <a:endParaRPr lang="zh-TW" altLang="en-US" sz="1607"/>
             </a:p>
           </p:txBody>
         </p:sp>
@@ -8274,7 +8262,7 @@
             </a:fontRef>
           </p:style>
           <p:txBody>
-            <a:bodyPr rot="0" spcFirstLastPara="0" vertOverflow="overflow" horzOverflow="overflow" vert="horz" wrap="square" lIns="121674" tIns="60836" rIns="121674" bIns="60836" numCol="1" spcCol="0" rtlCol="0" fromWordArt="0" anchor="ctr" anchorCtr="0" forceAA="0" compatLnSpc="1">
+            <a:bodyPr rot="0" spcFirstLastPara="0" vertOverflow="overflow" horzOverflow="overflow" vert="horz" wrap="square" lIns="81657" tIns="40828" rIns="81657" bIns="40828" numCol="1" spcCol="0" rtlCol="0" fromWordArt="0" anchor="ctr" anchorCtr="0" forceAA="0" compatLnSpc="1">
               <a:prstTxWarp prst="textNoShape">
                 <a:avLst/>
               </a:prstTxWarp>
@@ -8283,7 +8271,7 @@
             <a:lstStyle/>
             <a:p>
               <a:pPr algn="ctr"/>
-              <a:endParaRPr lang="zh-TW" altLang="en-US" sz="2395"/>
+              <a:endParaRPr lang="zh-TW" altLang="en-US" sz="1607"/>
             </a:p>
           </p:txBody>
         </p:sp>
@@ -8323,7 +8311,7 @@
             </a:fontRef>
           </p:style>
           <p:txBody>
-            <a:bodyPr rot="0" spcFirstLastPara="0" vertOverflow="overflow" horzOverflow="overflow" vert="horz" wrap="square" lIns="121674" tIns="60836" rIns="121674" bIns="60836" numCol="1" spcCol="0" rtlCol="0" fromWordArt="0" anchor="ctr" anchorCtr="0" forceAA="0" compatLnSpc="1">
+            <a:bodyPr rot="0" spcFirstLastPara="0" vertOverflow="overflow" horzOverflow="overflow" vert="horz" wrap="square" lIns="81657" tIns="40828" rIns="81657" bIns="40828" numCol="1" spcCol="0" rtlCol="0" fromWordArt="0" anchor="ctr" anchorCtr="0" forceAA="0" compatLnSpc="1">
               <a:prstTxWarp prst="textNoShape">
                 <a:avLst/>
               </a:prstTxWarp>
@@ -8332,7 +8320,7 @@
             <a:lstStyle/>
             <a:p>
               <a:pPr algn="ctr"/>
-              <a:endParaRPr lang="zh-TW" altLang="en-US" sz="2395"/>
+              <a:endParaRPr lang="zh-TW" altLang="en-US" sz="1607"/>
             </a:p>
           </p:txBody>
         </p:sp>
@@ -8372,7 +8360,7 @@
             </a:fontRef>
           </p:style>
           <p:txBody>
-            <a:bodyPr rot="0" spcFirstLastPara="0" vertOverflow="overflow" horzOverflow="overflow" vert="horz" wrap="square" lIns="121674" tIns="60836" rIns="121674" bIns="60836" numCol="1" spcCol="0" rtlCol="0" fromWordArt="0" anchor="ctr" anchorCtr="0" forceAA="0" compatLnSpc="1">
+            <a:bodyPr rot="0" spcFirstLastPara="0" vertOverflow="overflow" horzOverflow="overflow" vert="horz" wrap="square" lIns="81657" tIns="40828" rIns="81657" bIns="40828" numCol="1" spcCol="0" rtlCol="0" fromWordArt="0" anchor="ctr" anchorCtr="0" forceAA="0" compatLnSpc="1">
               <a:prstTxWarp prst="textNoShape">
                 <a:avLst/>
               </a:prstTxWarp>
@@ -8381,7 +8369,7 @@
             <a:lstStyle/>
             <a:p>
               <a:pPr algn="ctr"/>
-              <a:endParaRPr lang="zh-TW" altLang="en-US" sz="2395"/>
+              <a:endParaRPr lang="zh-TW" altLang="en-US" sz="1607"/>
             </a:p>
           </p:txBody>
         </p:sp>
@@ -8421,7 +8409,7 @@
             </a:fontRef>
           </p:style>
           <p:txBody>
-            <a:bodyPr rot="0" spcFirstLastPara="0" vertOverflow="overflow" horzOverflow="overflow" vert="horz" wrap="square" lIns="121674" tIns="60836" rIns="121674" bIns="60836" numCol="1" spcCol="0" rtlCol="0" fromWordArt="0" anchor="ctr" anchorCtr="0" forceAA="0" compatLnSpc="1">
+            <a:bodyPr rot="0" spcFirstLastPara="0" vertOverflow="overflow" horzOverflow="overflow" vert="horz" wrap="square" lIns="81657" tIns="40828" rIns="81657" bIns="40828" numCol="1" spcCol="0" rtlCol="0" fromWordArt="0" anchor="ctr" anchorCtr="0" forceAA="0" compatLnSpc="1">
               <a:prstTxWarp prst="textNoShape">
                 <a:avLst/>
               </a:prstTxWarp>
@@ -8430,7 +8418,7 @@
             <a:lstStyle/>
             <a:p>
               <a:pPr algn="ctr"/>
-              <a:endParaRPr lang="zh-TW" altLang="en-US" sz="2395"/>
+              <a:endParaRPr lang="zh-TW" altLang="en-US" sz="1607"/>
             </a:p>
           </p:txBody>
         </p:sp>
@@ -8470,7 +8458,7 @@
             </a:fontRef>
           </p:style>
           <p:txBody>
-            <a:bodyPr rot="0" spcFirstLastPara="0" vertOverflow="overflow" horzOverflow="overflow" vert="horz" wrap="square" lIns="121674" tIns="60836" rIns="121674" bIns="60836" numCol="1" spcCol="0" rtlCol="0" fromWordArt="0" anchor="ctr" anchorCtr="0" forceAA="0" compatLnSpc="1">
+            <a:bodyPr rot="0" spcFirstLastPara="0" vertOverflow="overflow" horzOverflow="overflow" vert="horz" wrap="square" lIns="81657" tIns="40828" rIns="81657" bIns="40828" numCol="1" spcCol="0" rtlCol="0" fromWordArt="0" anchor="ctr" anchorCtr="0" forceAA="0" compatLnSpc="1">
               <a:prstTxWarp prst="textNoShape">
                 <a:avLst/>
               </a:prstTxWarp>
@@ -8479,7 +8467,7 @@
             <a:lstStyle/>
             <a:p>
               <a:pPr algn="ctr"/>
-              <a:endParaRPr lang="zh-TW" altLang="en-US" sz="2395"/>
+              <a:endParaRPr lang="zh-TW" altLang="en-US" sz="1607"/>
             </a:p>
           </p:txBody>
         </p:sp>
@@ -8519,7 +8507,7 @@
             </a:fontRef>
           </p:style>
           <p:txBody>
-            <a:bodyPr rot="0" spcFirstLastPara="0" vertOverflow="overflow" horzOverflow="overflow" vert="horz" wrap="square" lIns="121674" tIns="60836" rIns="121674" bIns="60836" numCol="1" spcCol="0" rtlCol="0" fromWordArt="0" anchor="ctr" anchorCtr="0" forceAA="0" compatLnSpc="1">
+            <a:bodyPr rot="0" spcFirstLastPara="0" vertOverflow="overflow" horzOverflow="overflow" vert="horz" wrap="square" lIns="81657" tIns="40828" rIns="81657" bIns="40828" numCol="1" spcCol="0" rtlCol="0" fromWordArt="0" anchor="ctr" anchorCtr="0" forceAA="0" compatLnSpc="1">
               <a:prstTxWarp prst="textNoShape">
                 <a:avLst/>
               </a:prstTxWarp>
@@ -8528,7 +8516,7 @@
             <a:lstStyle/>
             <a:p>
               <a:pPr algn="ctr"/>
-              <a:endParaRPr lang="zh-TW" altLang="en-US" sz="2395"/>
+              <a:endParaRPr lang="zh-TW" altLang="en-US" sz="1607"/>
             </a:p>
           </p:txBody>
         </p:sp>
@@ -8547,8 +8535,8 @@
         </p:nvGrpSpPr>
         <p:grpSpPr>
           <a:xfrm>
-            <a:off x="2310444" y="-1003360"/>
-            <a:ext cx="2781092" cy="2781092"/>
+            <a:off x="1550567" y="-695005"/>
+            <a:ext cx="1866424" cy="1866424"/>
             <a:chOff x="7369987" y="1465126"/>
             <a:chExt cx="2090057" cy="2090057"/>
           </a:xfrm>
@@ -8595,7 +8583,7 @@
             </a:fontRef>
           </p:style>
           <p:txBody>
-            <a:bodyPr rot="0" spcFirstLastPara="0" vertOverflow="overflow" horzOverflow="overflow" vert="horz" wrap="square" lIns="121674" tIns="60836" rIns="121674" bIns="60836" numCol="1" spcCol="0" rtlCol="0" fromWordArt="0" anchor="ctr" anchorCtr="0" forceAA="0" compatLnSpc="1">
+            <a:bodyPr rot="0" spcFirstLastPara="0" vertOverflow="overflow" horzOverflow="overflow" vert="horz" wrap="square" lIns="81657" tIns="40828" rIns="81657" bIns="40828" numCol="1" spcCol="0" rtlCol="0" fromWordArt="0" anchor="ctr" anchorCtr="0" forceAA="0" compatLnSpc="1">
               <a:prstTxWarp prst="textNoShape">
                 <a:avLst/>
               </a:prstTxWarp>
@@ -8604,7 +8592,7 @@
             <a:lstStyle/>
             <a:p>
               <a:pPr algn="ctr"/>
-              <a:endParaRPr lang="zh-TW" altLang="en-US" sz="2395" dirty="0"/>
+              <a:endParaRPr lang="zh-TW" altLang="en-US" sz="1607" dirty="0"/>
             </a:p>
           </p:txBody>
         </p:sp>
@@ -8652,7 +8640,7 @@
             </a:fontRef>
           </p:style>
           <p:txBody>
-            <a:bodyPr rot="0" spcFirstLastPara="0" vertOverflow="overflow" horzOverflow="overflow" vert="horz" wrap="square" lIns="121674" tIns="60836" rIns="121674" bIns="60836" numCol="1" spcCol="0" rtlCol="0" fromWordArt="0" anchor="ctr" anchorCtr="0" forceAA="0" compatLnSpc="1">
+            <a:bodyPr rot="0" spcFirstLastPara="0" vertOverflow="overflow" horzOverflow="overflow" vert="horz" wrap="square" lIns="81657" tIns="40828" rIns="81657" bIns="40828" numCol="1" spcCol="0" rtlCol="0" fromWordArt="0" anchor="ctr" anchorCtr="0" forceAA="0" compatLnSpc="1">
               <a:prstTxWarp prst="textNoShape">
                 <a:avLst/>
               </a:prstTxWarp>
@@ -8661,7 +8649,7 @@
             <a:lstStyle/>
             <a:p>
               <a:pPr algn="ctr"/>
-              <a:endParaRPr lang="zh-TW" altLang="en-US" sz="2395"/>
+              <a:endParaRPr lang="zh-TW" altLang="en-US" sz="1607"/>
             </a:p>
           </p:txBody>
         </p:sp>
@@ -8709,7 +8697,7 @@
             </a:fontRef>
           </p:style>
           <p:txBody>
-            <a:bodyPr rot="0" spcFirstLastPara="0" vertOverflow="overflow" horzOverflow="overflow" vert="horz" wrap="square" lIns="121674" tIns="60836" rIns="121674" bIns="60836" numCol="1" spcCol="0" rtlCol="0" fromWordArt="0" anchor="ctr" anchorCtr="0" forceAA="0" compatLnSpc="1">
+            <a:bodyPr rot="0" spcFirstLastPara="0" vertOverflow="overflow" horzOverflow="overflow" vert="horz" wrap="square" lIns="81657" tIns="40828" rIns="81657" bIns="40828" numCol="1" spcCol="0" rtlCol="0" fromWordArt="0" anchor="ctr" anchorCtr="0" forceAA="0" compatLnSpc="1">
               <a:prstTxWarp prst="textNoShape">
                 <a:avLst/>
               </a:prstTxWarp>
@@ -8718,7 +8706,7 @@
             <a:lstStyle/>
             <a:p>
               <a:pPr algn="ctr"/>
-              <a:endParaRPr lang="zh-TW" altLang="en-US" sz="2395"/>
+              <a:endParaRPr lang="zh-TW" altLang="en-US" sz="1607"/>
             </a:p>
           </p:txBody>
         </p:sp>
@@ -8766,7 +8754,7 @@
             </a:fontRef>
           </p:style>
           <p:txBody>
-            <a:bodyPr rot="0" spcFirstLastPara="0" vertOverflow="overflow" horzOverflow="overflow" vert="horz" wrap="square" lIns="121674" tIns="60836" rIns="121674" bIns="60836" numCol="1" spcCol="0" rtlCol="0" fromWordArt="0" anchor="ctr" anchorCtr="0" forceAA="0" compatLnSpc="1">
+            <a:bodyPr rot="0" spcFirstLastPara="0" vertOverflow="overflow" horzOverflow="overflow" vert="horz" wrap="square" lIns="81657" tIns="40828" rIns="81657" bIns="40828" numCol="1" spcCol="0" rtlCol="0" fromWordArt="0" anchor="ctr" anchorCtr="0" forceAA="0" compatLnSpc="1">
               <a:prstTxWarp prst="textNoShape">
                 <a:avLst/>
               </a:prstTxWarp>
@@ -8775,7 +8763,7 @@
             <a:lstStyle/>
             <a:p>
               <a:pPr algn="ctr"/>
-              <a:endParaRPr lang="zh-TW" altLang="en-US" sz="2395"/>
+              <a:endParaRPr lang="zh-TW" altLang="en-US" sz="1607"/>
             </a:p>
           </p:txBody>
         </p:sp>
@@ -8823,7 +8811,7 @@
             </a:fontRef>
           </p:style>
           <p:txBody>
-            <a:bodyPr rot="0" spcFirstLastPara="0" vertOverflow="overflow" horzOverflow="overflow" vert="horz" wrap="square" lIns="121674" tIns="60836" rIns="121674" bIns="60836" numCol="1" spcCol="0" rtlCol="0" fromWordArt="0" anchor="ctr" anchorCtr="0" forceAA="0" compatLnSpc="1">
+            <a:bodyPr rot="0" spcFirstLastPara="0" vertOverflow="overflow" horzOverflow="overflow" vert="horz" wrap="square" lIns="81657" tIns="40828" rIns="81657" bIns="40828" numCol="1" spcCol="0" rtlCol="0" fromWordArt="0" anchor="ctr" anchorCtr="0" forceAA="0" compatLnSpc="1">
               <a:prstTxWarp prst="textNoShape">
                 <a:avLst/>
               </a:prstTxWarp>
@@ -8832,7 +8820,7 @@
             <a:lstStyle/>
             <a:p>
               <a:pPr algn="ctr"/>
-              <a:endParaRPr lang="zh-TW" altLang="en-US" sz="2395"/>
+              <a:endParaRPr lang="zh-TW" altLang="en-US" sz="1607"/>
             </a:p>
           </p:txBody>
         </p:sp>
@@ -8880,7 +8868,7 @@
             </a:fontRef>
           </p:style>
           <p:txBody>
-            <a:bodyPr rot="0" spcFirstLastPara="0" vertOverflow="overflow" horzOverflow="overflow" vert="horz" wrap="square" lIns="121674" tIns="60836" rIns="121674" bIns="60836" numCol="1" spcCol="0" rtlCol="0" fromWordArt="0" anchor="ctr" anchorCtr="0" forceAA="0" compatLnSpc="1">
+            <a:bodyPr rot="0" spcFirstLastPara="0" vertOverflow="overflow" horzOverflow="overflow" vert="horz" wrap="square" lIns="81657" tIns="40828" rIns="81657" bIns="40828" numCol="1" spcCol="0" rtlCol="0" fromWordArt="0" anchor="ctr" anchorCtr="0" forceAA="0" compatLnSpc="1">
               <a:prstTxWarp prst="textNoShape">
                 <a:avLst/>
               </a:prstTxWarp>
@@ -8889,7 +8877,7 @@
             <a:lstStyle/>
             <a:p>
               <a:pPr algn="ctr"/>
-              <a:endParaRPr lang="zh-TW" altLang="en-US" sz="2395"/>
+              <a:endParaRPr lang="zh-TW" altLang="en-US" sz="1607"/>
             </a:p>
           </p:txBody>
         </p:sp>
@@ -8937,7 +8925,7 @@
             </a:fontRef>
           </p:style>
           <p:txBody>
-            <a:bodyPr rot="0" spcFirstLastPara="0" vertOverflow="overflow" horzOverflow="overflow" vert="horz" wrap="square" lIns="121674" tIns="60836" rIns="121674" bIns="60836" numCol="1" spcCol="0" rtlCol="0" fromWordArt="0" anchor="ctr" anchorCtr="0" forceAA="0" compatLnSpc="1">
+            <a:bodyPr rot="0" spcFirstLastPara="0" vertOverflow="overflow" horzOverflow="overflow" vert="horz" wrap="square" lIns="81657" tIns="40828" rIns="81657" bIns="40828" numCol="1" spcCol="0" rtlCol="0" fromWordArt="0" anchor="ctr" anchorCtr="0" forceAA="0" compatLnSpc="1">
               <a:prstTxWarp prst="textNoShape">
                 <a:avLst/>
               </a:prstTxWarp>
@@ -8946,7 +8934,7 @@
             <a:lstStyle/>
             <a:p>
               <a:pPr algn="ctr"/>
-              <a:endParaRPr lang="zh-TW" altLang="en-US" sz="2395"/>
+              <a:endParaRPr lang="zh-TW" altLang="en-US" sz="1607"/>
             </a:p>
           </p:txBody>
         </p:sp>
@@ -8994,7 +8982,7 @@
             </a:fontRef>
           </p:style>
           <p:txBody>
-            <a:bodyPr rot="0" spcFirstLastPara="0" vertOverflow="overflow" horzOverflow="overflow" vert="horz" wrap="square" lIns="121674" tIns="60836" rIns="121674" bIns="60836" numCol="1" spcCol="0" rtlCol="0" fromWordArt="0" anchor="ctr" anchorCtr="0" forceAA="0" compatLnSpc="1">
+            <a:bodyPr rot="0" spcFirstLastPara="0" vertOverflow="overflow" horzOverflow="overflow" vert="horz" wrap="square" lIns="81657" tIns="40828" rIns="81657" bIns="40828" numCol="1" spcCol="0" rtlCol="0" fromWordArt="0" anchor="ctr" anchorCtr="0" forceAA="0" compatLnSpc="1">
               <a:prstTxWarp prst="textNoShape">
                 <a:avLst/>
               </a:prstTxWarp>
@@ -9003,7 +8991,7 @@
             <a:lstStyle/>
             <a:p>
               <a:pPr algn="ctr"/>
-              <a:endParaRPr lang="zh-TW" altLang="en-US" sz="2395" dirty="0"/>
+              <a:endParaRPr lang="zh-TW" altLang="en-US" sz="1607" dirty="0"/>
             </a:p>
           </p:txBody>
         </p:sp>
@@ -9051,7 +9039,7 @@
             </a:fontRef>
           </p:style>
           <p:txBody>
-            <a:bodyPr rot="0" spcFirstLastPara="0" vertOverflow="overflow" horzOverflow="overflow" vert="horz" wrap="square" lIns="121674" tIns="60836" rIns="121674" bIns="60836" numCol="1" spcCol="0" rtlCol="0" fromWordArt="0" anchor="ctr" anchorCtr="0" forceAA="0" compatLnSpc="1">
+            <a:bodyPr rot="0" spcFirstLastPara="0" vertOverflow="overflow" horzOverflow="overflow" vert="horz" wrap="square" lIns="81657" tIns="40828" rIns="81657" bIns="40828" numCol="1" spcCol="0" rtlCol="0" fromWordArt="0" anchor="ctr" anchorCtr="0" forceAA="0" compatLnSpc="1">
               <a:prstTxWarp prst="textNoShape">
                 <a:avLst/>
               </a:prstTxWarp>
@@ -9060,7 +9048,7 @@
             <a:lstStyle/>
             <a:p>
               <a:pPr algn="ctr"/>
-              <a:endParaRPr lang="zh-TW" altLang="en-US" sz="2395"/>
+              <a:endParaRPr lang="zh-TW" altLang="en-US" sz="1607"/>
             </a:p>
           </p:txBody>
         </p:sp>
@@ -9100,7 +9088,7 @@
             </a:fontRef>
           </p:style>
           <p:txBody>
-            <a:bodyPr rot="0" spcFirstLastPara="0" vertOverflow="overflow" horzOverflow="overflow" vert="horz" wrap="square" lIns="121674" tIns="60836" rIns="121674" bIns="60836" numCol="1" spcCol="0" rtlCol="0" fromWordArt="0" anchor="ctr" anchorCtr="0" forceAA="0" compatLnSpc="1">
+            <a:bodyPr rot="0" spcFirstLastPara="0" vertOverflow="overflow" horzOverflow="overflow" vert="horz" wrap="square" lIns="81657" tIns="40828" rIns="81657" bIns="40828" numCol="1" spcCol="0" rtlCol="0" fromWordArt="0" anchor="ctr" anchorCtr="0" forceAA="0" compatLnSpc="1">
               <a:prstTxWarp prst="textNoShape">
                 <a:avLst/>
               </a:prstTxWarp>
@@ -9109,7 +9097,7 @@
             <a:lstStyle/>
             <a:p>
               <a:pPr algn="ctr"/>
-              <a:endParaRPr lang="zh-TW" altLang="en-US" sz="2395"/>
+              <a:endParaRPr lang="zh-TW" altLang="en-US" sz="1607"/>
             </a:p>
           </p:txBody>
         </p:sp>
@@ -9149,7 +9137,7 @@
             </a:fontRef>
           </p:style>
           <p:txBody>
-            <a:bodyPr rot="0" spcFirstLastPara="0" vertOverflow="overflow" horzOverflow="overflow" vert="horz" wrap="square" lIns="121674" tIns="60836" rIns="121674" bIns="60836" numCol="1" spcCol="0" rtlCol="0" fromWordArt="0" anchor="ctr" anchorCtr="0" forceAA="0" compatLnSpc="1">
+            <a:bodyPr rot="0" spcFirstLastPara="0" vertOverflow="overflow" horzOverflow="overflow" vert="horz" wrap="square" lIns="81657" tIns="40828" rIns="81657" bIns="40828" numCol="1" spcCol="0" rtlCol="0" fromWordArt="0" anchor="ctr" anchorCtr="0" forceAA="0" compatLnSpc="1">
               <a:prstTxWarp prst="textNoShape">
                 <a:avLst/>
               </a:prstTxWarp>
@@ -9158,7 +9146,7 @@
             <a:lstStyle/>
             <a:p>
               <a:pPr algn="ctr"/>
-              <a:endParaRPr lang="zh-TW" altLang="en-US" sz="2395"/>
+              <a:endParaRPr lang="zh-TW" altLang="en-US" sz="1607"/>
             </a:p>
           </p:txBody>
         </p:sp>
@@ -9198,7 +9186,7 @@
             </a:fontRef>
           </p:style>
           <p:txBody>
-            <a:bodyPr rot="0" spcFirstLastPara="0" vertOverflow="overflow" horzOverflow="overflow" vert="horz" wrap="square" lIns="121674" tIns="60836" rIns="121674" bIns="60836" numCol="1" spcCol="0" rtlCol="0" fromWordArt="0" anchor="ctr" anchorCtr="0" forceAA="0" compatLnSpc="1">
+            <a:bodyPr rot="0" spcFirstLastPara="0" vertOverflow="overflow" horzOverflow="overflow" vert="horz" wrap="square" lIns="81657" tIns="40828" rIns="81657" bIns="40828" numCol="1" spcCol="0" rtlCol="0" fromWordArt="0" anchor="ctr" anchorCtr="0" forceAA="0" compatLnSpc="1">
               <a:prstTxWarp prst="textNoShape">
                 <a:avLst/>
               </a:prstTxWarp>
@@ -9207,7 +9195,7 @@
             <a:lstStyle/>
             <a:p>
               <a:pPr algn="ctr"/>
-              <a:endParaRPr lang="zh-TW" altLang="en-US" sz="2395"/>
+              <a:endParaRPr lang="zh-TW" altLang="en-US" sz="1607"/>
             </a:p>
           </p:txBody>
         </p:sp>
@@ -9247,7 +9235,7 @@
             </a:fontRef>
           </p:style>
           <p:txBody>
-            <a:bodyPr rot="0" spcFirstLastPara="0" vertOverflow="overflow" horzOverflow="overflow" vert="horz" wrap="square" lIns="121674" tIns="60836" rIns="121674" bIns="60836" numCol="1" spcCol="0" rtlCol="0" fromWordArt="0" anchor="ctr" anchorCtr="0" forceAA="0" compatLnSpc="1">
+            <a:bodyPr rot="0" spcFirstLastPara="0" vertOverflow="overflow" horzOverflow="overflow" vert="horz" wrap="square" lIns="81657" tIns="40828" rIns="81657" bIns="40828" numCol="1" spcCol="0" rtlCol="0" fromWordArt="0" anchor="ctr" anchorCtr="0" forceAA="0" compatLnSpc="1">
               <a:prstTxWarp prst="textNoShape">
                 <a:avLst/>
               </a:prstTxWarp>
@@ -9256,7 +9244,7 @@
             <a:lstStyle/>
             <a:p>
               <a:pPr algn="ctr"/>
-              <a:endParaRPr lang="zh-TW" altLang="en-US" sz="2395"/>
+              <a:endParaRPr lang="zh-TW" altLang="en-US" sz="1607"/>
             </a:p>
           </p:txBody>
         </p:sp>
@@ -9296,7 +9284,7 @@
             </a:fontRef>
           </p:style>
           <p:txBody>
-            <a:bodyPr rot="0" spcFirstLastPara="0" vertOverflow="overflow" horzOverflow="overflow" vert="horz" wrap="square" lIns="121674" tIns="60836" rIns="121674" bIns="60836" numCol="1" spcCol="0" rtlCol="0" fromWordArt="0" anchor="ctr" anchorCtr="0" forceAA="0" compatLnSpc="1">
+            <a:bodyPr rot="0" spcFirstLastPara="0" vertOverflow="overflow" horzOverflow="overflow" vert="horz" wrap="square" lIns="81657" tIns="40828" rIns="81657" bIns="40828" numCol="1" spcCol="0" rtlCol="0" fromWordArt="0" anchor="ctr" anchorCtr="0" forceAA="0" compatLnSpc="1">
               <a:prstTxWarp prst="textNoShape">
                 <a:avLst/>
               </a:prstTxWarp>
@@ -9305,7 +9293,7 @@
             <a:lstStyle/>
             <a:p>
               <a:pPr algn="ctr"/>
-              <a:endParaRPr lang="zh-TW" altLang="en-US" sz="2395"/>
+              <a:endParaRPr lang="zh-TW" altLang="en-US" sz="1607"/>
             </a:p>
           </p:txBody>
         </p:sp>
@@ -9345,7 +9333,7 @@
             </a:fontRef>
           </p:style>
           <p:txBody>
-            <a:bodyPr rot="0" spcFirstLastPara="0" vertOverflow="overflow" horzOverflow="overflow" vert="horz" wrap="square" lIns="121674" tIns="60836" rIns="121674" bIns="60836" numCol="1" spcCol="0" rtlCol="0" fromWordArt="0" anchor="ctr" anchorCtr="0" forceAA="0" compatLnSpc="1">
+            <a:bodyPr rot="0" spcFirstLastPara="0" vertOverflow="overflow" horzOverflow="overflow" vert="horz" wrap="square" lIns="81657" tIns="40828" rIns="81657" bIns="40828" numCol="1" spcCol="0" rtlCol="0" fromWordArt="0" anchor="ctr" anchorCtr="0" forceAA="0" compatLnSpc="1">
               <a:prstTxWarp prst="textNoShape">
                 <a:avLst/>
               </a:prstTxWarp>
@@ -9354,7 +9342,7 @@
             <a:lstStyle/>
             <a:p>
               <a:pPr algn="ctr"/>
-              <a:endParaRPr lang="zh-TW" altLang="en-US" sz="2395"/>
+              <a:endParaRPr lang="zh-TW" altLang="en-US" sz="1607"/>
             </a:p>
           </p:txBody>
         </p:sp>
@@ -9394,7 +9382,7 @@
             </a:fontRef>
           </p:style>
           <p:txBody>
-            <a:bodyPr rot="0" spcFirstLastPara="0" vertOverflow="overflow" horzOverflow="overflow" vert="horz" wrap="square" lIns="121674" tIns="60836" rIns="121674" bIns="60836" numCol="1" spcCol="0" rtlCol="0" fromWordArt="0" anchor="ctr" anchorCtr="0" forceAA="0" compatLnSpc="1">
+            <a:bodyPr rot="0" spcFirstLastPara="0" vertOverflow="overflow" horzOverflow="overflow" vert="horz" wrap="square" lIns="81657" tIns="40828" rIns="81657" bIns="40828" numCol="1" spcCol="0" rtlCol="0" fromWordArt="0" anchor="ctr" anchorCtr="0" forceAA="0" compatLnSpc="1">
               <a:prstTxWarp prst="textNoShape">
                 <a:avLst/>
               </a:prstTxWarp>
@@ -9403,7 +9391,7 @@
             <a:lstStyle/>
             <a:p>
               <a:pPr algn="ctr"/>
-              <a:endParaRPr lang="zh-TW" altLang="en-US" sz="2395"/>
+              <a:endParaRPr lang="zh-TW" altLang="en-US" sz="1607"/>
             </a:p>
           </p:txBody>
         </p:sp>
@@ -9443,7 +9431,7 @@
             </a:fontRef>
           </p:style>
           <p:txBody>
-            <a:bodyPr rot="0" spcFirstLastPara="0" vertOverflow="overflow" horzOverflow="overflow" vert="horz" wrap="square" lIns="121674" tIns="60836" rIns="121674" bIns="60836" numCol="1" spcCol="0" rtlCol="0" fromWordArt="0" anchor="ctr" anchorCtr="0" forceAA="0" compatLnSpc="1">
+            <a:bodyPr rot="0" spcFirstLastPara="0" vertOverflow="overflow" horzOverflow="overflow" vert="horz" wrap="square" lIns="81657" tIns="40828" rIns="81657" bIns="40828" numCol="1" spcCol="0" rtlCol="0" fromWordArt="0" anchor="ctr" anchorCtr="0" forceAA="0" compatLnSpc="1">
               <a:prstTxWarp prst="textNoShape">
                 <a:avLst/>
               </a:prstTxWarp>
@@ -9452,7 +9440,7 @@
             <a:lstStyle/>
             <a:p>
               <a:pPr algn="ctr"/>
-              <a:endParaRPr lang="zh-TW" altLang="en-US" sz="2395"/>
+              <a:endParaRPr lang="zh-TW" altLang="en-US" sz="1607"/>
             </a:p>
           </p:txBody>
         </p:sp>
@@ -9471,8 +9459,8 @@
         </p:nvSpPr>
         <p:spPr>
           <a:xfrm>
-            <a:off x="9734858" y="2682004"/>
-            <a:ext cx="2918183" cy="1238801"/>
+            <a:off x="6533181" y="1778287"/>
+            <a:ext cx="1958428" cy="861774"/>
           </a:xfrm>
           <a:prstGeom prst="rect">
             <a:avLst/>
@@ -9487,7 +9475,7 @@
           <a:p>
             <a:pPr algn="ctr"/>
             <a:r>
-              <a:rPr lang="en-US" altLang="zh-TW" sz="3725" dirty="0">
+              <a:rPr lang="en-US" altLang="zh-TW" sz="2500" dirty="0">
                 <a:latin typeface="Times New Roman" panose="02020603050405020304" pitchFamily="18" charset="0"/>
                 <a:cs typeface="Times New Roman" panose="02020603050405020304" pitchFamily="18" charset="0"/>
               </a:rPr>
@@ -9497,7 +9485,7 @@
           <a:p>
             <a:pPr algn="ctr"/>
             <a:r>
-              <a:rPr lang="en-US" altLang="zh-TW" sz="3725" dirty="0">
+              <a:rPr lang="en-US" altLang="zh-TW" sz="2500" dirty="0">
                 <a:latin typeface="Times New Roman" panose="02020603050405020304" pitchFamily="18" charset="0"/>
                 <a:cs typeface="Times New Roman" panose="02020603050405020304" pitchFamily="18" charset="0"/>
               </a:rPr>
@@ -9550,8 +9538,8 @@
         </p:nvGrpSpPr>
         <p:grpSpPr>
           <a:xfrm>
-            <a:off x="127636" y="66077"/>
-            <a:ext cx="14505303" cy="4008046"/>
+            <a:off x="85659" y="22707"/>
+            <a:ext cx="9734684" cy="2689848"/>
             <a:chOff x="-1290918" y="4482353"/>
             <a:chExt cx="10901083" cy="3012141"/>
           </a:xfrm>
@@ -9578,6 +9566,22 @@
                 <a:gd name="adj" fmla="val 7772"/>
               </a:avLst>
             </a:prstGeom>
+            <a:gradFill flip="none" rotWithShape="1">
+              <a:gsLst>
+                <a:gs pos="0">
+                  <a:schemeClr val="bg1">
+                    <a:lumMod val="95000"/>
+                  </a:schemeClr>
+                </a:gs>
+                <a:gs pos="100000">
+                  <a:schemeClr val="bg1">
+                    <a:lumMod val="85000"/>
+                  </a:schemeClr>
+                </a:gs>
+              </a:gsLst>
+              <a:lin ang="5400000" scaled="1"/>
+              <a:tileRect/>
+            </a:gradFill>
           </p:spPr>
           <p:style>
             <a:lnRef idx="1">
@@ -9594,7 +9598,7 @@
             </a:fontRef>
           </p:style>
           <p:txBody>
-            <a:bodyPr rot="0" spcFirstLastPara="0" vertOverflow="overflow" horzOverflow="overflow" vert="horz" wrap="square" lIns="77264" tIns="38632" rIns="77264" bIns="38632" numCol="1" spcCol="0" rtlCol="0" fromWordArt="0" anchor="ctr" anchorCtr="0" forceAA="0" compatLnSpc="1">
+            <a:bodyPr rot="0" spcFirstLastPara="0" vertOverflow="overflow" horzOverflow="overflow" vert="horz" wrap="square" lIns="51853" tIns="25926" rIns="51853" bIns="25926" numCol="1" spcCol="0" rtlCol="0" fromWordArt="0" anchor="ctr" anchorCtr="0" forceAA="0" compatLnSpc="1">
               <a:prstTxWarp prst="textNoShape">
                 <a:avLst/>
               </a:prstTxWarp>
@@ -9603,12 +9607,12 @@
             <a:lstStyle/>
             <a:p>
               <a:pPr algn="ctr"/>
-              <a:endParaRPr lang="zh-TW" altLang="en-US" sz="1520" dirty="0"/>
+              <a:endParaRPr lang="zh-TW" altLang="en-US" sz="2700" dirty="0"/>
             </a:p>
           </p:txBody>
         </p:sp>
-        <mc:AlternateContent xmlns:mc="http://schemas.openxmlformats.org/markup-compatibility/2006">
-          <mc:Choice xmlns:a14="http://schemas.microsoft.com/office/drawing/2010/main" Requires="a14">
+        <mc:AlternateContent xmlns:mc="http://schemas.openxmlformats.org/markup-compatibility/2006" xmlns:a14="http://schemas.microsoft.com/office/drawing/2010/main">
+          <mc:Choice Requires="a14">
             <p:sp>
               <p:nvSpPr>
                 <p:cNvPr id="241" name="文字方塊 240">
@@ -9624,7 +9628,7 @@
               <p:spPr>
                 <a:xfrm>
                   <a:off x="6866146" y="4620422"/>
-                  <a:ext cx="1669442" cy="500189"/>
+                  <a:ext cx="1669442" cy="568678"/>
                 </a:xfrm>
                 <a:prstGeom prst="rect">
                   <a:avLst/>
@@ -9645,19 +9649,19 @@
                       </m:oMathParaPr>
                       <m:oMath xmlns:m="http://schemas.openxmlformats.org/officeDocument/2006/math">
                         <m:r>
-                          <a:rPr lang="en-US" altLang="zh-TW" sz="3725" i="1">
+                          <a:rPr lang="en-US" altLang="zh-TW" sz="2700" i="1">
                             <a:latin typeface="Cambria Math" panose="02040503050406030204" pitchFamily="18" charset="0"/>
                           </a:rPr>
                           <m:t>𝛼</m:t>
                         </m:r>
                         <m:r>
-                          <a:rPr lang="en-US" altLang="zh-TW" sz="3725" i="1">
+                          <a:rPr lang="en-US" altLang="zh-TW" sz="2700" i="1">
                             <a:latin typeface="Cambria Math" panose="02040503050406030204" pitchFamily="18" charset="0"/>
                           </a:rPr>
                           <m:t>=</m:t>
                         </m:r>
                         <m:r>
-                          <a:rPr lang="en-US" altLang="zh-TW" sz="3725" i="1">
+                          <a:rPr lang="en-US" altLang="zh-TW" sz="2700" i="1">
                             <a:latin typeface="Cambria Math" panose="02040503050406030204" pitchFamily="18" charset="0"/>
                           </a:rPr>
                           <m:t>𝜋</m:t>
@@ -9665,12 +9669,12 @@
                       </m:oMath>
                     </m:oMathPara>
                   </a14:m>
-                  <a:endParaRPr lang="zh-TW" altLang="en-US" sz="3725" dirty="0"/>
+                  <a:endParaRPr lang="zh-TW" altLang="en-US" sz="2700" dirty="0"/>
                 </a:p>
               </p:txBody>
             </p:sp>
           </mc:Choice>
-          <mc:Fallback>
+          <mc:Fallback xmlns="">
             <p:sp>
               <p:nvSpPr>
                 <p:cNvPr id="241" name="文字方塊 240">
@@ -9688,7 +9692,7 @@
               <p:spPr>
                 <a:xfrm>
                   <a:off x="6866146" y="4620422"/>
-                  <a:ext cx="1669442" cy="500189"/>
+                  <a:ext cx="1669442" cy="568678"/>
                 </a:xfrm>
                 <a:prstGeom prst="rect">
                   <a:avLst/>
@@ -9715,8 +9719,8 @@
             </p:sp>
           </mc:Fallback>
         </mc:AlternateContent>
-        <mc:AlternateContent xmlns:mc="http://schemas.openxmlformats.org/markup-compatibility/2006">
-          <mc:Choice xmlns:a14="http://schemas.microsoft.com/office/drawing/2010/main" Requires="a14">
+        <mc:AlternateContent xmlns:mc="http://schemas.openxmlformats.org/markup-compatibility/2006" xmlns:a14="http://schemas.microsoft.com/office/drawing/2010/main">
+          <mc:Choice Requires="a14">
             <p:sp>
               <p:nvSpPr>
                 <p:cNvPr id="245" name="文字方塊 244">
@@ -9731,8 +9735,8 @@
               </p:nvSpPr>
               <p:spPr>
                 <a:xfrm>
-                  <a:off x="4147988" y="4620422"/>
-                  <a:ext cx="1953311" cy="500189"/>
+                  <a:off x="4147987" y="4620422"/>
+                  <a:ext cx="1953311" cy="568678"/>
                 </a:xfrm>
                 <a:prstGeom prst="rect">
                   <a:avLst/>
@@ -9753,13 +9757,13 @@
                       </m:oMathParaPr>
                       <m:oMath xmlns:m="http://schemas.openxmlformats.org/officeDocument/2006/math">
                         <m:r>
-                          <a:rPr lang="en-US" altLang="zh-TW" sz="3725" i="1">
+                          <a:rPr lang="en-US" altLang="zh-TW" sz="2700" i="1">
                             <a:latin typeface="Cambria Math" panose="02040503050406030204" pitchFamily="18" charset="0"/>
                           </a:rPr>
                           <m:t>𝛼</m:t>
                         </m:r>
                         <m:r>
-                          <a:rPr lang="en-US" altLang="zh-TW" sz="3725" i="1">
+                          <a:rPr lang="en-US" altLang="zh-TW" sz="2700" i="1">
                             <a:latin typeface="Cambria Math" panose="02040503050406030204" pitchFamily="18" charset="0"/>
                           </a:rPr>
                           <m:t>=0</m:t>
@@ -9767,12 +9771,12 @@
                       </m:oMath>
                     </m:oMathPara>
                   </a14:m>
-                  <a:endParaRPr lang="zh-TW" altLang="en-US" sz="3725" dirty="0"/>
+                  <a:endParaRPr lang="zh-TW" altLang="en-US" sz="2700" dirty="0"/>
                 </a:p>
               </p:txBody>
             </p:sp>
           </mc:Choice>
-          <mc:Fallback>
+          <mc:Fallback xmlns="">
             <p:sp>
               <p:nvSpPr>
                 <p:cNvPr id="245" name="文字方塊 244">
@@ -9789,8 +9793,8 @@
               </p:nvSpPr>
               <p:spPr>
                 <a:xfrm>
-                  <a:off x="4147988" y="4620422"/>
-                  <a:ext cx="1953311" cy="500189"/>
+                  <a:off x="4147987" y="4620422"/>
+                  <a:ext cx="1953311" cy="568678"/>
                 </a:xfrm>
                 <a:prstGeom prst="rect">
                   <a:avLst/>
@@ -9918,7 +9922,7 @@
           <p:spPr>
             <a:xfrm>
               <a:off x="6594038" y="5632950"/>
-              <a:ext cx="2193084" cy="930988"/>
+              <a:ext cx="2193084" cy="1033962"/>
             </a:xfrm>
             <a:prstGeom prst="rect">
               <a:avLst/>
@@ -9933,7 +9937,7 @@
             <a:p>
               <a:pPr algn="ctr"/>
               <a:r>
-                <a:rPr lang="en-US" altLang="zh-TW" sz="3725" dirty="0">
+                <a:rPr lang="en-US" altLang="zh-TW" sz="2700" dirty="0">
                   <a:latin typeface="Times New Roman" panose="02020603050405020304" pitchFamily="18" charset="0"/>
                   <a:cs typeface="Times New Roman" panose="02020603050405020304" pitchFamily="18" charset="0"/>
                 </a:rPr>
@@ -9943,7 +9947,7 @@
             <a:p>
               <a:pPr algn="ctr"/>
               <a:r>
-                <a:rPr lang="en-US" altLang="zh-TW" sz="3725" dirty="0">
+                <a:rPr lang="en-US" altLang="zh-TW" sz="2700" dirty="0">
                   <a:latin typeface="Times New Roman" panose="02020603050405020304" pitchFamily="18" charset="0"/>
                   <a:cs typeface="Times New Roman" panose="02020603050405020304" pitchFamily="18" charset="0"/>
                 </a:rPr>
@@ -10011,10 +10015,10 @@
           </p:nvGrpSpPr>
           <p:grpSpPr>
             <a:xfrm>
-              <a:off x="5015801" y="5711298"/>
-              <a:ext cx="609103" cy="619431"/>
-              <a:chOff x="6583394" y="1501875"/>
-              <a:chExt cx="1650681" cy="1678673"/>
+              <a:off x="4855808" y="5489084"/>
+              <a:ext cx="999752" cy="969731"/>
+              <a:chOff x="6149807" y="899671"/>
+              <a:chExt cx="2709346" cy="2627996"/>
             </a:xfrm>
           </p:grpSpPr>
           <p:grpSp>
@@ -10090,7 +10094,7 @@
                 <a:lstStyle/>
                 <a:p>
                   <a:pPr algn="ctr"/>
-                  <a:endParaRPr lang="zh-TW" altLang="en-US" sz="1520">
+                  <a:endParaRPr lang="zh-TW" altLang="en-US" sz="2700">
                     <a:solidFill>
                       <a:schemeClr val="bg1"/>
                     </a:solidFill>
@@ -10151,7 +10155,7 @@
                 <a:lstStyle/>
                 <a:p>
                   <a:pPr algn="ctr"/>
-                  <a:endParaRPr lang="zh-TW" altLang="en-US" sz="1520" dirty="0">
+                  <a:endParaRPr lang="zh-TW" altLang="en-US" sz="2700" dirty="0">
                     <a:solidFill>
                       <a:schemeClr val="bg1"/>
                     </a:solidFill>
@@ -10160,8 +10164,8 @@
               </p:txBody>
             </p:sp>
           </p:grpSp>
-          <mc:AlternateContent xmlns:mc="http://schemas.openxmlformats.org/markup-compatibility/2006">
-            <mc:Choice xmlns:a14="http://schemas.microsoft.com/office/drawing/2010/main" Requires="a14">
+          <mc:AlternateContent xmlns:mc="http://schemas.openxmlformats.org/markup-compatibility/2006" xmlns:a14="http://schemas.microsoft.com/office/drawing/2010/main">
+            <mc:Choice Requires="a14">
               <p:sp>
                 <p:nvSpPr>
                   <p:cNvPr id="287" name="文字方塊 286">
@@ -10176,8 +10180,8 @@
                 </p:nvSpPr>
                 <p:spPr>
                   <a:xfrm>
-                    <a:off x="6583394" y="1501875"/>
-                    <a:ext cx="416136" cy="998101"/>
+                    <a:off x="6149807" y="899671"/>
+                    <a:ext cx="1899983" cy="1640763"/>
                   </a:xfrm>
                   <a:prstGeom prst="rect">
                     <a:avLst/>
@@ -10200,14 +10204,14 @@
                           <m:sSub>
                             <m:sSubPr>
                               <m:ctrlPr>
-                                <a:rPr lang="en-US" altLang="zh-TW" sz="2395" i="1">
+                                <a:rPr lang="en-US" altLang="zh-TW" sz="2700" i="1">
                                   <a:latin typeface="Cambria Math" panose="02040503050406030204" pitchFamily="18" charset="0"/>
                                 </a:rPr>
                               </m:ctrlPr>
                             </m:sSubPr>
                             <m:e>
                               <m:r>
-                                <a:rPr lang="en-US" altLang="zh-TW" sz="2395" i="1">
+                                <a:rPr lang="en-US" altLang="zh-TW" sz="2700" i="1">
                                   <a:latin typeface="Cambria Math" panose="02040503050406030204" pitchFamily="18" charset="0"/>
                                 </a:rPr>
                                 <m:t>𝑄</m:t>
@@ -10215,7 +10219,7 @@
                             </m:e>
                             <m:sub>
                               <m:r>
-                                <a:rPr lang="en-US" altLang="zh-TW" sz="2395" i="1">
+                                <a:rPr lang="en-US" altLang="zh-TW" sz="2700" i="1">
                                   <a:latin typeface="Cambria Math" panose="02040503050406030204" pitchFamily="18" charset="0"/>
                                 </a:rPr>
                                 <m:t>𝑦</m:t>
@@ -10225,12 +10229,12 @@
                         </m:oMath>
                       </m:oMathPara>
                     </a14:m>
-                    <a:endParaRPr lang="en-US" altLang="zh-TW" sz="2395" dirty="0"/>
+                    <a:endParaRPr lang="en-US" altLang="zh-TW" sz="2700" dirty="0"/>
                   </a:p>
                 </p:txBody>
               </p:sp>
             </mc:Choice>
-            <mc:Fallback>
+            <mc:Fallback xmlns="">
               <p:sp>
                 <p:nvSpPr>
                   <p:cNvPr id="287" name="文字方塊 286">
@@ -10247,8 +10251,8 @@
                 </p:nvSpPr>
                 <p:spPr>
                   <a:xfrm>
-                    <a:off x="6583394" y="1501875"/>
-                    <a:ext cx="416136" cy="998101"/>
+                    <a:off x="6149807" y="899671"/>
+                    <a:ext cx="1899983" cy="1640763"/>
                   </a:xfrm>
                   <a:prstGeom prst="rect">
                     <a:avLst/>
@@ -10256,7 +10260,7 @@
                   <a:blipFill>
                     <a:blip r:embed="rId7"/>
                     <a:stretch>
-                      <a:fillRect l="-21212" r="-151515" b="-7500"/>
+                      <a:fillRect/>
                     </a:stretch>
                   </a:blipFill>
                 </p:spPr>
@@ -10275,8 +10279,8 @@
               </p:sp>
             </mc:Fallback>
           </mc:AlternateContent>
-          <mc:AlternateContent xmlns:mc="http://schemas.openxmlformats.org/markup-compatibility/2006">
-            <mc:Choice xmlns:a14="http://schemas.microsoft.com/office/drawing/2010/main" Requires="a14">
+          <mc:AlternateContent xmlns:mc="http://schemas.openxmlformats.org/markup-compatibility/2006" xmlns:a14="http://schemas.microsoft.com/office/drawing/2010/main">
+            <mc:Choice Requires="a14">
               <p:sp>
                 <p:nvSpPr>
                   <p:cNvPr id="288" name="文字方塊 287">
@@ -10291,8 +10295,8 @@
                 </p:nvSpPr>
                 <p:spPr>
                   <a:xfrm>
-                    <a:off x="7165989" y="2241868"/>
-                    <a:ext cx="1068086" cy="938680"/>
+                    <a:off x="7079272" y="1986534"/>
+                    <a:ext cx="1779881" cy="1541133"/>
                   </a:xfrm>
                   <a:prstGeom prst="rect">
                     <a:avLst/>
@@ -10315,14 +10319,14 @@
                           <m:sSub>
                             <m:sSubPr>
                               <m:ctrlPr>
-                                <a:rPr lang="en-US" altLang="zh-TW" sz="2395" i="1">
+                                <a:rPr lang="en-US" altLang="zh-TW" sz="2700" i="1">
                                   <a:latin typeface="Cambria Math" panose="02040503050406030204" pitchFamily="18" charset="0"/>
                                 </a:rPr>
                               </m:ctrlPr>
                             </m:sSubPr>
                             <m:e>
                               <m:r>
-                                <a:rPr lang="en-US" altLang="zh-TW" sz="2395" i="1">
+                                <a:rPr lang="en-US" altLang="zh-TW" sz="2700" i="1">
                                   <a:latin typeface="Cambria Math" panose="02040503050406030204" pitchFamily="18" charset="0"/>
                                 </a:rPr>
                                 <m:t>𝑄</m:t>
@@ -10330,7 +10334,7 @@
                             </m:e>
                             <m:sub>
                               <m:r>
-                                <a:rPr lang="en-US" altLang="zh-TW" sz="2395" i="1">
+                                <a:rPr lang="en-US" altLang="zh-TW" sz="2700" i="1">
                                   <a:latin typeface="Cambria Math" panose="02040503050406030204" pitchFamily="18" charset="0"/>
                                 </a:rPr>
                                 <m:t>𝑥</m:t>
@@ -10340,12 +10344,12 @@
                         </m:oMath>
                       </m:oMathPara>
                     </a14:m>
-                    <a:endParaRPr lang="en-US" altLang="zh-TW" sz="2395" dirty="0"/>
+                    <a:endParaRPr lang="en-US" altLang="zh-TW" sz="2700" dirty="0"/>
                   </a:p>
                 </p:txBody>
               </p:sp>
             </mc:Choice>
-            <mc:Fallback>
+            <mc:Fallback xmlns="">
               <p:sp>
                 <p:nvSpPr>
                   <p:cNvPr id="288" name="文字方塊 287">
@@ -10362,8 +10366,8 @@
                 </p:nvSpPr>
                 <p:spPr>
                   <a:xfrm>
-                    <a:off x="7165989" y="2241868"/>
-                    <a:ext cx="1068086" cy="938680"/>
+                    <a:off x="7079272" y="1986534"/>
+                    <a:ext cx="1779881" cy="1541133"/>
                   </a:xfrm>
                   <a:prstGeom prst="rect">
                     <a:avLst/>
@@ -10371,7 +10375,7 @@
                   <a:blipFill>
                     <a:blip r:embed="rId8"/>
                     <a:stretch>
-                      <a:fillRect l="-8046" b="-13333"/>
+                      <a:fillRect/>
                     </a:stretch>
                   </a:blipFill>
                 </p:spPr>
@@ -10391,8 +10395,8 @@
             </mc:Fallback>
           </mc:AlternateContent>
         </p:grpSp>
-        <mc:AlternateContent xmlns:mc="http://schemas.openxmlformats.org/markup-compatibility/2006">
-          <mc:Choice xmlns:a14="http://schemas.microsoft.com/office/drawing/2010/main" Requires="a14">
+        <mc:AlternateContent xmlns:mc="http://schemas.openxmlformats.org/markup-compatibility/2006" xmlns:a14="http://schemas.microsoft.com/office/drawing/2010/main">
+          <mc:Choice Requires="a14">
             <p:sp>
               <p:nvSpPr>
                 <p:cNvPr id="98" name="文字方塊 97">
@@ -10407,8 +10411,8 @@
               </p:nvSpPr>
               <p:spPr>
                 <a:xfrm>
-                  <a:off x="4556306" y="6835226"/>
-                  <a:ext cx="241814" cy="315630"/>
+                  <a:off x="4072767" y="6550792"/>
+                  <a:ext cx="746846" cy="568678"/>
                 </a:xfrm>
                 <a:prstGeom prst="rect">
                   <a:avLst/>
@@ -10428,17 +10432,23 @@
                         <m:jc m:val="centerGroup"/>
                       </m:oMathParaPr>
                       <m:oMath xmlns:m="http://schemas.openxmlformats.org/officeDocument/2006/math">
+                        <m:r>
+                          <a:rPr lang="en-US" altLang="zh-TW" sz="2700" i="1">
+                            <a:latin typeface="Cambria Math" panose="02040503050406030204" pitchFamily="18" charset="0"/>
+                          </a:rPr>
+                          <m:t>0.1</m:t>
+                        </m:r>
                         <m:sSub>
                           <m:sSubPr>
                             <m:ctrlPr>
-                              <a:rPr lang="en-US" altLang="zh-TW" sz="2129" i="1">
+                              <a:rPr lang="en-US" altLang="zh-TW" sz="2700" i="1">
                                 <a:latin typeface="Cambria Math" panose="02040503050406030204" pitchFamily="18" charset="0"/>
                               </a:rPr>
                             </m:ctrlPr>
                           </m:sSubPr>
                           <m:e>
                             <m:r>
-                              <a:rPr lang="en-US" altLang="zh-TW" sz="2129" i="1">
+                              <a:rPr lang="en-US" altLang="zh-TW" sz="2700" i="1">
                                 <a:latin typeface="Cambria Math" panose="02040503050406030204" pitchFamily="18" charset="0"/>
                               </a:rPr>
                               <m:t>𝑄</m:t>
@@ -10446,7 +10456,7 @@
                           </m:e>
                           <m:sub>
                             <m:r>
-                              <a:rPr lang="en-US" altLang="zh-TW" sz="2129" i="1">
+                              <a:rPr lang="en-US" altLang="zh-TW" sz="2700" i="1">
                                 <a:latin typeface="Cambria Math" panose="02040503050406030204" pitchFamily="18" charset="0"/>
                               </a:rPr>
                               <m:t>𝑐</m:t>
@@ -10456,12 +10466,12 @@
                       </m:oMath>
                     </m:oMathPara>
                   </a14:m>
-                  <a:endParaRPr lang="en-US" altLang="zh-TW" sz="2129" dirty="0"/>
+                  <a:endParaRPr lang="en-US" altLang="zh-TW" sz="2700" dirty="0"/>
                 </a:p>
               </p:txBody>
             </p:sp>
           </mc:Choice>
-          <mc:Fallback>
+          <mc:Fallback xmlns="">
             <p:sp>
               <p:nvSpPr>
                 <p:cNvPr id="98" name="文字方塊 97">
@@ -10478,8 +10488,8 @@
               </p:nvSpPr>
               <p:spPr>
                 <a:xfrm>
-                  <a:off x="4556306" y="6835226"/>
-                  <a:ext cx="241814" cy="315630"/>
+                  <a:off x="4072767" y="6550792"/>
+                  <a:ext cx="746846" cy="568678"/>
                 </a:xfrm>
                 <a:prstGeom prst="rect">
                   <a:avLst/>
@@ -10487,7 +10497,7 @@
                 <a:blipFill>
                   <a:blip r:embed="rId9"/>
                   <a:stretch>
-                    <a:fillRect l="-9434" r="-30189" b="-14493"/>
+                    <a:fillRect r="-33028"/>
                   </a:stretch>
                 </a:blipFill>
               </p:spPr>
